--- a/slides/Malaria_Phase2_Short.pptx
+++ b/slides/Malaria_Phase2_Short.pptx
@@ -16,9 +16,11 @@
     <p:sldId id="264" r:id="rId10"/>
     <p:sldId id="265" r:id="rId11"/>
     <p:sldId id="266" r:id="rId12"/>
+    <p:sldId id="267" r:id="rId13"/>
+    <p:sldId id="268" r:id="rId14"/>
   </p:sldIdLst>
   <p:notesMasterIdLst>
-    <p:notesMasterId r:id="rId13"/>
+    <p:notesMasterId r:id="rId15"/>
   </p:notesMasterIdLst>
   <p:sldSz cx="12192000" cy="6858000"/>
   <p:notesSz cx="6858000" cy="12192000"/>
@@ -117,13 +119,13 @@
   <p:extLst>
     <p:ext uri="{521415D9-36F7-43E2-AB2F-B90AF26B5E84}">
       <p14:sectionLst xmlns:p14="http://schemas.microsoft.com/office/powerpoint/2010/main">
-        <p14:section name="Opening" id="{5f4e72d3-3775-075f-7b8b-32aec0f6eede}">
+        <p14:section name="Opening" id="{f58b49b4-ac94-f58a-a57c-5cbc1cc6605d}">
           <p14:sldIdLst>
             <p14:sldId id="256"/>
             <p14:sldId id="257"/>
           </p14:sldIdLst>
         </p14:section>
-        <p14:section name="Reproduction" id="{553c29a0-4526-d01b-7893-389cd2411bea}">
+        <p14:section name="Reproduction" id="{2c434f80-7890-6190-5b1c-a87183492ac4}">
           <p14:sldIdLst>
             <p14:sldId id="258"/>
             <p14:sldId id="259"/>
@@ -131,17 +133,19 @@
             <p14:sldId id="261"/>
           </p14:sldIdLst>
         </p14:section>
-        <p14:section name="Results" id="{262dae62-1c56-18be-34a9-d6d7c13dc42f}">
+        <p14:section name="Results" id="{2c009677-d917-8b8e-b452-54af5d62aafe}">
           <p14:sldIdLst>
             <p14:sldId id="262"/>
             <p14:sldId id="263"/>
+            <p14:sldId id="264"/>
+            <p14:sldId id="265"/>
           </p14:sldIdLst>
         </p14:section>
-        <p14:section name="Engineering and next steps" id="{65f99e56-d893-9d8d-d662-713fa1e94404}">
+        <p14:section name="Engineering and next steps" id="{ee4c47f7-fcd9-3873-5b38-02c75b41b0e4}">
           <p14:sldIdLst>
-            <p14:sldId id="264"/>
-            <p14:sldId id="265"/>
             <p14:sldId id="266"/>
+            <p14:sldId id="267"/>
+            <p14:sldId id="268"/>
           </p14:sldIdLst>
         </p14:section>
       </p14:sectionLst>
@@ -151,737 +155,6 @@
     </p:ext>
   </p:extLst>
 </p:presentation>
-</file>
-
-<file path=ppt/charts/chart4.xml><?xml version="1.0" encoding="utf-8"?>
-<c:chartSpace xmlns:c="http://schemas.openxmlformats.org/drawingml/2006/chart" xmlns:a="http://schemas.openxmlformats.org/drawingml/2006/main" xmlns:r="http://schemas.openxmlformats.org/officeDocument/2006/relationships">
-  <c:date1904 val="0"/>
-  <c:roundedCorners val="1"/>
-  <c:chart>
-    <c:title>
-      <c:tx>
-        <c:rich>
-          <a:bodyPr/>
-          <a:lstStyle/>
-          <a:p>
-            <a:pPr>
-              <a:defRPr sz="1300" b="0" i="0" u="none" strike="noStrike">
-                <a:solidFill>
-                  <a:srgbClr val="1E293B"/>
-                </a:solidFill>
-                <a:latin typeface="+mn-lt"/>
-              </a:defRPr>
-            </a:pPr>
-            <a:r>
-              <a:rPr sz="1300" b="0" i="0" u="none" strike="noStrike">
-                <a:solidFill>
-                  <a:srgbClr val="1E293B"/>
-                </a:solidFill>
-                <a:latin typeface="+mn-lt"/>
-              </a:rPr>
-              <a:t>Accuracy on each fold's CV test part (%)</a:t>
-            </a:r>
-          </a:p>
-        </c:rich>
-      </c:tx>
-      <c:layout/>
-      <c:overlay val="0"/>
-    </c:title>
-    <c:autoTitleDeleted val="0"/>
-    <c:plotArea>
-      <c:layout/>
-      <c:barChart>
-        <c:barDir val="col"/>
-        <c:grouping val="clustered"/>
-        <c:varyColors val="0"/>
-        <c:ser>
-          <c:idx val="0"/>
-          <c:order val="0"/>
-          <c:tx>
-            <c:strRef>
-              <c:f>Sheet1!$B$1</c:f>
-              <c:strCache>
-                <c:ptCount val="1"/>
-                <c:pt idx="0">
-                  <c:v>Paper (Table 5)</c:v>
-                </c:pt>
-              </c:strCache>
-            </c:strRef>
-          </c:tx>
-          <c:spPr>
-            <a:solidFill>
-              <a:srgbClr val="9FC0C9"/>
-            </a:solidFill>
-            <a:effectLst/>
-          </c:spPr>
-          <c:invertIfNegative val="0"/>
-          <c:dLbls>
-            <c:numFmt formatCode="#,##0" sourceLinked="0"/>
-            <c:txPr>
-              <a:bodyPr/>
-              <a:lstStyle/>
-              <a:p>
-                <a:pPr>
-                  <a:defRPr b="0" i="0" strike="noStrike" sz="1200" u="none">
-                    <a:solidFill>
-                      <a:srgbClr val="000000"/>
-                    </a:solidFill>
-                    <a:latin typeface="Arial"/>
-                  </a:defRPr>
-                </a:pPr>
-              </a:p>
-            </c:txPr>
-            <c:showLegendKey val="0"/>
-            <c:showVal val="0"/>
-            <c:showCatName val="0"/>
-            <c:showSerName val="0"/>
-            <c:showPercent val="0"/>
-            <c:showBubbleSize val="0"/>
-            <c:showLeaderLines val="0"/>
-          </c:dLbls>
-          <c:cat>
-            <c:multiLvlStrRef>
-              <c:f>Sheet1!$A$2:$A$11</c:f>
-              <c:multiLvlStrCache>
-                <c:ptCount val="10"/>
-                <c:lvl>
-                  <c:pt idx="0">
-                    <c:v>Fold 0</c:v>
-                  </c:pt>
-                  <c:pt idx="1">
-                    <c:v>Fold 1</c:v>
-                  </c:pt>
-                  <c:pt idx="2">
-                    <c:v>Fold 2</c:v>
-                  </c:pt>
-                  <c:pt idx="3">
-                    <c:v>Fold 3</c:v>
-                  </c:pt>
-                  <c:pt idx="4">
-                    <c:v>Fold 4</c:v>
-                  </c:pt>
-                  <c:pt idx="5">
-                    <c:v>Fold 5</c:v>
-                  </c:pt>
-                  <c:pt idx="6">
-                    <c:v>Fold 6</c:v>
-                  </c:pt>
-                  <c:pt idx="7">
-                    <c:v>Fold 7</c:v>
-                  </c:pt>
-                  <c:pt idx="8">
-                    <c:v>Fold 8</c:v>
-                  </c:pt>
-                  <c:pt idx="9">
-                    <c:v>Fold 9</c:v>
-                  </c:pt>
-                </c:lvl>
-              </c:multiLvlStrCache>
-            </c:multiLvlStrRef>
-          </c:cat>
-          <c:val>
-            <c:numRef>
-              <c:f>Sheet1!$B$2:$B$11</c:f>
-              <c:numCache>
-                <c:formatCode>General</c:formatCode>
-                <c:ptCount val="10"/>
-                <c:pt idx="0">
-                  <c:v>97.4603</c:v>
-                </c:pt>
-                <c:pt idx="1">
-                  <c:v>97.7324</c:v>
-                </c:pt>
-                <c:pt idx="2">
-                  <c:v>97.6871</c:v>
-                </c:pt>
-                <c:pt idx="3">
-                  <c:v>97.4603</c:v>
-                </c:pt>
-                <c:pt idx="4">
-                  <c:v>97.3243</c:v>
-                </c:pt>
-                <c:pt idx="5">
-                  <c:v>97.415</c:v>
-                </c:pt>
-                <c:pt idx="6">
-                  <c:v>97.6407</c:v>
-                </c:pt>
-                <c:pt idx="7">
-                  <c:v>98.3666</c:v>
-                </c:pt>
-                <c:pt idx="8">
-                  <c:v>97.0508</c:v>
-                </c:pt>
-                <c:pt idx="9">
-                  <c:v>97.5045</c:v>
-                </c:pt>
-              </c:numCache>
-            </c:numRef>
-          </c:val>
-        </c:ser>
-        <c:ser>
-          <c:idx val="1"/>
-          <c:order val="1"/>
-          <c:tx>
-            <c:strRef>
-              <c:f>Sheet1!$C$1</c:f>
-              <c:strCache>
-                <c:ptCount val="1"/>
-                <c:pt idx="0">
-                  <c:v>Ours (paper protocol)</c:v>
-                </c:pt>
-              </c:strCache>
-            </c:strRef>
-          </c:tx>
-          <c:spPr>
-            <a:solidFill>
-              <a:srgbClr val="137C8E"/>
-            </a:solidFill>
-            <a:effectLst/>
-          </c:spPr>
-          <c:invertIfNegative val="0"/>
-          <c:dLbls>
-            <c:numFmt formatCode="#,##0" sourceLinked="0"/>
-            <c:txPr>
-              <a:bodyPr/>
-              <a:lstStyle/>
-              <a:p>
-                <a:pPr>
-                  <a:defRPr b="0" i="0" strike="noStrike" sz="1200" u="none">
-                    <a:solidFill>
-                      <a:srgbClr val="000000"/>
-                    </a:solidFill>
-                    <a:latin typeface="Arial"/>
-                  </a:defRPr>
-                </a:pPr>
-              </a:p>
-            </c:txPr>
-            <c:showLegendKey val="0"/>
-            <c:showVal val="0"/>
-            <c:showCatName val="0"/>
-            <c:showSerName val="0"/>
-            <c:showPercent val="0"/>
-            <c:showBubbleSize val="0"/>
-            <c:showLeaderLines val="0"/>
-          </c:dLbls>
-          <c:cat>
-            <c:multiLvlStrRef>
-              <c:f>Sheet1!$A$2:$A$11</c:f>
-              <c:multiLvlStrCache>
-                <c:ptCount val="10"/>
-                <c:lvl>
-                  <c:pt idx="0">
-                    <c:v>Fold 0</c:v>
-                  </c:pt>
-                  <c:pt idx="1">
-                    <c:v>Fold 1</c:v>
-                  </c:pt>
-                  <c:pt idx="2">
-                    <c:v>Fold 2</c:v>
-                  </c:pt>
-                  <c:pt idx="3">
-                    <c:v>Fold 3</c:v>
-                  </c:pt>
-                  <c:pt idx="4">
-                    <c:v>Fold 4</c:v>
-                  </c:pt>
-                  <c:pt idx="5">
-                    <c:v>Fold 5</c:v>
-                  </c:pt>
-                  <c:pt idx="6">
-                    <c:v>Fold 6</c:v>
-                  </c:pt>
-                  <c:pt idx="7">
-                    <c:v>Fold 7</c:v>
-                  </c:pt>
-                  <c:pt idx="8">
-                    <c:v>Fold 8</c:v>
-                  </c:pt>
-                  <c:pt idx="9">
-                    <c:v>Fold 9</c:v>
-                  </c:pt>
-                </c:lvl>
-              </c:multiLvlStrCache>
-            </c:multiLvlStrRef>
-          </c:cat>
-          <c:val>
-            <c:numRef>
-              <c:f>Sheet1!$C$2:$C$11</c:f>
-              <c:numCache>
-                <c:formatCode>General</c:formatCode>
-                <c:ptCount val="10"/>
-                <c:pt idx="0">
-                  <c:v>96.96</c:v>
-                </c:pt>
-                <c:pt idx="1">
-                  <c:v>97.91</c:v>
-                </c:pt>
-                <c:pt idx="2">
-                  <c:v>97.41</c:v>
-                </c:pt>
-                <c:pt idx="3">
-                  <c:v>97.6</c:v>
-                </c:pt>
-                <c:pt idx="4">
-                  <c:v>97.46</c:v>
-                </c:pt>
-                <c:pt idx="5">
-                  <c:v>97.6</c:v>
-                </c:pt>
-                <c:pt idx="6">
-                  <c:v>97.73</c:v>
-                </c:pt>
-                <c:pt idx="7">
-                  <c:v>97.23</c:v>
-                </c:pt>
-                <c:pt idx="8">
-                  <c:v>97.96</c:v>
-                </c:pt>
-                <c:pt idx="9">
-                  <c:v>97.64</c:v>
-                </c:pt>
-              </c:numCache>
-            </c:numRef>
-          </c:val>
-        </c:ser>
-        <c:dLbls>
-          <c:numFmt formatCode="#,##0" sourceLinked="0"/>
-          <c:txPr>
-            <a:bodyPr/>
-            <a:lstStyle/>
-            <a:p>
-              <a:pPr>
-                <a:defRPr b="0" i="0" strike="noStrike" sz="1200" u="none">
-                  <a:solidFill>
-                    <a:srgbClr val="000000"/>
-                  </a:solidFill>
-                  <a:latin typeface="Arial"/>
-                </a:defRPr>
-              </a:pPr>
-            </a:p>
-          </c:txPr>
-          <c:showLegendKey val="0"/>
-          <c:showVal val="0"/>
-          <c:showCatName val="0"/>
-          <c:showSerName val="0"/>
-          <c:showPercent val="0"/>
-          <c:showBubbleSize val="0"/>
-          <c:showLeaderLines val="0"/>
-        </c:dLbls>
-        <c:gapWidth val="60"/>
-        <c:overlap val="0"/>
-        <c:axId val="2094734554"/>
-        <c:axId val="2094734552"/>
-        <c:axId val="2094734556"/>
-      </c:barChart>
-      <c:catAx>
-        <c:axId val="2094734554"/>
-        <c:scaling>
-          <c:orientation val="minMax"/>
-        </c:scaling>
-        <c:delete val="0"/>
-        <c:axPos val="b"/>
-        <c:numFmt formatCode="General" sourceLinked="1"/>
-        <c:majorTickMark val="out"/>
-        <c:minorTickMark val="none"/>
-        <c:tickLblPos val="low"/>
-        <c:spPr>
-          <a:ln w="12700" cap="flat">
-            <a:solidFill>
-              <a:srgbClr val="888888"/>
-            </a:solidFill>
-            <a:prstDash val="solid"/>
-            <a:round/>
-          </a:ln>
-        </c:spPr>
-        <c:txPr>
-          <a:bodyPr/>
-          <a:lstStyle/>
-          <a:p>
-            <a:pPr>
-              <a:defRPr sz="1100" b="0" i="0" u="none" strike="noStrike">
-                <a:solidFill>
-                  <a:srgbClr val="64748B"/>
-                </a:solidFill>
-                <a:latin typeface="+mn-lt"/>
-              </a:defRPr>
-            </a:pPr>
-            <a:endParaRPr lang="en-US"/>
-          </a:p>
-        </c:txPr>
-        <c:crossAx val="2094734552"/>
-        <c:crosses val="autoZero"/>
-        <c:auto val="1"/>
-        <c:lblAlgn val="ctr"/>
-        <c:noMultiLvlLbl val="1"/>
-      </c:catAx>
-      <c:valAx>
-        <c:axId val="2094734552"/>
-        <c:scaling>
-          <c:orientation val="minMax"/>
-          <c:max val="98.6"/>
-          <c:min val="96"/>
-        </c:scaling>
-        <c:delete val="0"/>
-        <c:axPos val="l"/>
-        <c:majorGridlines>
-          <c:spPr>
-            <a:ln w="9525" cap="flat">
-              <a:solidFill>
-                <a:srgbClr val="E2E8F0"/>
-              </a:solidFill>
-              <a:prstDash val="solid"/>
-              <a:round/>
-            </a:ln>
-          </c:spPr>
-        </c:majorGridlines>
-        <c:numFmt formatCode="0.0" sourceLinked="0"/>
-        <c:majorTickMark val="out"/>
-        <c:minorTickMark val="none"/>
-        <c:tickLblPos val="nextTo"/>
-        <c:spPr>
-          <a:ln w="12700" cap="flat">
-            <a:solidFill>
-              <a:srgbClr val="888888"/>
-            </a:solidFill>
-            <a:prstDash val="solid"/>
-            <a:round/>
-          </a:ln>
-        </c:spPr>
-        <c:txPr>
-          <a:bodyPr/>
-          <a:lstStyle/>
-          <a:p>
-            <a:pPr>
-              <a:defRPr sz="1100" b="0" i="0" u="none" strike="noStrike">
-                <a:solidFill>
-                  <a:srgbClr val="64748B"/>
-                </a:solidFill>
-                <a:latin typeface="+mn-lt"/>
-              </a:defRPr>
-            </a:pPr>
-            <a:endParaRPr lang="en-US"/>
-          </a:p>
-        </c:txPr>
-        <c:crossAx val="2094734554"/>
-        <c:crosses val="autoZero"/>
-        <c:crossBetween val="between"/>
-        <c:majorUnit val="0.5"/>
-      </c:valAx>
-      <c:spPr>
-        <a:noFill/>
-        <a:ln>
-          <a:noFill/>
-        </a:ln>
-        <a:effectLst/>
-      </c:spPr>
-    </c:plotArea>
-    <c:legend>
-      <c:legendPos val="t"/>
-      <c:overlay val="0"/>
-      <c:txPr>
-        <a:bodyPr/>
-        <a:lstStyle/>
-        <a:p>
-          <a:pPr>
-            <a:defRPr sz="1200">
-              <a:latin typeface="+mn-lt"/>
-              <a:cs typeface="+mn-lt"/>
-            </a:defRPr>
-          </a:pPr>
-          <a:endParaRPr lang="en-US"/>
-        </a:p>
-      </c:txPr>
-    </c:legend>
-    <c:plotVisOnly val="1"/>
-    <c:dispBlanksAs val="span"/>
-  </c:chart>
-  <c:spPr>
-    <a:noFill/>
-    <a:ln>
-      <a:noFill/>
-    </a:ln>
-    <a:effectLst/>
-  </c:spPr>
-  <c:externalData r:id="rId1">
-    <c:autoUpdate val="0"/>
-  </c:externalData>
-</c:chartSpace>
-</file>
-
-<file path=ppt/charts/chart5.xml><?xml version="1.0" encoding="utf-8"?>
-<c:chartSpace xmlns:c="http://schemas.openxmlformats.org/drawingml/2006/chart" xmlns:a="http://schemas.openxmlformats.org/drawingml/2006/main" xmlns:r="http://schemas.openxmlformats.org/officeDocument/2006/relationships">
-  <c:date1904 val="0"/>
-  <c:roundedCorners val="1"/>
-  <c:chart>
-    <c:title>
-      <c:tx>
-        <c:rich>
-          <a:bodyPr/>
-          <a:lstStyle/>
-          <a:p>
-            <a:pPr>
-              <a:defRPr sz="1300" b="0" i="0" u="none" strike="noStrike">
-                <a:solidFill>
-                  <a:srgbClr val="1E293B"/>
-                </a:solidFill>
-                <a:latin typeface="+mn-lt"/>
-              </a:defRPr>
-            </a:pPr>
-            <a:r>
-              <a:rPr sz="1300" b="0" i="0" u="none" strike="noStrike">
-                <a:solidFill>
-                  <a:srgbClr val="1E293B"/>
-                </a:solidFill>
-                <a:latin typeface="+mn-lt"/>
-              </a:rPr>
-              <a:t>Training time per fold</a:t>
-            </a:r>
-          </a:p>
-        </c:rich>
-      </c:tx>
-      <c:layout/>
-      <c:overlay val="0"/>
-    </c:title>
-    <c:autoTitleDeleted val="0"/>
-    <c:plotArea>
-      <c:layout/>
-      <c:barChart>
-        <c:barDir val="bar"/>
-        <c:grouping val="clustered"/>
-        <c:varyColors val="0"/>
-        <c:ser>
-          <c:idx val="0"/>
-          <c:order val="0"/>
-          <c:tx>
-            <c:strRef>
-              <c:f>Sheet1!$B$1</c:f>
-              <c:strCache>
-                <c:ptCount val="1"/>
-                <c:pt idx="0">
-                  <c:v>Minutes per fold</c:v>
-                </c:pt>
-              </c:strCache>
-            </c:strRef>
-          </c:tx>
-          <c:spPr>
-            <a:solidFill>
-              <a:srgbClr val="9FC0C9"/>
-            </a:solidFill>
-            <a:effectLst/>
-          </c:spPr>
-          <c:invertIfNegative val="0"/>
-          <c:dLbls>
-            <c:numFmt formatCode="0&quot; min&quot;" sourceLinked="0"/>
-            <c:txPr>
-              <a:bodyPr/>
-              <a:lstStyle/>
-              <a:p>
-                <a:pPr>
-                  <a:defRPr b="0" i="0" strike="noStrike" sz="1300" u="none">
-                    <a:solidFill>
-                      <a:srgbClr val="1E293B"/>
-                    </a:solidFill>
-                    <a:latin typeface="+mn-lt"/>
-                  </a:defRPr>
-                </a:pPr>
-              </a:p>
-            </c:txPr>
-            <c:showLegendKey val="0"/>
-            <c:showVal val="1"/>
-            <c:showCatName val="0"/>
-            <c:showSerName val="0"/>
-            <c:showPercent val="0"/>
-            <c:showBubbleSize val="0"/>
-            <c:showLeaderLines val="0"/>
-          </c:dLbls>
-          <c:dPt>
-            <c:idx val="0"/>
-            <c:invertIfNegative val="0"/>
-            <c:bubble3D val="0"/>
-            <c:spPr>
-              <a:solidFill>
-                <a:srgbClr val="9FC0C9"/>
-              </a:solidFill>
-              <a:effectLst/>
-            </c:spPr>
-          </c:dPt>
-          <c:dPt>
-            <c:idx val="1"/>
-            <c:invertIfNegative val="0"/>
-            <c:bubble3D val="0"/>
-            <c:spPr>
-              <a:solidFill>
-                <a:srgbClr val="137C8E"/>
-              </a:solidFill>
-              <a:effectLst/>
-            </c:spPr>
-          </c:dPt>
-          <c:cat>
-            <c:multiLvlStrRef>
-              <c:f>Sheet1!$A$2:$A$3</c:f>
-              <c:multiLvlStrCache>
-                <c:ptCount val="2"/>
-                <c:lvl>
-                  <c:pt idx="0">
-                    <c:v>Paper · GTX 1050</c:v>
-                  </c:pt>
-                  <c:pt idx="1">
-                    <c:v>Ours · RTX 4090</c:v>
-                  </c:pt>
-                </c:lvl>
-              </c:multiLvlStrCache>
-            </c:multiLvlStrRef>
-          </c:cat>
-          <c:val>
-            <c:numRef>
-              <c:f>Sheet1!$B$2:$B$3</c:f>
-              <c:numCache>
-                <c:formatCode>General</c:formatCode>
-                <c:ptCount val="2"/>
-                <c:pt idx="0">
-                  <c:v>285.9</c:v>
-                </c:pt>
-                <c:pt idx="1">
-                  <c:v>11.3</c:v>
-                </c:pt>
-              </c:numCache>
-            </c:numRef>
-          </c:val>
-        </c:ser>
-        <c:dLbls>
-          <c:numFmt formatCode="0&quot; min&quot;" sourceLinked="0"/>
-          <c:txPr>
-            <a:bodyPr/>
-            <a:lstStyle/>
-            <a:p>
-              <a:pPr>
-                <a:defRPr b="0" i="0" strike="noStrike" sz="1300" u="none">
-                  <a:solidFill>
-                    <a:srgbClr val="1E293B"/>
-                  </a:solidFill>
-                  <a:latin typeface="+mn-lt"/>
-                </a:defRPr>
-              </a:pPr>
-            </a:p>
-          </c:txPr>
-          <c:showLegendKey val="0"/>
-          <c:showVal val="1"/>
-          <c:showCatName val="0"/>
-          <c:showSerName val="0"/>
-          <c:showPercent val="0"/>
-          <c:showBubbleSize val="0"/>
-          <c:showLeaderLines val="0"/>
-        </c:dLbls>
-        <c:gapWidth val="150"/>
-        <c:overlap val="0"/>
-        <c:axId val="2094734554"/>
-        <c:axId val="2094734552"/>
-        <c:axId val="2094734556"/>
-      </c:barChart>
-      <c:catAx>
-        <c:axId val="2094734554"/>
-        <c:scaling>
-          <c:orientation val="minMax"/>
-        </c:scaling>
-        <c:delete val="0"/>
-        <c:axPos val="l"/>
-        <c:numFmt formatCode="General" sourceLinked="1"/>
-        <c:majorTickMark val="out"/>
-        <c:minorTickMark val="none"/>
-        <c:tickLblPos val="nextTo"/>
-        <c:spPr>
-          <a:ln w="12700" cap="flat">
-            <a:solidFill>
-              <a:srgbClr val="888888"/>
-            </a:solidFill>
-            <a:prstDash val="solid"/>
-            <a:round/>
-          </a:ln>
-        </c:spPr>
-        <c:txPr>
-          <a:bodyPr/>
-          <a:lstStyle/>
-          <a:p>
-            <a:pPr>
-              <a:defRPr sz="1300" b="0" i="0" u="none" strike="noStrike">
-                <a:solidFill>
-                  <a:srgbClr val="1E293B"/>
-                </a:solidFill>
-                <a:latin typeface="+mn-lt"/>
-              </a:defRPr>
-            </a:pPr>
-            <a:endParaRPr lang="en-US"/>
-          </a:p>
-        </c:txPr>
-        <c:crossAx val="2094734552"/>
-        <c:crosses val="autoZero"/>
-        <c:auto val="1"/>
-        <c:lblAlgn val="ctr"/>
-        <c:noMultiLvlLbl val="1"/>
-      </c:catAx>
-      <c:valAx>
-        <c:axId val="2094734552"/>
-        <c:scaling>
-          <c:orientation val="minMax"/>
-          <c:max val="360"/>
-        </c:scaling>
-        <c:delete val="1"/>
-        <c:axPos val="b"/>
-        <c:numFmt formatCode="General" sourceLinked="0"/>
-        <c:majorTickMark val="out"/>
-        <c:minorTickMark val="none"/>
-        <c:tickLblPos val="low"/>
-        <c:spPr>
-          <a:ln w="12700" cap="flat">
-            <a:solidFill>
-              <a:srgbClr val="888888"/>
-            </a:solidFill>
-            <a:prstDash val="solid"/>
-            <a:round/>
-          </a:ln>
-        </c:spPr>
-        <c:txPr>
-          <a:bodyPr/>
-          <a:lstStyle/>
-          <a:p>
-            <a:pPr>
-              <a:defRPr sz="1200" b="0" i="0" u="none" strike="noStrike">
-                <a:solidFill>
-                  <a:srgbClr val="000000"/>
-                </a:solidFill>
-                <a:latin typeface="Arial"/>
-              </a:defRPr>
-            </a:pPr>
-            <a:endParaRPr lang="en-US"/>
-          </a:p>
-        </c:txPr>
-        <c:crossAx val="2094734554"/>
-        <c:crosses val="autoZero"/>
-        <c:crossBetween val="between"/>
-      </c:valAx>
-      <c:spPr>
-        <a:noFill/>
-        <a:ln>
-          <a:noFill/>
-        </a:ln>
-        <a:effectLst/>
-      </c:spPr>
-    </c:plotArea>
-    <c:plotVisOnly val="1"/>
-    <c:dispBlanksAs val="span"/>
-  </c:chart>
-  <c:spPr>
-    <a:noFill/>
-    <a:ln>
-      <a:noFill/>
-    </a:ln>
-    <a:effectLst/>
-  </c:spPr>
-  <c:externalData r:id="rId1">
-    <c:autoUpdate val="0"/>
-  </c:externalData>
-</c:chartSpace>
 </file>
 
 <file path=ppt/notesMasters/notesMaster1.xml><?xml version="1.0" encoding="utf-8"?>
@@ -1279,7 +552,7 @@
           <a:p>
             <a:r>
               <a:rPr lang="en-US" dirty="0"/>
-              <a:t>This is the short version of Phase 2: everything we did after the literature review, in ten slides.</a:t>
+              <a:t>This is the short version of Phase 2: everything we did after the literature review, in thirteen slides.</a:t>
             </a:r>
             <a:endParaRPr lang="en-US" dirty="0"/>
           </a:p>
@@ -1367,7 +640,7 @@
           <a:p>
             <a:r>
               <a:rPr lang="en-US" dirty="0"/>
-              <a:t>Next: H1 tests whether accuracy drops once cells from the same slide can no longer appear in both training and testing. H2 tests whether YUV stain normalisation wins it back. A0 is done; A1 to A3 are one switch each in our code.</a:t>
+              <a:t>Left and middle: validation accuracy and loss for all ten folds, thin lines, and their mean, the thick line. Accuracy settles near 97.5 percent after about ten epochs, and the loss keeps drifting down as the learning rate halves. Right: the ensemble's ROC curve hugs the top-left corner with an AUC of 99.73 percent, so it ranks infected cells above healthy ones almost perfectly.</a:t>
             </a:r>
             <a:endParaRPr lang="en-US" dirty="0"/>
           </a:p>
@@ -1455,7 +728,7 @@
           <a:p>
             <a:r>
               <a:rPr lang="en-US" dirty="0"/>
-              <a:t>To wrap up: reproduced within one point, two quirks of the paper documented, training about 25 times faster per fold with published models, and a clear plan for testing on unseen slides. Thank you.</a:t>
+              <a:t>Left: our ten folds, one RTX 4090 each, all at once: about 11 minutes per fold, fold 3 on a slower host. Right: the paper needed 286 minutes per fold, so we are about 25 times faster, for about 4.8 dollars in total. The key speed-ups were a decoded image cache, parallel seeded augmentation, uint8 transfers and XLA, all without changing the maths, and the trained models are published.</a:t>
             </a:r>
             <a:endParaRPr lang="en-US" dirty="0"/>
           </a:p>
@@ -1479,6 +752,182 @@
             <a:fld id="{F7021451-1387-4CA6-816F-3879F97B5CBC}" type="slidenum">
               <a:rPr lang="en-US"/>
               <a:t>11</a:t>
+            </a:fld>
+            <a:endParaRPr lang="en-US"/>
+          </a:p>
+        </p:txBody>
+      </p:sp>
+    </p:spTree>
+    <p:extLst>
+      <p:ext uri="{BB962C8B-B14F-4D97-AF65-F5344CB8AC3E}">
+        <p14:creationId xmlns:p14="http://schemas.microsoft.com/office/powerpoint/2010/main" val="1024086991"/>
+      </p:ext>
+    </p:extLst>
+  </p:cSld>
+  <p:clrMapOvr>
+    <a:masterClrMapping/>
+  </p:clrMapOvr>
+</p:notes>
+</file>
+
+<file path=ppt/notesSlides/notesSlide12.xml><?xml version="1.0" encoding="utf-8"?>
+<p:notes xmlns:a="http://schemas.openxmlformats.org/drawingml/2006/main" xmlns:r="http://schemas.openxmlformats.org/officeDocument/2006/relationships" xmlns:p="http://schemas.openxmlformats.org/presentationml/2006/main">
+  <p:cSld>
+    <p:spTree>
+      <p:nvGrpSpPr>
+        <p:cNvPr id="1" name=""/>
+        <p:cNvGrpSpPr/>
+        <p:nvPr/>
+      </p:nvGrpSpPr>
+      <p:grpSpPr>
+        <a:xfrm>
+          <a:off x="0" y="0"/>
+          <a:ext cx="0" cy="0"/>
+          <a:chOff x="0" y="0"/>
+          <a:chExt cx="0" cy="0"/>
+        </a:xfrm>
+      </p:grpSpPr>
+      <p:sp>
+        <p:nvSpPr>
+          <p:cNvPr id="2" name="Slide Image Placeholder 1"/>
+          <p:cNvSpPr>
+            <a:spLocks noGrp="1" noRot="1" noChangeAspect="1"/>
+          </p:cNvSpPr>
+          <p:nvPr>
+            <p:ph type="sldImg"/>
+          </p:nvPr>
+        </p:nvSpPr>
+        <p:spPr/>
+      </p:sp>
+      <p:sp>
+        <p:nvSpPr>
+          <p:cNvPr id="3" name="Notes Placeholder 2"/>
+          <p:cNvSpPr>
+            <a:spLocks noGrp="1"/>
+          </p:cNvSpPr>
+          <p:nvPr>
+            <p:ph type="body" idx="1"/>
+          </p:nvPr>
+        </p:nvSpPr>
+        <p:spPr/>
+        <p:txBody>
+          <a:bodyPr/>
+          <a:lstStyle/>
+          <a:p>
+            <a:r>
+              <a:rPr lang="en-US" dirty="0"/>
+              <a:t>Next: H1 tests whether accuracy drops once cells from the same slide can no longer appear in both training and testing. H2 tests whether YUV stain normalisation wins it back. A0 is done; A1 to A3 are one switch each in our code.</a:t>
+            </a:r>
+            <a:endParaRPr lang="en-US" dirty="0"/>
+          </a:p>
+        </p:txBody>
+      </p:sp>
+      <p:sp>
+        <p:nvSpPr>
+          <p:cNvPr id="4" name="Slide Number Placeholder 3"/>
+          <p:cNvSpPr>
+            <a:spLocks noGrp="1"/>
+          </p:cNvSpPr>
+          <p:nvPr>
+            <p:ph type="sldNum" sz="quarter" idx="10"/>
+          </p:nvPr>
+        </p:nvSpPr>
+        <p:spPr/>
+        <p:txBody>
+          <a:bodyPr/>
+          <a:lstStyle/>
+          <a:p>
+            <a:fld id="{F7021451-1387-4CA6-816F-3879F97B5CBC}" type="slidenum">
+              <a:rPr lang="en-US"/>
+              <a:t>12</a:t>
+            </a:fld>
+            <a:endParaRPr lang="en-US"/>
+          </a:p>
+        </p:txBody>
+      </p:sp>
+    </p:spTree>
+    <p:extLst>
+      <p:ext uri="{BB962C8B-B14F-4D97-AF65-F5344CB8AC3E}">
+        <p14:creationId xmlns:p14="http://schemas.microsoft.com/office/powerpoint/2010/main" val="1024086991"/>
+      </p:ext>
+    </p:extLst>
+  </p:cSld>
+  <p:clrMapOvr>
+    <a:masterClrMapping/>
+  </p:clrMapOvr>
+</p:notes>
+</file>
+
+<file path=ppt/notesSlides/notesSlide13.xml><?xml version="1.0" encoding="utf-8"?>
+<p:notes xmlns:a="http://schemas.openxmlformats.org/drawingml/2006/main" xmlns:r="http://schemas.openxmlformats.org/officeDocument/2006/relationships" xmlns:p="http://schemas.openxmlformats.org/presentationml/2006/main">
+  <p:cSld>
+    <p:spTree>
+      <p:nvGrpSpPr>
+        <p:cNvPr id="1" name=""/>
+        <p:cNvGrpSpPr/>
+        <p:nvPr/>
+      </p:nvGrpSpPr>
+      <p:grpSpPr>
+        <a:xfrm>
+          <a:off x="0" y="0"/>
+          <a:ext cx="0" cy="0"/>
+          <a:chOff x="0" y="0"/>
+          <a:chExt cx="0" cy="0"/>
+        </a:xfrm>
+      </p:grpSpPr>
+      <p:sp>
+        <p:nvSpPr>
+          <p:cNvPr id="2" name="Slide Image Placeholder 1"/>
+          <p:cNvSpPr>
+            <a:spLocks noGrp="1" noRot="1" noChangeAspect="1"/>
+          </p:cNvSpPr>
+          <p:nvPr>
+            <p:ph type="sldImg"/>
+          </p:nvPr>
+        </p:nvSpPr>
+        <p:spPr/>
+      </p:sp>
+      <p:sp>
+        <p:nvSpPr>
+          <p:cNvPr id="3" name="Notes Placeholder 2"/>
+          <p:cNvSpPr>
+            <a:spLocks noGrp="1"/>
+          </p:cNvSpPr>
+          <p:nvPr>
+            <p:ph type="body" idx="1"/>
+          </p:nvPr>
+        </p:nvSpPr>
+        <p:spPr/>
+        <p:txBody>
+          <a:bodyPr/>
+          <a:lstStyle/>
+          <a:p>
+            <a:r>
+              <a:rPr lang="en-US" dirty="0"/>
+              <a:t>To wrap up: reproduced within one point, two quirks of the paper documented, training about 25 times faster per fold with published models, and a clear plan for testing on unseen slides. Thank you.</a:t>
+            </a:r>
+            <a:endParaRPr lang="en-US" dirty="0"/>
+          </a:p>
+        </p:txBody>
+      </p:sp>
+      <p:sp>
+        <p:nvSpPr>
+          <p:cNvPr id="4" name="Slide Number Placeholder 3"/>
+          <p:cNvSpPr>
+            <a:spLocks noGrp="1"/>
+          </p:cNvSpPr>
+          <p:nvPr>
+            <p:ph type="sldNum" sz="quarter" idx="10"/>
+          </p:nvPr>
+        </p:nvSpPr>
+        <p:spPr/>
+        <p:txBody>
+          <a:bodyPr/>
+          <a:lstStyle/>
+          <a:p>
+            <a:fld id="{F7021451-1387-4CA6-816F-3879F97B5CBC}" type="slidenum">
+              <a:rPr lang="en-US"/>
+              <a:t>13</a:t>
             </a:fld>
             <a:endParaRPr lang="en-US"/>
           </a:p>
@@ -1983,7 +1432,7 @@
           <a:p>
             <a:r>
               <a:rPr lang="en-US" dirty="0"/>
-              <a:t>Results on the 5,512-image hold-out set. Everything is within one point of the paper; mean fold accuracy matches to a hundredth of a point. Scoring on clean images changes little.</a:t>
+              <a:t>How to read the numbers. Left: the ensemble's four outcomes on the 5,512 hold-out cells; 2,650 infected cells caught and 80 missed. Recall is the share of infected cells we catch, precision the share of our 'infected' calls that are right, and F1 balances the two. Right: a lower threshold catches more infections but raises more false alarms; we use 0.5. A pp is the plain difference between two percentages.</a:t>
             </a:r>
             <a:endParaRPr lang="en-US" dirty="0"/>
           </a:p>
@@ -2071,7 +1520,7 @@
           <a:p>
             <a:r>
               <a:rPr lang="en-US" dirty="0"/>
-              <a:t>Fold by fold we match the paper closely, with a spread of only 0.30 points. On the right, the ensemble's mistakes on the hold-out cells: 80 missed infections and 51 false alarms. Recall is our priority metric.</a:t>
+              <a:t>Our results next to the paper's printed numbers, with the axis starting at 96 percent. Mean fold accuracy matches to a hundredth of a point; the ensemble metrics are about 0.7 points lower, all inside our one-point criterion. Scoring on clean images changes little.</a:t>
             </a:r>
             <a:endParaRPr lang="en-US" dirty="0"/>
           </a:p>
@@ -2159,7 +1608,7 @@
           <a:p>
             <a:r>
               <a:rPr lang="en-US" dirty="0"/>
-              <a:t>Ten RTX 4090 GPUs on RunPod, one fold each, all at once: about eleven minutes per fold instead of almost five hours, for about 4.8 dollars. The key speed-ups were a decoded image cache, parallel seeded augmentation, uint8 transfers, and XLA, all without changing the maths. The trained models are published.</a:t>
+              <a:t>Fold by fold we track the paper closely: the dashed line shows both means, 97.55 for us and 97.56 for the paper. On the right are the ensemble's mistakes on the hold-out cells: 80 missed infections and 51 false alarms, against 62 and 32 in the paper. Recall is our priority metric, because a missed infection is the worse mistake.</a:t>
             </a:r>
             <a:endParaRPr lang="en-US" dirty="0"/>
           </a:p>
@@ -3593,6 +3042,780 @@
                   <a:schemeClr val="accent1"/>
                 </a:solidFill>
               </a:rPr>
+              <a:t>RESULTS · TRAINING AND ROC</a:t>
+            </a:r>
+            <a:endParaRPr lang="en-US" sz="1200" dirty="0"/>
+          </a:p>
+        </p:txBody>
+      </p:sp>
+      <p:sp>
+        <p:nvSpPr>
+          <p:cNvPr id="3" name="Text 0"/>
+          <p:cNvSpPr/>
+          <p:nvPr>
+            <p:ph idx="101" type="title" hasCustomPrompt="1"/>
+          </p:nvPr>
+        </p:nvSpPr>
+        <p:spPr>
+          <a:xfrm>
+            <a:off x="548640" y="640080"/>
+            <a:ext cx="11064240" cy="713232"/>
+          </a:xfrm>
+          <a:prstGeom prst="rect">
+            <a:avLst/>
+          </a:prstGeom>
+          <a:noFill/>
+          <a:ln/>
+        </p:spPr>
+        <p:txBody>
+          <a:bodyPr wrap="square" lIns="0" tIns="0" rIns="0" bIns="0" rtlCol="0" anchor="t"/>
+          <a:lstStyle/>
+          <a:p>
+            <a:pPr algn="l" indent="0" marL="0">
+              <a:buNone/>
+            </a:pPr>
+            <a:r>
+              <a:rPr lang="en-US" sz="3200" b="1" dirty="0">
+                <a:solidFill>
+                  <a:schemeClr val="tx1"/>
+                </a:solidFill>
+              </a:rPr>
+              <a:t>Stable training, near-perfect ranking</a:t>
+            </a:r>
+            <a:endParaRPr lang="en-US" sz="3200" dirty="0"/>
+          </a:p>
+        </p:txBody>
+      </p:sp>
+      <p:pic>
+        <p:nvPicPr>
+          <p:cNvPr id="4" name="Image 0" descr="/Users/madhav/malaria-detection/slides/figures/training_and_roc.png">    </p:cNvPr>
+          <p:cNvPicPr>
+            <a:picLocks noChangeAspect="1"/>
+          </p:cNvPicPr>
+          <p:nvPr/>
+        </p:nvPicPr>
+        <p:blipFill>
+          <a:blip r:embed="rId1"/>
+          <a:stretch>
+            <a:fillRect/>
+          </a:stretch>
+        </p:blipFill>
+        <p:spPr>
+          <a:xfrm>
+            <a:off x="548640" y="1508760"/>
+            <a:ext cx="11064240" cy="3429000"/>
+          </a:xfrm>
+          <a:prstGeom prst="rect">
+            <a:avLst/>
+          </a:prstGeom>
+        </p:spPr>
+      </p:pic>
+      <p:sp>
+        <p:nvSpPr>
+          <p:cNvPr id="5" name="Shape 2"/>
+          <p:cNvSpPr/>
+          <p:nvPr/>
+        </p:nvSpPr>
+        <p:spPr>
+          <a:xfrm>
+            <a:off x="548640" y="5166360"/>
+            <a:ext cx="11064240" cy="914400"/>
+          </a:xfrm>
+          <a:prstGeom prst="roundRect">
+            <a:avLst>
+              <a:gd name="adj" fmla="val 8000"/>
+            </a:avLst>
+          </a:prstGeom>
+          <a:solidFill>
+            <a:srgbClr val="E3F0F2"/>
+          </a:solidFill>
+          <a:ln w="9525">
+            <a:solidFill>
+              <a:srgbClr val="E3F0F2"/>
+            </a:solidFill>
+            <a:prstDash val="solid"/>
+          </a:ln>
+        </p:spPr>
+      </p:sp>
+      <p:sp>
+        <p:nvSpPr>
+          <p:cNvPr id="6" name="Shape 3"/>
+          <p:cNvSpPr/>
+          <p:nvPr/>
+        </p:nvSpPr>
+        <p:spPr>
+          <a:xfrm>
+            <a:off x="749808" y="5394960"/>
+            <a:ext cx="457200" cy="457200"/>
+          </a:xfrm>
+          <a:prstGeom prst="ellipse">
+            <a:avLst/>
+          </a:prstGeom>
+          <a:solidFill>
+            <a:schemeClr val="accent1"/>
+          </a:solidFill>
+          <a:ln w="6350">
+            <a:solidFill>
+              <a:schemeClr val="accent1"/>
+            </a:solidFill>
+            <a:prstDash val="solid"/>
+          </a:ln>
+        </p:spPr>
+      </p:sp>
+      <p:pic>
+        <p:nvPicPr>
+          <p:cNvPr id="7" name="Image 1" descr="preencoded.png">    </p:cNvPr>
+          <p:cNvPicPr>
+            <a:picLocks noChangeAspect="1"/>
+          </p:cNvPicPr>
+          <p:nvPr/>
+        </p:nvPicPr>
+        <p:blipFill>
+          <a:blip r:embed="rId2"/>
+          <a:stretch>
+            <a:fillRect/>
+          </a:stretch>
+        </p:blipFill>
+        <p:spPr>
+          <a:xfrm>
+            <a:off x="845820" y="5490972"/>
+            <a:ext cx="265176" cy="265176"/>
+          </a:xfrm>
+          <a:prstGeom prst="rect">
+            <a:avLst/>
+          </a:prstGeom>
+        </p:spPr>
+      </p:pic>
+      <p:sp>
+        <p:nvSpPr>
+          <p:cNvPr id="8" name="Text 4"/>
+          <p:cNvSpPr txBox="1"/>
+          <p:nvPr/>
+        </p:nvSpPr>
+        <p:spPr>
+          <a:xfrm>
+            <a:off x="1389888" y="5239512"/>
+            <a:ext cx="10012680" cy="768096"/>
+          </a:xfrm>
+          <a:prstGeom prst="rect">
+            <a:avLst/>
+          </a:prstGeom>
+          <a:noFill/>
+          <a:ln/>
+        </p:spPr>
+        <p:txBody>
+          <a:bodyPr wrap="square" lIns="0" tIns="0" rIns="0" bIns="0" rtlCol="0" anchor="ctr"/>
+          <a:lstStyle/>
+          <a:p>
+            <a:pPr indent="0" marL="0">
+              <a:buNone/>
+            </a:pPr>
+            <a:r>
+              <a:rPr lang="en-US" sz="1400" dirty="0">
+                <a:solidFill>
+                  <a:schemeClr val="tx1"/>
+                </a:solidFill>
+              </a:rPr>
+              <a:t>Validation accuracy settles near 97.5 % after about 10 epochs; the learning rate halves on plateaus and the lowest-val_loss weights are kept. The ensemble's ROC hugs the top-left corner: AUC 99.73 % (paper 99.76 %).</a:t>
+            </a:r>
+            <a:endParaRPr lang="en-US" sz="1400" dirty="0"/>
+          </a:p>
+        </p:txBody>
+      </p:sp>
+      <p:sp>
+        <p:nvSpPr>
+          <p:cNvPr id="25" name="Slide Number Placeholder 0"/>
+          <p:cNvSpPr>
+            <a:spLocks noGrp="1"/>
+          </p:cNvSpPr>
+          <p:nvPr>
+            <p:ph type="sldNum" sz="quarter" idx="4294967295"/>
+          </p:nvPr>
+        </p:nvSpPr>
+        <p:spPr>
+          <a:xfrm>
+            <a:off x="11292840" y="6419088"/>
+            <a:ext cx="365760" cy="274320"/>
+          </a:xfrm>
+          <a:prstGeom prst="rect">
+            <a:avLst/>
+          </a:prstGeom>
+          <a:extLst>
+            <a:ext uri="{C572A759-6A51-4108-AA02-DFA0A04FC94B}">
+              <ma14:wrappingTextBoxFlag xmlns:ma14="http://schemas.microsoft.com/office/mac/drawingml/2011/main" val="0"/>
+            </a:ext>
+          </a:extLst>
+        </p:spPr>
+        <p:txBody>
+          <a:bodyPr/>
+          <a:lstStyle>
+            <a:lvl1pPr>
+              <a:defRPr sz="1000">
+                <a:solidFill>
+                  <a:schemeClr val="accent6"/>
+                </a:solidFill>
+              </a:defRPr>
+            </a:lvl1pPr>
+          </a:lstStyle>
+          <a:p>
+            <a:pPr algn="r"/>
+            <a:fld id="{F7021451-1387-4CA6-816F-3879F97B5CBC}" type="slidenum">
+              <a:rPr b="0" lang="en-US"/>
+              <a:t>10</a:t>
+            </a:fld>
+            <a:endParaRPr lang="en-US"/>
+          </a:p>
+        </p:txBody>
+      </p:sp>
+    </p:spTree>
+  </p:cSld>
+  <p:clrMapOvr>
+    <a:masterClrMapping/>
+  </p:clrMapOvr>
+</p:sld>
+</file>
+
+<file path=ppt/slides/slide11.xml><?xml version="1.0" encoding="utf-8"?>
+<p:sld xmlns:a="http://schemas.openxmlformats.org/drawingml/2006/main" xmlns:r="http://schemas.openxmlformats.org/officeDocument/2006/relationships" xmlns:p="http://schemas.openxmlformats.org/presentationml/2006/main">
+  <p:cSld name="Slide 11">
+    <p:spTree>
+      <p:nvGrpSpPr>
+        <p:cNvPr id="1" name=""/>
+        <p:cNvGrpSpPr/>
+        <p:nvPr/>
+      </p:nvGrpSpPr>
+      <p:grpSpPr>
+        <a:xfrm>
+          <a:off x="0" y="0"/>
+          <a:ext cx="0" cy="0"/>
+          <a:chOff x="0" y="0"/>
+          <a:chExt cx="0" cy="0"/>
+        </a:xfrm>
+      </p:grpSpPr>
+      <p:sp>
+        <p:nvSpPr>
+          <p:cNvPr id="2" name="Text 0"/>
+          <p:cNvSpPr/>
+          <p:nvPr>
+            <p:ph idx="100" type="body" hasCustomPrompt="1"/>
+          </p:nvPr>
+        </p:nvSpPr>
+        <p:spPr>
+          <a:xfrm>
+            <a:off x="548640" y="347472"/>
+            <a:ext cx="11064240" cy="292608"/>
+          </a:xfrm>
+          <a:prstGeom prst="rect">
+            <a:avLst/>
+          </a:prstGeom>
+          <a:noFill/>
+          <a:ln/>
+        </p:spPr>
+        <p:txBody>
+          <a:bodyPr wrap="square" lIns="0" tIns="0" rIns="0" bIns="0" rtlCol="0" anchor="ctr"/>
+          <a:lstStyle/>
+          <a:p>
+            <a:pPr algn="l" indent="0" marL="0">
+              <a:buNone/>
+            </a:pPr>
+            <a:r>
+              <a:rPr lang="en-US" sz="1200" b="1" spc="150" kern="0" dirty="0">
+                <a:solidFill>
+                  <a:schemeClr val="accent1"/>
+                </a:solidFill>
+              </a:rPr>
+              <a:t>ENGINEERING</a:t>
+            </a:r>
+            <a:endParaRPr lang="en-US" sz="1200" dirty="0"/>
+          </a:p>
+        </p:txBody>
+      </p:sp>
+      <p:sp>
+        <p:nvSpPr>
+          <p:cNvPr id="3" name="Text 0"/>
+          <p:cNvSpPr/>
+          <p:nvPr>
+            <p:ph idx="101" type="title" hasCustomPrompt="1"/>
+          </p:nvPr>
+        </p:nvSpPr>
+        <p:spPr>
+          <a:xfrm>
+            <a:off x="548640" y="640080"/>
+            <a:ext cx="11064240" cy="713232"/>
+          </a:xfrm>
+          <a:prstGeom prst="rect">
+            <a:avLst/>
+          </a:prstGeom>
+          <a:noFill/>
+          <a:ln/>
+        </p:spPr>
+        <p:txBody>
+          <a:bodyPr wrap="square" lIns="0" tIns="0" rIns="0" bIns="0" rtlCol="0" anchor="t"/>
+          <a:lstStyle/>
+          <a:p>
+            <a:pPr algn="l" indent="0" marL="0">
+              <a:buNone/>
+            </a:pPr>
+            <a:r>
+              <a:rPr lang="en-US" sz="3200" b="1" dirty="0">
+                <a:solidFill>
+                  <a:schemeClr val="tx1"/>
+                </a:solidFill>
+              </a:rPr>
+              <a:t>Ten GPUs in parallel: about 11 minutes per fold</a:t>
+            </a:r>
+            <a:endParaRPr lang="en-US" sz="3200" dirty="0"/>
+          </a:p>
+        </p:txBody>
+      </p:sp>
+      <p:pic>
+        <p:nvPicPr>
+          <p:cNvPr id="4" name="Image 0" descr="/Users/madhav/malaria-detection/slides/figures/fold_times.png">    </p:cNvPr>
+          <p:cNvPicPr>
+            <a:picLocks noChangeAspect="1"/>
+          </p:cNvPicPr>
+          <p:nvPr/>
+        </p:nvPicPr>
+        <p:blipFill>
+          <a:blip r:embed="rId1"/>
+          <a:stretch>
+            <a:fillRect/>
+          </a:stretch>
+        </p:blipFill>
+        <p:spPr>
+          <a:xfrm>
+            <a:off x="548640" y="1600200"/>
+            <a:ext cx="6126480" cy="2514600"/>
+          </a:xfrm>
+          <a:prstGeom prst="rect">
+            <a:avLst/>
+          </a:prstGeom>
+        </p:spPr>
+      </p:pic>
+      <p:pic>
+        <p:nvPicPr>
+          <p:cNvPr id="5" name="Image 1" descr="/Users/madhav/malaria-detection/slides/figures/time_compare.png">    </p:cNvPr>
+          <p:cNvPicPr>
+            <a:picLocks noChangeAspect="1"/>
+          </p:cNvPicPr>
+          <p:nvPr/>
+        </p:nvPicPr>
+        <p:blipFill>
+          <a:blip r:embed="rId2"/>
+          <a:stretch>
+            <a:fillRect/>
+          </a:stretch>
+        </p:blipFill>
+        <p:spPr>
+          <a:xfrm>
+            <a:off x="6949440" y="1600200"/>
+            <a:ext cx="4663440" cy="2651760"/>
+          </a:xfrm>
+          <a:prstGeom prst="rect">
+            <a:avLst/>
+          </a:prstGeom>
+        </p:spPr>
+      </p:pic>
+      <p:sp>
+        <p:nvSpPr>
+          <p:cNvPr id="6" name="Text 2"/>
+          <p:cNvSpPr txBox="1"/>
+          <p:nvPr/>
+        </p:nvSpPr>
+        <p:spPr>
+          <a:xfrm>
+            <a:off x="7086600" y="4343400"/>
+            <a:ext cx="1508760" cy="868680"/>
+          </a:xfrm>
+          <a:prstGeom prst="rect">
+            <a:avLst/>
+          </a:prstGeom>
+          <a:noFill/>
+          <a:ln/>
+        </p:spPr>
+        <p:txBody>
+          <a:bodyPr wrap="square" lIns="0" tIns="0" rIns="0" bIns="0" rtlCol="0" anchor="t"/>
+          <a:lstStyle/>
+          <a:p>
+            <a:pPr indent="0" marL="0">
+              <a:buNone/>
+            </a:pPr>
+            <a:r>
+              <a:rPr lang="en-US" sz="2400" b="1" dirty="0">
+                <a:solidFill>
+                  <a:schemeClr val="accent1"/>
+                </a:solidFill>
+              </a:rPr>
+              <a:t>≈ 25×</a:t>
+            </a:r>
+            <a:endParaRPr lang="en-US" sz="1400" dirty="0"/>
+          </a:p>
+          <a:p>
+            <a:pPr indent="0" marL="0">
+              <a:buNone/>
+            </a:pPr>
+            <a:r>
+              <a:rPr lang="en-US" sz="1200" dirty="0">
+                <a:solidFill>
+                  <a:schemeClr val="accent6"/>
+                </a:solidFill>
+              </a:rPr>
+              <a:t>faster per fold</a:t>
+            </a:r>
+            <a:endParaRPr lang="en-US" sz="1400" dirty="0"/>
+          </a:p>
+        </p:txBody>
+      </p:sp>
+      <p:sp>
+        <p:nvSpPr>
+          <p:cNvPr id="7" name="Text 3"/>
+          <p:cNvSpPr txBox="1"/>
+          <p:nvPr/>
+        </p:nvSpPr>
+        <p:spPr>
+          <a:xfrm>
+            <a:off x="8641080" y="4343400"/>
+            <a:ext cx="1508760" cy="868680"/>
+          </a:xfrm>
+          <a:prstGeom prst="rect">
+            <a:avLst/>
+          </a:prstGeom>
+          <a:noFill/>
+          <a:ln/>
+        </p:spPr>
+        <p:txBody>
+          <a:bodyPr wrap="square" lIns="0" tIns="0" rIns="0" bIns="0" rtlCol="0" anchor="t"/>
+          <a:lstStyle/>
+          <a:p>
+            <a:pPr indent="0" marL="0">
+              <a:buNone/>
+            </a:pPr>
+            <a:r>
+              <a:rPr lang="en-US" sz="2400" b="1" dirty="0">
+                <a:solidFill>
+                  <a:schemeClr val="accent1"/>
+                </a:solidFill>
+              </a:rPr>
+              <a:t>≈ $4.8</a:t>
+            </a:r>
+            <a:endParaRPr lang="en-US" sz="1400" dirty="0"/>
+          </a:p>
+          <a:p>
+            <a:pPr indent="0" marL="0">
+              <a:buNone/>
+            </a:pPr>
+            <a:r>
+              <a:rPr lang="en-US" sz="1200" dirty="0">
+                <a:solidFill>
+                  <a:schemeClr val="accent6"/>
+                </a:solidFill>
+              </a:rPr>
+              <a:t>total cloud cost</a:t>
+            </a:r>
+            <a:endParaRPr lang="en-US" sz="1400" dirty="0"/>
+          </a:p>
+        </p:txBody>
+      </p:sp>
+      <p:sp>
+        <p:nvSpPr>
+          <p:cNvPr id="8" name="Text 4"/>
+          <p:cNvSpPr txBox="1"/>
+          <p:nvPr/>
+        </p:nvSpPr>
+        <p:spPr>
+          <a:xfrm>
+            <a:off x="10195560" y="4343400"/>
+            <a:ext cx="1508760" cy="868680"/>
+          </a:xfrm>
+          <a:prstGeom prst="rect">
+            <a:avLst/>
+          </a:prstGeom>
+          <a:noFill/>
+          <a:ln/>
+        </p:spPr>
+        <p:txBody>
+          <a:bodyPr wrap="square" lIns="0" tIns="0" rIns="0" bIns="0" rtlCol="0" anchor="t"/>
+          <a:lstStyle/>
+          <a:p>
+            <a:pPr indent="0" marL="0">
+              <a:buNone/>
+            </a:pPr>
+            <a:r>
+              <a:rPr lang="en-US" sz="2400" b="1" dirty="0">
+                <a:solidFill>
+                  <a:schemeClr val="accent1"/>
+                </a:solidFill>
+              </a:rPr>
+              <a:t>1 d 23 h</a:t>
+            </a:r>
+            <a:endParaRPr lang="en-US" sz="1400" dirty="0"/>
+          </a:p>
+          <a:p>
+            <a:pPr indent="0" marL="0">
+              <a:buNone/>
+            </a:pPr>
+            <a:r>
+              <a:rPr lang="en-US" sz="1200" dirty="0">
+                <a:solidFill>
+                  <a:schemeClr val="accent6"/>
+                </a:solidFill>
+              </a:rPr>
+              <a:t>the paper's full run</a:t>
+            </a:r>
+            <a:endParaRPr lang="en-US" sz="1400" dirty="0"/>
+          </a:p>
+        </p:txBody>
+      </p:sp>
+      <p:sp>
+        <p:nvSpPr>
+          <p:cNvPr id="9" name="Text 5"/>
+          <p:cNvSpPr txBox="1"/>
+          <p:nvPr/>
+        </p:nvSpPr>
+        <p:spPr>
+          <a:xfrm>
+            <a:off x="548640" y="4251960"/>
+            <a:ext cx="6126480" cy="822960"/>
+          </a:xfrm>
+          <a:prstGeom prst="rect">
+            <a:avLst/>
+          </a:prstGeom>
+          <a:noFill/>
+          <a:ln/>
+        </p:spPr>
+        <p:txBody>
+          <a:bodyPr wrap="square" lIns="0" tIns="0" rIns="0" bIns="0" rtlCol="0" anchor="t"/>
+          <a:lstStyle/>
+          <a:p>
+            <a:pPr indent="0" marL="0">
+              <a:buNone/>
+            </a:pPr>
+            <a:r>
+              <a:rPr lang="en-US" sz="1300" dirty="0">
+                <a:solidFill>
+                  <a:schemeClr val="accent6"/>
+                </a:solidFill>
+              </a:rPr>
+              <a:t>10 RunPod pods (Secure Cloud, RTX 4090, 16 vCPU each), one fold per pod, all training at the same time. Fold 3 landed on a slower host (16.6 min).</a:t>
+            </a:r>
+            <a:endParaRPr lang="en-US" sz="1300" dirty="0"/>
+          </a:p>
+        </p:txBody>
+      </p:sp>
+      <p:sp>
+        <p:nvSpPr>
+          <p:cNvPr id="10" name="Shape 6"/>
+          <p:cNvSpPr/>
+          <p:nvPr/>
+        </p:nvSpPr>
+        <p:spPr>
+          <a:xfrm>
+            <a:off x="548640" y="5257800"/>
+            <a:ext cx="11064240" cy="731520"/>
+          </a:xfrm>
+          <a:prstGeom prst="roundRect">
+            <a:avLst>
+              <a:gd name="adj" fmla="val 10000"/>
+            </a:avLst>
+          </a:prstGeom>
+          <a:solidFill>
+            <a:srgbClr val="E3F0F2"/>
+          </a:solidFill>
+          <a:ln w="9525">
+            <a:solidFill>
+              <a:srgbClr val="E3F0F2"/>
+            </a:solidFill>
+            <a:prstDash val="solid"/>
+          </a:ln>
+        </p:spPr>
+      </p:sp>
+      <p:sp>
+        <p:nvSpPr>
+          <p:cNvPr id="11" name="Shape 7"/>
+          <p:cNvSpPr/>
+          <p:nvPr/>
+        </p:nvSpPr>
+        <p:spPr>
+          <a:xfrm>
+            <a:off x="749808" y="5394960"/>
+            <a:ext cx="457200" cy="457200"/>
+          </a:xfrm>
+          <a:prstGeom prst="ellipse">
+            <a:avLst/>
+          </a:prstGeom>
+          <a:solidFill>
+            <a:schemeClr val="accent1"/>
+          </a:solidFill>
+          <a:ln w="6350">
+            <a:solidFill>
+              <a:schemeClr val="accent1"/>
+            </a:solidFill>
+            <a:prstDash val="solid"/>
+          </a:ln>
+        </p:spPr>
+      </p:sp>
+      <p:pic>
+        <p:nvPicPr>
+          <p:cNvPr id="12" name="Image 2" descr="preencoded.png">    </p:cNvPr>
+          <p:cNvPicPr>
+            <a:picLocks noChangeAspect="1"/>
+          </p:cNvPicPr>
+          <p:nvPr/>
+        </p:nvPicPr>
+        <p:blipFill>
+          <a:blip r:embed="rId3"/>
+          <a:stretch>
+            <a:fillRect/>
+          </a:stretch>
+        </p:blipFill>
+        <p:spPr>
+          <a:xfrm>
+            <a:off x="845820" y="5490972"/>
+            <a:ext cx="265176" cy="265176"/>
+          </a:xfrm>
+          <a:prstGeom prst="rect">
+            <a:avLst/>
+          </a:prstGeom>
+        </p:spPr>
+      </p:pic>
+      <p:sp>
+        <p:nvSpPr>
+          <p:cNvPr id="13" name="Text 8"/>
+          <p:cNvSpPr txBox="1"/>
+          <p:nvPr/>
+        </p:nvSpPr>
+        <p:spPr>
+          <a:xfrm>
+            <a:off x="1389888" y="5330952"/>
+            <a:ext cx="10012680" cy="585216"/>
+          </a:xfrm>
+          <a:prstGeom prst="rect">
+            <a:avLst/>
+          </a:prstGeom>
+          <a:noFill/>
+          <a:ln/>
+        </p:spPr>
+        <p:txBody>
+          <a:bodyPr wrap="square" lIns="0" tIns="0" rIns="0" bIns="0" rtlCol="0" anchor="ctr"/>
+          <a:lstStyle/>
+          <a:p>
+            <a:pPr indent="0" marL="0">
+              <a:buNone/>
+            </a:pPr>
+            <a:r>
+              <a:rPr lang="en-US" sz="1400" dirty="0">
+                <a:solidFill>
+                  <a:schemeClr val="tx1"/>
+                </a:solidFill>
+              </a:rPr>
+              <a:t>The 10 trained models are published as a GitHub release, so nobody has to retrain to use or evaluate them.</a:t>
+            </a:r>
+            <a:endParaRPr lang="en-US" sz="1400" dirty="0"/>
+          </a:p>
+        </p:txBody>
+      </p:sp>
+      <p:sp>
+        <p:nvSpPr>
+          <p:cNvPr id="25" name="Slide Number Placeholder 0"/>
+          <p:cNvSpPr>
+            <a:spLocks noGrp="1"/>
+          </p:cNvSpPr>
+          <p:nvPr>
+            <p:ph type="sldNum" sz="quarter" idx="4294967295"/>
+          </p:nvPr>
+        </p:nvSpPr>
+        <p:spPr>
+          <a:xfrm>
+            <a:off x="11292840" y="6419088"/>
+            <a:ext cx="365760" cy="274320"/>
+          </a:xfrm>
+          <a:prstGeom prst="rect">
+            <a:avLst/>
+          </a:prstGeom>
+          <a:extLst>
+            <a:ext uri="{C572A759-6A51-4108-AA02-DFA0A04FC94B}">
+              <ma14:wrappingTextBoxFlag xmlns:ma14="http://schemas.microsoft.com/office/mac/drawingml/2011/main" val="0"/>
+            </a:ext>
+          </a:extLst>
+        </p:spPr>
+        <p:txBody>
+          <a:bodyPr/>
+          <a:lstStyle>
+            <a:lvl1pPr>
+              <a:defRPr sz="1000">
+                <a:solidFill>
+                  <a:schemeClr val="accent6"/>
+                </a:solidFill>
+              </a:defRPr>
+            </a:lvl1pPr>
+          </a:lstStyle>
+          <a:p>
+            <a:pPr algn="r"/>
+            <a:fld id="{F7021451-1387-4CA6-816F-3879F97B5CBC}" type="slidenum">
+              <a:rPr b="0" lang="en-US"/>
+              <a:t>11</a:t>
+            </a:fld>
+            <a:endParaRPr lang="en-US"/>
+          </a:p>
+        </p:txBody>
+      </p:sp>
+    </p:spTree>
+  </p:cSld>
+  <p:clrMapOvr>
+    <a:masterClrMapping/>
+  </p:clrMapOvr>
+</p:sld>
+</file>
+
+<file path=ppt/slides/slide12.xml><?xml version="1.0" encoding="utf-8"?>
+<p:sld xmlns:a="http://schemas.openxmlformats.org/drawingml/2006/main" xmlns:r="http://schemas.openxmlformats.org/officeDocument/2006/relationships" xmlns:p="http://schemas.openxmlformats.org/presentationml/2006/main">
+  <p:cSld name="Slide 12">
+    <p:spTree>
+      <p:nvGrpSpPr>
+        <p:cNvPr id="1" name=""/>
+        <p:cNvGrpSpPr/>
+        <p:nvPr/>
+      </p:nvGrpSpPr>
+      <p:grpSpPr>
+        <a:xfrm>
+          <a:off x="0" y="0"/>
+          <a:ext cx="0" cy="0"/>
+          <a:chOff x="0" y="0"/>
+          <a:chExt cx="0" cy="0"/>
+        </a:xfrm>
+      </p:grpSpPr>
+      <p:sp>
+        <p:nvSpPr>
+          <p:cNvPr id="2" name="Text 0"/>
+          <p:cNvSpPr/>
+          <p:nvPr>
+            <p:ph idx="100" type="body" hasCustomPrompt="1"/>
+          </p:nvPr>
+        </p:nvSpPr>
+        <p:spPr>
+          <a:xfrm>
+            <a:off x="548640" y="347472"/>
+            <a:ext cx="11064240" cy="292608"/>
+          </a:xfrm>
+          <a:prstGeom prst="rect">
+            <a:avLst/>
+          </a:prstGeom>
+          <a:noFill/>
+          <a:ln/>
+        </p:spPr>
+        <p:txBody>
+          <a:bodyPr wrap="square" lIns="0" tIns="0" rIns="0" bIns="0" rtlCol="0" anchor="ctr"/>
+          <a:lstStyle/>
+          <a:p>
+            <a:pPr algn="l" indent="0" marL="0">
+              <a:buNone/>
+            </a:pPr>
+            <a:r>
+              <a:rPr lang="en-US" sz="1200" b="1" spc="150" kern="0" dirty="0">
+                <a:solidFill>
+                  <a:schemeClr val="accent1"/>
+                </a:solidFill>
+              </a:rPr>
               <a:t>NEXT · OUR HYPOTHESIS</a:t>
             </a:r>
             <a:endParaRPr lang="en-US" sz="1200" dirty="0"/>
@@ -4071,7 +4294,7 @@
       </p:sp>
       <p:graphicFrame>
         <p:nvGraphicFramePr>
-          <p:cNvPr id="11" name="Table 0"/>
+          <p:cNvPr id="13" name="Table 0"/>
           <p:cNvGraphicFramePr>
             <a:graphicFrameLocks noGrp="1"/>
           </p:cNvGraphicFramePr>
@@ -5851,7 +6074,7 @@
             <a:pPr algn="r"/>
             <a:fld id="{F7021451-1387-4CA6-816F-3879F97B5CBC}" type="slidenum">
               <a:rPr b="0" lang="en-US"/>
-              <a:t>10</a:t>
+              <a:t>12</a:t>
             </a:fld>
             <a:endParaRPr lang="en-US"/>
           </a:p>
@@ -5865,9 +6088,9 @@
 </p:sld>
 </file>
 
-<file path=ppt/slides/slide11.xml><?xml version="1.0" encoding="utf-8"?>
+<file path=ppt/slides/slide13.xml><?xml version="1.0" encoding="utf-8"?>
 <p:sld xmlns:a="http://schemas.openxmlformats.org/drawingml/2006/main" xmlns:r="http://schemas.openxmlformats.org/officeDocument/2006/relationships" xmlns:p="http://schemas.openxmlformats.org/presentationml/2006/main">
-  <p:cSld name="Slide 11">
+  <p:cSld name="Slide 13">
     <p:spTree>
       <p:nvGrpSpPr>
         <p:cNvPr id="1" name=""/>
@@ -13754,7 +13977,7 @@
                   <a:schemeClr val="accent1"/>
                 </a:solidFill>
               </a:rPr>
-              <a:t>RESULTS · METRIC BY METRIC</a:t>
+              <a:t>BEFORE THE RESULTS</a:t>
             </a:r>
             <a:endParaRPr lang="en-US" sz="1200" dirty="0"/>
           </a:p>
@@ -13792,2494 +14015,15 @@
                   <a:schemeClr val="tx1"/>
                 </a:solidFill>
               </a:rPr>
-              <a:t>Paper vs. ours on the 5,512-image hold-out set</a:t>
+              <a:t>How to read the metrics</a:t>
             </a:r>
             <a:endParaRPr lang="en-US" sz="3200" dirty="0"/>
           </a:p>
         </p:txBody>
-      </p:sp>
-      <p:graphicFrame>
-        <p:nvGraphicFramePr>
-          <p:cNvPr id="8" name="Table 0"/>
-          <p:cNvGraphicFramePr>
-            <a:graphicFrameLocks noGrp="1"/>
-          </p:cNvGraphicFramePr>
-          <p:nvPr>
-            <p:extLst>
-              <p:ext uri="{D42A27DB-BD31-4B8C-83A1-F6EECF244321}">
-                <p14:modId xmlns:p14="http://schemas.microsoft.com/office/powerpoint/2010/main" val="1579011935"/>
-              </p:ext>
-            </p:extLst>
-          </p:nvPr>
-        </p:nvGraphicFramePr>
-        <p:xfrm>
-          <a:off x="548640" y="1645920"/>
-          <a:ext cx="11064240" cy="914400"/>
-        </p:xfrm>
-        <a:graphic>
-          <a:graphicData uri="http://schemas.openxmlformats.org/drawingml/2006/table">
-            <a:tbl>
-              <a:tblPr/>
-              <a:tblGrid>
-                <a:gridCol w="4114800"/>
-                <a:gridCol w="1463040"/>
-                <a:gridCol w="2103120"/>
-                <a:gridCol w="2011680"/>
-                <a:gridCol w="1371600"/>
-              </a:tblGrid>
-              <a:tr h="457200">
-                <a:tc>
-                  <a:txBody>
-                    <a:bodyPr/>
-                    <a:lstStyle/>
-                    <a:p>
-                      <a:pPr indent="0" marL="0">
-                        <a:buNone/>
-                      </a:pPr>
-                      <a:r>
-                        <a:rPr lang="en-US" sz="1500" b="1" dirty="0">
-                          <a:solidFill>
-                            <a:srgbClr val="FFFFFF"/>
-                          </a:solidFill>
-                          <a:latin typeface="Calibri" pitchFamily="34" charset="0"/>
-                          <a:ea typeface="Calibri" pitchFamily="34" charset="-122"/>
-                          <a:cs typeface="Calibri" pitchFamily="34" charset="-120"/>
-                        </a:rPr>
-                        <a:t>Metric (%)</a:t>
-                      </a:r>
-                      <a:endParaRPr lang="en-US" sz="1500" dirty="0">
-                        <a:latin typeface="Calibri" charset="0"/>
-                        <a:ea typeface="Calibri" charset="0"/>
-                        <a:cs typeface="Calibri" charset="0"/>
-                      </a:endParaRPr>
-                    </a:p>
-                  </a:txBody>
-                  <a:tcPr marL="73152" marR="73152" marT="27432" marB="27432" anchor="ctr">
-                    <a:lnL w="9525" cap="flat" cmpd="sng" algn="ctr">
-                      <a:solidFill>
-                        <a:srgbClr val="D7E3E6"/>
-                      </a:solidFill>
-                      <a:prstDash val="solid"/>
-                      <a:round/>
-                      <a:headEnd type="none" w="med" len="med"/>
-                      <a:tailEnd type="none" w="med" len="med"/>
-                    </a:lnL>
-                    <a:lnR w="9525" cap="flat" cmpd="sng" algn="ctr">
-                      <a:solidFill>
-                        <a:srgbClr val="D7E3E6"/>
-                      </a:solidFill>
-                      <a:prstDash val="solid"/>
-                      <a:round/>
-                      <a:headEnd type="none" w="med" len="med"/>
-                      <a:tailEnd type="none" w="med" len="med"/>
-                    </a:lnR>
-                    <a:lnT w="9525" cap="flat" cmpd="sng" algn="ctr">
-                      <a:solidFill>
-                        <a:srgbClr val="D7E3E6"/>
-                      </a:solidFill>
-                      <a:prstDash val="solid"/>
-                      <a:round/>
-                      <a:headEnd type="none" w="med" len="med"/>
-                      <a:tailEnd type="none" w="med" len="med"/>
-                    </a:lnT>
-                    <a:lnB w="9525" cap="flat" cmpd="sng" algn="ctr">
-                      <a:solidFill>
-                        <a:srgbClr val="D7E3E6"/>
-                      </a:solidFill>
-                      <a:prstDash val="solid"/>
-                      <a:round/>
-                      <a:headEnd type="none" w="med" len="med"/>
-                      <a:tailEnd type="none" w="med" len="med"/>
-                    </a:lnB>
-                    <a:solidFill>
-                      <a:srgbClr val="137C8E"/>
-                    </a:solidFill>
-                  </a:tcPr>
-                </a:tc>
-                <a:tc>
-                  <a:txBody>
-                    <a:bodyPr/>
-                    <a:lstStyle/>
-                    <a:p>
-                      <a:pPr indent="0" marL="0">
-                        <a:buNone/>
-                      </a:pPr>
-                      <a:r>
-                        <a:rPr lang="en-US" sz="1500" b="1" dirty="0">
-                          <a:solidFill>
-                            <a:srgbClr val="FFFFFF"/>
-                          </a:solidFill>
-                          <a:latin typeface="Calibri" pitchFamily="34" charset="0"/>
-                          <a:ea typeface="Calibri" pitchFamily="34" charset="-122"/>
-                          <a:cs typeface="Calibri" pitchFamily="34" charset="-120"/>
-                        </a:rPr>
-                        <a:t>Paper</a:t>
-                      </a:r>
-                      <a:endParaRPr lang="en-US" sz="1500" dirty="0">
-                        <a:latin typeface="Calibri" charset="0"/>
-                        <a:ea typeface="Calibri" charset="0"/>
-                        <a:cs typeface="Calibri" charset="0"/>
-                      </a:endParaRPr>
-                    </a:p>
-                  </a:txBody>
-                  <a:tcPr marL="73152" marR="73152" marT="27432" marB="27432" anchor="ctr">
-                    <a:lnL w="9525" cap="flat" cmpd="sng" algn="ctr">
-                      <a:solidFill>
-                        <a:srgbClr val="D7E3E6"/>
-                      </a:solidFill>
-                      <a:prstDash val="solid"/>
-                      <a:round/>
-                      <a:headEnd type="none" w="med" len="med"/>
-                      <a:tailEnd type="none" w="med" len="med"/>
-                    </a:lnL>
-                    <a:lnR w="9525" cap="flat" cmpd="sng" algn="ctr">
-                      <a:solidFill>
-                        <a:srgbClr val="D7E3E6"/>
-                      </a:solidFill>
-                      <a:prstDash val="solid"/>
-                      <a:round/>
-                      <a:headEnd type="none" w="med" len="med"/>
-                      <a:tailEnd type="none" w="med" len="med"/>
-                    </a:lnR>
-                    <a:lnT w="9525" cap="flat" cmpd="sng" algn="ctr">
-                      <a:solidFill>
-                        <a:srgbClr val="D7E3E6"/>
-                      </a:solidFill>
-                      <a:prstDash val="solid"/>
-                      <a:round/>
-                      <a:headEnd type="none" w="med" len="med"/>
-                      <a:tailEnd type="none" w="med" len="med"/>
-                    </a:lnT>
-                    <a:lnB w="9525" cap="flat" cmpd="sng" algn="ctr">
-                      <a:solidFill>
-                        <a:srgbClr val="D7E3E6"/>
-                      </a:solidFill>
-                      <a:prstDash val="solid"/>
-                      <a:round/>
-                      <a:headEnd type="none" w="med" len="med"/>
-                      <a:tailEnd type="none" w="med" len="med"/>
-                    </a:lnB>
-                    <a:solidFill>
-                      <a:srgbClr val="137C8E"/>
-                    </a:solidFill>
-                  </a:tcPr>
-                </a:tc>
-                <a:tc>
-                  <a:txBody>
-                    <a:bodyPr/>
-                    <a:lstStyle/>
-                    <a:p>
-                      <a:pPr indent="0" marL="0">
-                        <a:buNone/>
-                      </a:pPr>
-                      <a:r>
-                        <a:rPr lang="en-US" sz="1500" b="1" dirty="0">
-                          <a:solidFill>
-                            <a:srgbClr val="FFFFFF"/>
-                          </a:solidFill>
-                          <a:latin typeface="Calibri" pitchFamily="34" charset="0"/>
-                          <a:ea typeface="Calibri" pitchFamily="34" charset="-122"/>
-                          <a:cs typeface="Calibri" pitchFamily="34" charset="-120"/>
-                        </a:rPr>
-                        <a:t>Ours · paper protocol</a:t>
-                      </a:r>
-                      <a:endParaRPr lang="en-US" sz="1500" dirty="0">
-                        <a:latin typeface="Calibri" charset="0"/>
-                        <a:ea typeface="Calibri" charset="0"/>
-                        <a:cs typeface="Calibri" charset="0"/>
-                      </a:endParaRPr>
-                    </a:p>
-                  </a:txBody>
-                  <a:tcPr marL="73152" marR="73152" marT="27432" marB="27432" anchor="ctr">
-                    <a:lnL w="9525" cap="flat" cmpd="sng" algn="ctr">
-                      <a:solidFill>
-                        <a:srgbClr val="D7E3E6"/>
-                      </a:solidFill>
-                      <a:prstDash val="solid"/>
-                      <a:round/>
-                      <a:headEnd type="none" w="med" len="med"/>
-                      <a:tailEnd type="none" w="med" len="med"/>
-                    </a:lnL>
-                    <a:lnR w="9525" cap="flat" cmpd="sng" algn="ctr">
-                      <a:solidFill>
-                        <a:srgbClr val="D7E3E6"/>
-                      </a:solidFill>
-                      <a:prstDash val="solid"/>
-                      <a:round/>
-                      <a:headEnd type="none" w="med" len="med"/>
-                      <a:tailEnd type="none" w="med" len="med"/>
-                    </a:lnR>
-                    <a:lnT w="9525" cap="flat" cmpd="sng" algn="ctr">
-                      <a:solidFill>
-                        <a:srgbClr val="D7E3E6"/>
-                      </a:solidFill>
-                      <a:prstDash val="solid"/>
-                      <a:round/>
-                      <a:headEnd type="none" w="med" len="med"/>
-                      <a:tailEnd type="none" w="med" len="med"/>
-                    </a:lnT>
-                    <a:lnB w="9525" cap="flat" cmpd="sng" algn="ctr">
-                      <a:solidFill>
-                        <a:srgbClr val="D7E3E6"/>
-                      </a:solidFill>
-                      <a:prstDash val="solid"/>
-                      <a:round/>
-                      <a:headEnd type="none" w="med" len="med"/>
-                      <a:tailEnd type="none" w="med" len="med"/>
-                    </a:lnB>
-                    <a:solidFill>
-                      <a:srgbClr val="137C8E"/>
-                    </a:solidFill>
-                  </a:tcPr>
-                </a:tc>
-                <a:tc>
-                  <a:txBody>
-                    <a:bodyPr/>
-                    <a:lstStyle/>
-                    <a:p>
-                      <a:pPr indent="0" marL="0">
-                        <a:buNone/>
-                      </a:pPr>
-                      <a:r>
-                        <a:rPr lang="en-US" sz="1500" b="1" dirty="0">
-                          <a:solidFill>
-                            <a:srgbClr val="FFFFFF"/>
-                          </a:solidFill>
-                          <a:latin typeface="Calibri" pitchFamily="34" charset="0"/>
-                          <a:ea typeface="Calibri" pitchFamily="34" charset="-122"/>
-                          <a:cs typeface="Calibri" pitchFamily="34" charset="-120"/>
-                        </a:rPr>
-                        <a:t>Ours · clean images</a:t>
-                      </a:r>
-                      <a:endParaRPr lang="en-US" sz="1500" dirty="0">
-                        <a:latin typeface="Calibri" charset="0"/>
-                        <a:ea typeface="Calibri" charset="0"/>
-                        <a:cs typeface="Calibri" charset="0"/>
-                      </a:endParaRPr>
-                    </a:p>
-                  </a:txBody>
-                  <a:tcPr marL="73152" marR="73152" marT="27432" marB="27432" anchor="ctr">
-                    <a:lnL w="9525" cap="flat" cmpd="sng" algn="ctr">
-                      <a:solidFill>
-                        <a:srgbClr val="D7E3E6"/>
-                      </a:solidFill>
-                      <a:prstDash val="solid"/>
-                      <a:round/>
-                      <a:headEnd type="none" w="med" len="med"/>
-                      <a:tailEnd type="none" w="med" len="med"/>
-                    </a:lnL>
-                    <a:lnR w="9525" cap="flat" cmpd="sng" algn="ctr">
-                      <a:solidFill>
-                        <a:srgbClr val="D7E3E6"/>
-                      </a:solidFill>
-                      <a:prstDash val="solid"/>
-                      <a:round/>
-                      <a:headEnd type="none" w="med" len="med"/>
-                      <a:tailEnd type="none" w="med" len="med"/>
-                    </a:lnR>
-                    <a:lnT w="9525" cap="flat" cmpd="sng" algn="ctr">
-                      <a:solidFill>
-                        <a:srgbClr val="D7E3E6"/>
-                      </a:solidFill>
-                      <a:prstDash val="solid"/>
-                      <a:round/>
-                      <a:headEnd type="none" w="med" len="med"/>
-                      <a:tailEnd type="none" w="med" len="med"/>
-                    </a:lnT>
-                    <a:lnB w="9525" cap="flat" cmpd="sng" algn="ctr">
-                      <a:solidFill>
-                        <a:srgbClr val="D7E3E6"/>
-                      </a:solidFill>
-                      <a:prstDash val="solid"/>
-                      <a:round/>
-                      <a:headEnd type="none" w="med" len="med"/>
-                      <a:tailEnd type="none" w="med" len="med"/>
-                    </a:lnB>
-                    <a:solidFill>
-                      <a:srgbClr val="137C8E"/>
-                    </a:solidFill>
-                  </a:tcPr>
-                </a:tc>
-                <a:tc>
-                  <a:txBody>
-                    <a:bodyPr/>
-                    <a:lstStyle/>
-                    <a:p>
-                      <a:pPr indent="0" marL="0">
-                        <a:buNone/>
-                      </a:pPr>
-                      <a:r>
-                        <a:rPr lang="en-US" sz="1500" b="1" dirty="0">
-                          <a:solidFill>
-                            <a:srgbClr val="FFFFFF"/>
-                          </a:solidFill>
-                          <a:latin typeface="Calibri" pitchFamily="34" charset="0"/>
-                          <a:ea typeface="Calibri" pitchFamily="34" charset="-122"/>
-                          <a:cs typeface="Calibri" pitchFamily="34" charset="-120"/>
-                        </a:rPr>
-                        <a:t>Δ (pp)</a:t>
-                      </a:r>
-                      <a:endParaRPr lang="en-US" sz="1500" dirty="0">
-                        <a:latin typeface="Calibri" charset="0"/>
-                        <a:ea typeface="Calibri" charset="0"/>
-                        <a:cs typeface="Calibri" charset="0"/>
-                      </a:endParaRPr>
-                    </a:p>
-                  </a:txBody>
-                  <a:tcPr marL="73152" marR="73152" marT="27432" marB="27432" anchor="ctr">
-                    <a:lnL w="9525" cap="flat" cmpd="sng" algn="ctr">
-                      <a:solidFill>
-                        <a:srgbClr val="D7E3E6"/>
-                      </a:solidFill>
-                      <a:prstDash val="solid"/>
-                      <a:round/>
-                      <a:headEnd type="none" w="med" len="med"/>
-                      <a:tailEnd type="none" w="med" len="med"/>
-                    </a:lnL>
-                    <a:lnR w="9525" cap="flat" cmpd="sng" algn="ctr">
-                      <a:solidFill>
-                        <a:srgbClr val="D7E3E6"/>
-                      </a:solidFill>
-                      <a:prstDash val="solid"/>
-                      <a:round/>
-                      <a:headEnd type="none" w="med" len="med"/>
-                      <a:tailEnd type="none" w="med" len="med"/>
-                    </a:lnR>
-                    <a:lnT w="9525" cap="flat" cmpd="sng" algn="ctr">
-                      <a:solidFill>
-                        <a:srgbClr val="D7E3E6"/>
-                      </a:solidFill>
-                      <a:prstDash val="solid"/>
-                      <a:round/>
-                      <a:headEnd type="none" w="med" len="med"/>
-                      <a:tailEnd type="none" w="med" len="med"/>
-                    </a:lnT>
-                    <a:lnB w="9525" cap="flat" cmpd="sng" algn="ctr">
-                      <a:solidFill>
-                        <a:srgbClr val="D7E3E6"/>
-                      </a:solidFill>
-                      <a:prstDash val="solid"/>
-                      <a:round/>
-                      <a:headEnd type="none" w="med" len="med"/>
-                      <a:tailEnd type="none" w="med" len="med"/>
-                    </a:lnB>
-                    <a:solidFill>
-                      <a:srgbClr val="137C8E"/>
-                    </a:solidFill>
-                  </a:tcPr>
-                </a:tc>
-              </a:tr>
-              <a:tr h="457200">
-                <a:tc>
-                  <a:txBody>
-                    <a:bodyPr/>
-                    <a:lstStyle/>
-                    <a:p>
-                      <a:pPr indent="0" marL="0">
-                        <a:buNone/>
-                      </a:pPr>
-                      <a:r>
-                        <a:rPr lang="en-US" sz="1500" b="1" dirty="0">
-                          <a:solidFill>
-                            <a:srgbClr val="1E293B"/>
-                          </a:solidFill>
-                          <a:latin typeface="Calibri" pitchFamily="34" charset="0"/>
-                          <a:ea typeface="Calibri" pitchFamily="34" charset="-122"/>
-                          <a:cs typeface="Calibri" pitchFamily="34" charset="-120"/>
-                        </a:rPr>
-                        <a:t>Mean CV-fold accuracy (Table 5)</a:t>
-                      </a:r>
-                      <a:endParaRPr lang="en-US" sz="1500" dirty="0">
-                        <a:latin typeface="Calibri" charset="0"/>
-                        <a:ea typeface="Calibri" charset="0"/>
-                        <a:cs typeface="Calibri" charset="0"/>
-                      </a:endParaRPr>
-                    </a:p>
-                  </a:txBody>
-                  <a:tcPr marL="73152" marR="73152" marT="27432" marB="27432" anchor="ctr">
-                    <a:lnL w="9525" cap="flat" cmpd="sng" algn="ctr">
-                      <a:solidFill>
-                        <a:srgbClr val="D7E3E6"/>
-                      </a:solidFill>
-                      <a:prstDash val="solid"/>
-                      <a:round/>
-                      <a:headEnd type="none" w="med" len="med"/>
-                      <a:tailEnd type="none" w="med" len="med"/>
-                    </a:lnL>
-                    <a:lnR w="9525" cap="flat" cmpd="sng" algn="ctr">
-                      <a:solidFill>
-                        <a:srgbClr val="D7E3E6"/>
-                      </a:solidFill>
-                      <a:prstDash val="solid"/>
-                      <a:round/>
-                      <a:headEnd type="none" w="med" len="med"/>
-                      <a:tailEnd type="none" w="med" len="med"/>
-                    </a:lnR>
-                    <a:lnT w="9525" cap="flat" cmpd="sng" algn="ctr">
-                      <a:solidFill>
-                        <a:srgbClr val="D7E3E6"/>
-                      </a:solidFill>
-                      <a:prstDash val="solid"/>
-                      <a:round/>
-                      <a:headEnd type="none" w="med" len="med"/>
-                      <a:tailEnd type="none" w="med" len="med"/>
-                    </a:lnT>
-                    <a:lnB w="9525" cap="flat" cmpd="sng" algn="ctr">
-                      <a:solidFill>
-                        <a:srgbClr val="D7E3E6"/>
-                      </a:solidFill>
-                      <a:prstDash val="solid"/>
-                      <a:round/>
-                      <a:headEnd type="none" w="med" len="med"/>
-                      <a:tailEnd type="none" w="med" len="med"/>
-                    </a:lnB>
-                    <a:solidFill>
-                      <a:srgbClr val="EEF4F5"/>
-                    </a:solidFill>
-                  </a:tcPr>
-                </a:tc>
-                <a:tc>
-                  <a:txBody>
-                    <a:bodyPr/>
-                    <a:lstStyle/>
-                    <a:p>
-                      <a:pPr algn="ctr" indent="0" marL="0">
-                        <a:buNone/>
-                      </a:pPr>
-                      <a:r>
-                        <a:rPr lang="en-US" sz="1500" dirty="0">
-                          <a:solidFill>
-                            <a:srgbClr val="1E293B"/>
-                          </a:solidFill>
-                          <a:latin typeface="Calibri" pitchFamily="34" charset="0"/>
-                          <a:ea typeface="Calibri" pitchFamily="34" charset="-122"/>
-                          <a:cs typeface="Calibri" pitchFamily="34" charset="-120"/>
-                        </a:rPr>
-                        <a:t>97.56</a:t>
-                      </a:r>
-                      <a:endParaRPr lang="en-US" sz="1500" dirty="0">
-                        <a:latin typeface="Calibri" charset="0"/>
-                        <a:ea typeface="Calibri" charset="0"/>
-                        <a:cs typeface="Calibri" charset="0"/>
-                      </a:endParaRPr>
-                    </a:p>
-                  </a:txBody>
-                  <a:tcPr marL="73152" marR="73152" marT="27432" marB="27432" anchor="ctr">
-                    <a:lnL w="9525" cap="flat" cmpd="sng" algn="ctr">
-                      <a:solidFill>
-                        <a:srgbClr val="D7E3E6"/>
-                      </a:solidFill>
-                      <a:prstDash val="solid"/>
-                      <a:round/>
-                      <a:headEnd type="none" w="med" len="med"/>
-                      <a:tailEnd type="none" w="med" len="med"/>
-                    </a:lnL>
-                    <a:lnR w="9525" cap="flat" cmpd="sng" algn="ctr">
-                      <a:solidFill>
-                        <a:srgbClr val="D7E3E6"/>
-                      </a:solidFill>
-                      <a:prstDash val="solid"/>
-                      <a:round/>
-                      <a:headEnd type="none" w="med" len="med"/>
-                      <a:tailEnd type="none" w="med" len="med"/>
-                    </a:lnR>
-                    <a:lnT w="9525" cap="flat" cmpd="sng" algn="ctr">
-                      <a:solidFill>
-                        <a:srgbClr val="D7E3E6"/>
-                      </a:solidFill>
-                      <a:prstDash val="solid"/>
-                      <a:round/>
-                      <a:headEnd type="none" w="med" len="med"/>
-                      <a:tailEnd type="none" w="med" len="med"/>
-                    </a:lnT>
-                    <a:lnB w="9525" cap="flat" cmpd="sng" algn="ctr">
-                      <a:solidFill>
-                        <a:srgbClr val="D7E3E6"/>
-                      </a:solidFill>
-                      <a:prstDash val="solid"/>
-                      <a:round/>
-                      <a:headEnd type="none" w="med" len="med"/>
-                      <a:tailEnd type="none" w="med" len="med"/>
-                    </a:lnB>
-                    <a:solidFill>
-                      <a:srgbClr val="EEF4F5"/>
-                    </a:solidFill>
-                  </a:tcPr>
-                </a:tc>
-                <a:tc>
-                  <a:txBody>
-                    <a:bodyPr/>
-                    <a:lstStyle/>
-                    <a:p>
-                      <a:pPr algn="ctr" indent="0" marL="0">
-                        <a:buNone/>
-                      </a:pPr>
-                      <a:r>
-                        <a:rPr lang="en-US" sz="1500" b="1" dirty="0">
-                          <a:solidFill>
-                            <a:srgbClr val="137C8E"/>
-                          </a:solidFill>
-                          <a:latin typeface="Calibri" pitchFamily="34" charset="0"/>
-                          <a:ea typeface="Calibri" pitchFamily="34" charset="-122"/>
-                          <a:cs typeface="Calibri" pitchFamily="34" charset="-120"/>
-                        </a:rPr>
-                        <a:t>97.55</a:t>
-                      </a:r>
-                      <a:endParaRPr lang="en-US" sz="1500" dirty="0">
-                        <a:latin typeface="Calibri" charset="0"/>
-                        <a:ea typeface="Calibri" charset="0"/>
-                        <a:cs typeface="Calibri" charset="0"/>
-                      </a:endParaRPr>
-                    </a:p>
-                  </a:txBody>
-                  <a:tcPr marL="73152" marR="73152" marT="27432" marB="27432" anchor="ctr">
-                    <a:lnL w="9525" cap="flat" cmpd="sng" algn="ctr">
-                      <a:solidFill>
-                        <a:srgbClr val="D7E3E6"/>
-                      </a:solidFill>
-                      <a:prstDash val="solid"/>
-                      <a:round/>
-                      <a:headEnd type="none" w="med" len="med"/>
-                      <a:tailEnd type="none" w="med" len="med"/>
-                    </a:lnL>
-                    <a:lnR w="9525" cap="flat" cmpd="sng" algn="ctr">
-                      <a:solidFill>
-                        <a:srgbClr val="D7E3E6"/>
-                      </a:solidFill>
-                      <a:prstDash val="solid"/>
-                      <a:round/>
-                      <a:headEnd type="none" w="med" len="med"/>
-                      <a:tailEnd type="none" w="med" len="med"/>
-                    </a:lnR>
-                    <a:lnT w="9525" cap="flat" cmpd="sng" algn="ctr">
-                      <a:solidFill>
-                        <a:srgbClr val="D7E3E6"/>
-                      </a:solidFill>
-                      <a:prstDash val="solid"/>
-                      <a:round/>
-                      <a:headEnd type="none" w="med" len="med"/>
-                      <a:tailEnd type="none" w="med" len="med"/>
-                    </a:lnT>
-                    <a:lnB w="9525" cap="flat" cmpd="sng" algn="ctr">
-                      <a:solidFill>
-                        <a:srgbClr val="D7E3E6"/>
-                      </a:solidFill>
-                      <a:prstDash val="solid"/>
-                      <a:round/>
-                      <a:headEnd type="none" w="med" len="med"/>
-                      <a:tailEnd type="none" w="med" len="med"/>
-                    </a:lnB>
-                    <a:solidFill>
-                      <a:srgbClr val="EEF4F5"/>
-                    </a:solidFill>
-                  </a:tcPr>
-                </a:tc>
-                <a:tc>
-                  <a:txBody>
-                    <a:bodyPr/>
-                    <a:lstStyle/>
-                    <a:p>
-                      <a:pPr algn="ctr" indent="0" marL="0">
-                        <a:buNone/>
-                      </a:pPr>
-                      <a:r>
-                        <a:rPr lang="en-US" sz="1500" dirty="0">
-                          <a:solidFill>
-                            <a:srgbClr val="1E293B"/>
-                          </a:solidFill>
-                          <a:latin typeface="Calibri" pitchFamily="34" charset="0"/>
-                          <a:ea typeface="Calibri" pitchFamily="34" charset="-122"/>
-                          <a:cs typeface="Calibri" pitchFamily="34" charset="-120"/>
-                        </a:rPr>
-                        <a:t>97.78</a:t>
-                      </a:r>
-                      <a:endParaRPr lang="en-US" sz="1500" dirty="0">
-                        <a:latin typeface="Calibri" charset="0"/>
-                        <a:ea typeface="Calibri" charset="0"/>
-                        <a:cs typeface="Calibri" charset="0"/>
-                      </a:endParaRPr>
-                    </a:p>
-                  </a:txBody>
-                  <a:tcPr marL="73152" marR="73152" marT="27432" marB="27432" anchor="ctr">
-                    <a:lnL w="9525" cap="flat" cmpd="sng" algn="ctr">
-                      <a:solidFill>
-                        <a:srgbClr val="D7E3E6"/>
-                      </a:solidFill>
-                      <a:prstDash val="solid"/>
-                      <a:round/>
-                      <a:headEnd type="none" w="med" len="med"/>
-                      <a:tailEnd type="none" w="med" len="med"/>
-                    </a:lnL>
-                    <a:lnR w="9525" cap="flat" cmpd="sng" algn="ctr">
-                      <a:solidFill>
-                        <a:srgbClr val="D7E3E6"/>
-                      </a:solidFill>
-                      <a:prstDash val="solid"/>
-                      <a:round/>
-                      <a:headEnd type="none" w="med" len="med"/>
-                      <a:tailEnd type="none" w="med" len="med"/>
-                    </a:lnR>
-                    <a:lnT w="9525" cap="flat" cmpd="sng" algn="ctr">
-                      <a:solidFill>
-                        <a:srgbClr val="D7E3E6"/>
-                      </a:solidFill>
-                      <a:prstDash val="solid"/>
-                      <a:round/>
-                      <a:headEnd type="none" w="med" len="med"/>
-                      <a:tailEnd type="none" w="med" len="med"/>
-                    </a:lnT>
-                    <a:lnB w="9525" cap="flat" cmpd="sng" algn="ctr">
-                      <a:solidFill>
-                        <a:srgbClr val="D7E3E6"/>
-                      </a:solidFill>
-                      <a:prstDash val="solid"/>
-                      <a:round/>
-                      <a:headEnd type="none" w="med" len="med"/>
-                      <a:tailEnd type="none" w="med" len="med"/>
-                    </a:lnB>
-                    <a:solidFill>
-                      <a:srgbClr val="EEF4F5"/>
-                    </a:solidFill>
-                  </a:tcPr>
-                </a:tc>
-                <a:tc>
-                  <a:txBody>
-                    <a:bodyPr/>
-                    <a:lstStyle/>
-                    <a:p>
-                      <a:pPr algn="ctr" indent="0" marL="0">
-                        <a:buNone/>
-                      </a:pPr>
-                      <a:r>
-                        <a:rPr lang="en-US" sz="1500" b="1" dirty="0">
-                          <a:solidFill>
-                            <a:srgbClr val="2E8B6E"/>
-                          </a:solidFill>
-                          <a:latin typeface="Calibri" pitchFamily="34" charset="0"/>
-                          <a:ea typeface="Calibri" pitchFamily="34" charset="-122"/>
-                          <a:cs typeface="Calibri" pitchFamily="34" charset="-120"/>
-                        </a:rPr>
-                        <a:t>-0.01</a:t>
-                      </a:r>
-                      <a:endParaRPr lang="en-US" sz="1500" dirty="0">
-                        <a:latin typeface="Calibri" charset="0"/>
-                        <a:ea typeface="Calibri" charset="0"/>
-                        <a:cs typeface="Calibri" charset="0"/>
-                      </a:endParaRPr>
-                    </a:p>
-                  </a:txBody>
-                  <a:tcPr marL="73152" marR="73152" marT="27432" marB="27432" anchor="ctr">
-                    <a:lnL w="9525" cap="flat" cmpd="sng" algn="ctr">
-                      <a:solidFill>
-                        <a:srgbClr val="D7E3E6"/>
-                      </a:solidFill>
-                      <a:prstDash val="solid"/>
-                      <a:round/>
-                      <a:headEnd type="none" w="med" len="med"/>
-                      <a:tailEnd type="none" w="med" len="med"/>
-                    </a:lnL>
-                    <a:lnR w="9525" cap="flat" cmpd="sng" algn="ctr">
-                      <a:solidFill>
-                        <a:srgbClr val="D7E3E6"/>
-                      </a:solidFill>
-                      <a:prstDash val="solid"/>
-                      <a:round/>
-                      <a:headEnd type="none" w="med" len="med"/>
-                      <a:tailEnd type="none" w="med" len="med"/>
-                    </a:lnR>
-                    <a:lnT w="9525" cap="flat" cmpd="sng" algn="ctr">
-                      <a:solidFill>
-                        <a:srgbClr val="D7E3E6"/>
-                      </a:solidFill>
-                      <a:prstDash val="solid"/>
-                      <a:round/>
-                      <a:headEnd type="none" w="med" len="med"/>
-                      <a:tailEnd type="none" w="med" len="med"/>
-                    </a:lnT>
-                    <a:lnB w="9525" cap="flat" cmpd="sng" algn="ctr">
-                      <a:solidFill>
-                        <a:srgbClr val="D7E3E6"/>
-                      </a:solidFill>
-                      <a:prstDash val="solid"/>
-                      <a:round/>
-                      <a:headEnd type="none" w="med" len="med"/>
-                      <a:tailEnd type="none" w="med" len="med"/>
-                    </a:lnB>
-                    <a:solidFill>
-                      <a:srgbClr val="EEF4F5"/>
-                    </a:solidFill>
-                  </a:tcPr>
-                </a:tc>
-              </a:tr>
-              <a:tr h="457200">
-                <a:tc>
-                  <a:txBody>
-                    <a:bodyPr/>
-                    <a:lstStyle/>
-                    <a:p>
-                      <a:pPr indent="0" marL="0">
-                        <a:buNone/>
-                      </a:pPr>
-                      <a:r>
-                        <a:rPr lang="en-US" sz="1500" b="1" dirty="0">
-                          <a:solidFill>
-                            <a:srgbClr val="1E293B"/>
-                          </a:solidFill>
-                          <a:latin typeface="Calibri" pitchFamily="34" charset="0"/>
-                          <a:ea typeface="Calibri" pitchFamily="34" charset="-122"/>
-                          <a:cs typeface="Calibri" pitchFamily="34" charset="-120"/>
-                        </a:rPr>
-                        <a:t>Mean single-model hold-out accuracy (Table 6)</a:t>
-                      </a:r>
-                      <a:endParaRPr lang="en-US" sz="1500" dirty="0">
-                        <a:latin typeface="Calibri" charset="0"/>
-                        <a:ea typeface="Calibri" charset="0"/>
-                        <a:cs typeface="Calibri" charset="0"/>
-                      </a:endParaRPr>
-                    </a:p>
-                  </a:txBody>
-                  <a:tcPr marL="73152" marR="73152" marT="27432" marB="27432" anchor="ctr">
-                    <a:lnL w="9525" cap="flat" cmpd="sng" algn="ctr">
-                      <a:solidFill>
-                        <a:srgbClr val="D7E3E6"/>
-                      </a:solidFill>
-                      <a:prstDash val="solid"/>
-                      <a:round/>
-                      <a:headEnd type="none" w="med" len="med"/>
-                      <a:tailEnd type="none" w="med" len="med"/>
-                    </a:lnL>
-                    <a:lnR w="9525" cap="flat" cmpd="sng" algn="ctr">
-                      <a:solidFill>
-                        <a:srgbClr val="D7E3E6"/>
-                      </a:solidFill>
-                      <a:prstDash val="solid"/>
-                      <a:round/>
-                      <a:headEnd type="none" w="med" len="med"/>
-                      <a:tailEnd type="none" w="med" len="med"/>
-                    </a:lnR>
-                    <a:lnT w="9525" cap="flat" cmpd="sng" algn="ctr">
-                      <a:solidFill>
-                        <a:srgbClr val="D7E3E6"/>
-                      </a:solidFill>
-                      <a:prstDash val="solid"/>
-                      <a:round/>
-                      <a:headEnd type="none" w="med" len="med"/>
-                      <a:tailEnd type="none" w="med" len="med"/>
-                    </a:lnT>
-                    <a:lnB w="9525" cap="flat" cmpd="sng" algn="ctr">
-                      <a:solidFill>
-                        <a:srgbClr val="D7E3E6"/>
-                      </a:solidFill>
-                      <a:prstDash val="solid"/>
-                      <a:round/>
-                      <a:headEnd type="none" w="med" len="med"/>
-                      <a:tailEnd type="none" w="med" len="med"/>
-                    </a:lnB>
-                    <a:solidFill>
-                      <a:srgbClr val="FFFFFF"/>
-                    </a:solidFill>
-                  </a:tcPr>
-                </a:tc>
-                <a:tc>
-                  <a:txBody>
-                    <a:bodyPr/>
-                    <a:lstStyle/>
-                    <a:p>
-                      <a:pPr algn="ctr" indent="0" marL="0">
-                        <a:buNone/>
-                      </a:pPr>
-                      <a:r>
-                        <a:rPr lang="en-US" sz="1500" dirty="0">
-                          <a:solidFill>
-                            <a:srgbClr val="1E293B"/>
-                          </a:solidFill>
-                          <a:latin typeface="Calibri" pitchFamily="34" charset="0"/>
-                          <a:ea typeface="Calibri" pitchFamily="34" charset="-122"/>
-                          <a:cs typeface="Calibri" pitchFamily="34" charset="-120"/>
-                        </a:rPr>
-                        <a:t>97.69</a:t>
-                      </a:r>
-                      <a:endParaRPr lang="en-US" sz="1500" dirty="0">
-                        <a:latin typeface="Calibri" charset="0"/>
-                        <a:ea typeface="Calibri" charset="0"/>
-                        <a:cs typeface="Calibri" charset="0"/>
-                      </a:endParaRPr>
-                    </a:p>
-                  </a:txBody>
-                  <a:tcPr marL="73152" marR="73152" marT="27432" marB="27432" anchor="ctr">
-                    <a:lnL w="9525" cap="flat" cmpd="sng" algn="ctr">
-                      <a:solidFill>
-                        <a:srgbClr val="D7E3E6"/>
-                      </a:solidFill>
-                      <a:prstDash val="solid"/>
-                      <a:round/>
-                      <a:headEnd type="none" w="med" len="med"/>
-                      <a:tailEnd type="none" w="med" len="med"/>
-                    </a:lnL>
-                    <a:lnR w="9525" cap="flat" cmpd="sng" algn="ctr">
-                      <a:solidFill>
-                        <a:srgbClr val="D7E3E6"/>
-                      </a:solidFill>
-                      <a:prstDash val="solid"/>
-                      <a:round/>
-                      <a:headEnd type="none" w="med" len="med"/>
-                      <a:tailEnd type="none" w="med" len="med"/>
-                    </a:lnR>
-                    <a:lnT w="9525" cap="flat" cmpd="sng" algn="ctr">
-                      <a:solidFill>
-                        <a:srgbClr val="D7E3E6"/>
-                      </a:solidFill>
-                      <a:prstDash val="solid"/>
-                      <a:round/>
-                      <a:headEnd type="none" w="med" len="med"/>
-                      <a:tailEnd type="none" w="med" len="med"/>
-                    </a:lnT>
-                    <a:lnB w="9525" cap="flat" cmpd="sng" algn="ctr">
-                      <a:solidFill>
-                        <a:srgbClr val="D7E3E6"/>
-                      </a:solidFill>
-                      <a:prstDash val="solid"/>
-                      <a:round/>
-                      <a:headEnd type="none" w="med" len="med"/>
-                      <a:tailEnd type="none" w="med" len="med"/>
-                    </a:lnB>
-                    <a:solidFill>
-                      <a:srgbClr val="FFFFFF"/>
-                    </a:solidFill>
-                  </a:tcPr>
-                </a:tc>
-                <a:tc>
-                  <a:txBody>
-                    <a:bodyPr/>
-                    <a:lstStyle/>
-                    <a:p>
-                      <a:pPr algn="ctr" indent="0" marL="0">
-                        <a:buNone/>
-                      </a:pPr>
-                      <a:r>
-                        <a:rPr lang="en-US" sz="1500" b="1" dirty="0">
-                          <a:solidFill>
-                            <a:srgbClr val="137C8E"/>
-                          </a:solidFill>
-                          <a:latin typeface="Calibri" pitchFamily="34" charset="0"/>
-                          <a:ea typeface="Calibri" pitchFamily="34" charset="-122"/>
-                          <a:cs typeface="Calibri" pitchFamily="34" charset="-120"/>
-                        </a:rPr>
-                        <a:t>97.37</a:t>
-                      </a:r>
-                      <a:endParaRPr lang="en-US" sz="1500" dirty="0">
-                        <a:latin typeface="Calibri" charset="0"/>
-                        <a:ea typeface="Calibri" charset="0"/>
-                        <a:cs typeface="Calibri" charset="0"/>
-                      </a:endParaRPr>
-                    </a:p>
-                  </a:txBody>
-                  <a:tcPr marL="73152" marR="73152" marT="27432" marB="27432" anchor="ctr">
-                    <a:lnL w="9525" cap="flat" cmpd="sng" algn="ctr">
-                      <a:solidFill>
-                        <a:srgbClr val="D7E3E6"/>
-                      </a:solidFill>
-                      <a:prstDash val="solid"/>
-                      <a:round/>
-                      <a:headEnd type="none" w="med" len="med"/>
-                      <a:tailEnd type="none" w="med" len="med"/>
-                    </a:lnL>
-                    <a:lnR w="9525" cap="flat" cmpd="sng" algn="ctr">
-                      <a:solidFill>
-                        <a:srgbClr val="D7E3E6"/>
-                      </a:solidFill>
-                      <a:prstDash val="solid"/>
-                      <a:round/>
-                      <a:headEnd type="none" w="med" len="med"/>
-                      <a:tailEnd type="none" w="med" len="med"/>
-                    </a:lnR>
-                    <a:lnT w="9525" cap="flat" cmpd="sng" algn="ctr">
-                      <a:solidFill>
-                        <a:srgbClr val="D7E3E6"/>
-                      </a:solidFill>
-                      <a:prstDash val="solid"/>
-                      <a:round/>
-                      <a:headEnd type="none" w="med" len="med"/>
-                      <a:tailEnd type="none" w="med" len="med"/>
-                    </a:lnT>
-                    <a:lnB w="9525" cap="flat" cmpd="sng" algn="ctr">
-                      <a:solidFill>
-                        <a:srgbClr val="D7E3E6"/>
-                      </a:solidFill>
-                      <a:prstDash val="solid"/>
-                      <a:round/>
-                      <a:headEnd type="none" w="med" len="med"/>
-                      <a:tailEnd type="none" w="med" len="med"/>
-                    </a:lnB>
-                    <a:solidFill>
-                      <a:srgbClr val="FFFFFF"/>
-                    </a:solidFill>
-                  </a:tcPr>
-                </a:tc>
-                <a:tc>
-                  <a:txBody>
-                    <a:bodyPr/>
-                    <a:lstStyle/>
-                    <a:p>
-                      <a:pPr algn="ctr" indent="0" marL="0">
-                        <a:buNone/>
-                      </a:pPr>
-                      <a:r>
-                        <a:rPr lang="en-US" sz="1500" dirty="0">
-                          <a:solidFill>
-                            <a:srgbClr val="1E293B"/>
-                          </a:solidFill>
-                          <a:latin typeface="Calibri" pitchFamily="34" charset="0"/>
-                          <a:ea typeface="Calibri" pitchFamily="34" charset="-122"/>
-                          <a:cs typeface="Calibri" pitchFamily="34" charset="-120"/>
-                        </a:rPr>
-                        <a:t>97.48</a:t>
-                      </a:r>
-                      <a:endParaRPr lang="en-US" sz="1500" dirty="0">
-                        <a:latin typeface="Calibri" charset="0"/>
-                        <a:ea typeface="Calibri" charset="0"/>
-                        <a:cs typeface="Calibri" charset="0"/>
-                      </a:endParaRPr>
-                    </a:p>
-                  </a:txBody>
-                  <a:tcPr marL="73152" marR="73152" marT="27432" marB="27432" anchor="ctr">
-                    <a:lnL w="9525" cap="flat" cmpd="sng" algn="ctr">
-                      <a:solidFill>
-                        <a:srgbClr val="D7E3E6"/>
-                      </a:solidFill>
-                      <a:prstDash val="solid"/>
-                      <a:round/>
-                      <a:headEnd type="none" w="med" len="med"/>
-                      <a:tailEnd type="none" w="med" len="med"/>
-                    </a:lnL>
-                    <a:lnR w="9525" cap="flat" cmpd="sng" algn="ctr">
-                      <a:solidFill>
-                        <a:srgbClr val="D7E3E6"/>
-                      </a:solidFill>
-                      <a:prstDash val="solid"/>
-                      <a:round/>
-                      <a:headEnd type="none" w="med" len="med"/>
-                      <a:tailEnd type="none" w="med" len="med"/>
-                    </a:lnR>
-                    <a:lnT w="9525" cap="flat" cmpd="sng" algn="ctr">
-                      <a:solidFill>
-                        <a:srgbClr val="D7E3E6"/>
-                      </a:solidFill>
-                      <a:prstDash val="solid"/>
-                      <a:round/>
-                      <a:headEnd type="none" w="med" len="med"/>
-                      <a:tailEnd type="none" w="med" len="med"/>
-                    </a:lnT>
-                    <a:lnB w="9525" cap="flat" cmpd="sng" algn="ctr">
-                      <a:solidFill>
-                        <a:srgbClr val="D7E3E6"/>
-                      </a:solidFill>
-                      <a:prstDash val="solid"/>
-                      <a:round/>
-                      <a:headEnd type="none" w="med" len="med"/>
-                      <a:tailEnd type="none" w="med" len="med"/>
-                    </a:lnB>
-                    <a:solidFill>
-                      <a:srgbClr val="FFFFFF"/>
-                    </a:solidFill>
-                  </a:tcPr>
-                </a:tc>
-                <a:tc>
-                  <a:txBody>
-                    <a:bodyPr/>
-                    <a:lstStyle/>
-                    <a:p>
-                      <a:pPr algn="ctr" indent="0" marL="0">
-                        <a:buNone/>
-                      </a:pPr>
-                      <a:r>
-                        <a:rPr lang="en-US" sz="1500" b="1" dirty="0">
-                          <a:solidFill>
-                            <a:srgbClr val="2E8B6E"/>
-                          </a:solidFill>
-                          <a:latin typeface="Calibri" pitchFamily="34" charset="0"/>
-                          <a:ea typeface="Calibri" pitchFamily="34" charset="-122"/>
-                          <a:cs typeface="Calibri" pitchFamily="34" charset="-120"/>
-                        </a:rPr>
-                        <a:t>-0.32</a:t>
-                      </a:r>
-                      <a:endParaRPr lang="en-US" sz="1500" dirty="0">
-                        <a:latin typeface="Calibri" charset="0"/>
-                        <a:ea typeface="Calibri" charset="0"/>
-                        <a:cs typeface="Calibri" charset="0"/>
-                      </a:endParaRPr>
-                    </a:p>
-                  </a:txBody>
-                  <a:tcPr marL="73152" marR="73152" marT="27432" marB="27432" anchor="ctr">
-                    <a:lnL w="9525" cap="flat" cmpd="sng" algn="ctr">
-                      <a:solidFill>
-                        <a:srgbClr val="D7E3E6"/>
-                      </a:solidFill>
-                      <a:prstDash val="solid"/>
-                      <a:round/>
-                      <a:headEnd type="none" w="med" len="med"/>
-                      <a:tailEnd type="none" w="med" len="med"/>
-                    </a:lnL>
-                    <a:lnR w="9525" cap="flat" cmpd="sng" algn="ctr">
-                      <a:solidFill>
-                        <a:srgbClr val="D7E3E6"/>
-                      </a:solidFill>
-                      <a:prstDash val="solid"/>
-                      <a:round/>
-                      <a:headEnd type="none" w="med" len="med"/>
-                      <a:tailEnd type="none" w="med" len="med"/>
-                    </a:lnR>
-                    <a:lnT w="9525" cap="flat" cmpd="sng" algn="ctr">
-                      <a:solidFill>
-                        <a:srgbClr val="D7E3E6"/>
-                      </a:solidFill>
-                      <a:prstDash val="solid"/>
-                      <a:round/>
-                      <a:headEnd type="none" w="med" len="med"/>
-                      <a:tailEnd type="none" w="med" len="med"/>
-                    </a:lnT>
-                    <a:lnB w="9525" cap="flat" cmpd="sng" algn="ctr">
-                      <a:solidFill>
-                        <a:srgbClr val="D7E3E6"/>
-                      </a:solidFill>
-                      <a:prstDash val="solid"/>
-                      <a:round/>
-                      <a:headEnd type="none" w="med" len="med"/>
-                      <a:tailEnd type="none" w="med" len="med"/>
-                    </a:lnB>
-                    <a:solidFill>
-                      <a:srgbClr val="FFFFFF"/>
-                    </a:solidFill>
-                  </a:tcPr>
-                </a:tc>
-              </a:tr>
-              <a:tr h="457200">
-                <a:tc>
-                  <a:txBody>
-                    <a:bodyPr/>
-                    <a:lstStyle/>
-                    <a:p>
-                      <a:pPr indent="0" marL="0">
-                        <a:buNone/>
-                      </a:pPr>
-                      <a:r>
-                        <a:rPr lang="en-US" sz="1500" b="1" dirty="0">
-                          <a:solidFill>
-                            <a:srgbClr val="1E293B"/>
-                          </a:solidFill>
-                          <a:latin typeface="Calibri" pitchFamily="34" charset="0"/>
-                          <a:ea typeface="Calibri" pitchFamily="34" charset="-122"/>
-                          <a:cs typeface="Calibri" pitchFamily="34" charset="-120"/>
-                        </a:rPr>
-                        <a:t>Ensemble accuracy</a:t>
-                      </a:r>
-                      <a:endParaRPr lang="en-US" sz="1500" dirty="0">
-                        <a:latin typeface="Calibri" charset="0"/>
-                        <a:ea typeface="Calibri" charset="0"/>
-                        <a:cs typeface="Calibri" charset="0"/>
-                      </a:endParaRPr>
-                    </a:p>
-                  </a:txBody>
-                  <a:tcPr marL="73152" marR="73152" marT="27432" marB="27432" anchor="ctr">
-                    <a:lnL w="9525" cap="flat" cmpd="sng" algn="ctr">
-                      <a:solidFill>
-                        <a:srgbClr val="D7E3E6"/>
-                      </a:solidFill>
-                      <a:prstDash val="solid"/>
-                      <a:round/>
-                      <a:headEnd type="none" w="med" len="med"/>
-                      <a:tailEnd type="none" w="med" len="med"/>
-                    </a:lnL>
-                    <a:lnR w="9525" cap="flat" cmpd="sng" algn="ctr">
-                      <a:solidFill>
-                        <a:srgbClr val="D7E3E6"/>
-                      </a:solidFill>
-                      <a:prstDash val="solid"/>
-                      <a:round/>
-                      <a:headEnd type="none" w="med" len="med"/>
-                      <a:tailEnd type="none" w="med" len="med"/>
-                    </a:lnR>
-                    <a:lnT w="9525" cap="flat" cmpd="sng" algn="ctr">
-                      <a:solidFill>
-                        <a:srgbClr val="D7E3E6"/>
-                      </a:solidFill>
-                      <a:prstDash val="solid"/>
-                      <a:round/>
-                      <a:headEnd type="none" w="med" len="med"/>
-                      <a:tailEnd type="none" w="med" len="med"/>
-                    </a:lnT>
-                    <a:lnB w="9525" cap="flat" cmpd="sng" algn="ctr">
-                      <a:solidFill>
-                        <a:srgbClr val="D7E3E6"/>
-                      </a:solidFill>
-                      <a:prstDash val="solid"/>
-                      <a:round/>
-                      <a:headEnd type="none" w="med" len="med"/>
-                      <a:tailEnd type="none" w="med" len="med"/>
-                    </a:lnB>
-                    <a:solidFill>
-                      <a:srgbClr val="EEF4F5"/>
-                    </a:solidFill>
-                  </a:tcPr>
-                </a:tc>
-                <a:tc>
-                  <a:txBody>
-                    <a:bodyPr/>
-                    <a:lstStyle/>
-                    <a:p>
-                      <a:pPr algn="ctr" indent="0" marL="0">
-                        <a:buNone/>
-                      </a:pPr>
-                      <a:r>
-                        <a:rPr lang="en-US" sz="1500" dirty="0">
-                          <a:solidFill>
-                            <a:srgbClr val="1E293B"/>
-                          </a:solidFill>
-                          <a:latin typeface="Calibri" pitchFamily="34" charset="0"/>
-                          <a:ea typeface="Calibri" pitchFamily="34" charset="-122"/>
-                          <a:cs typeface="Calibri" pitchFamily="34" charset="-120"/>
-                        </a:rPr>
-                        <a:t>98.29</a:t>
-                      </a:r>
-                      <a:endParaRPr lang="en-US" sz="1500" dirty="0">
-                        <a:latin typeface="Calibri" charset="0"/>
-                        <a:ea typeface="Calibri" charset="0"/>
-                        <a:cs typeface="Calibri" charset="0"/>
-                      </a:endParaRPr>
-                    </a:p>
-                  </a:txBody>
-                  <a:tcPr marL="73152" marR="73152" marT="27432" marB="27432" anchor="ctr">
-                    <a:lnL w="9525" cap="flat" cmpd="sng" algn="ctr">
-                      <a:solidFill>
-                        <a:srgbClr val="D7E3E6"/>
-                      </a:solidFill>
-                      <a:prstDash val="solid"/>
-                      <a:round/>
-                      <a:headEnd type="none" w="med" len="med"/>
-                      <a:tailEnd type="none" w="med" len="med"/>
-                    </a:lnL>
-                    <a:lnR w="9525" cap="flat" cmpd="sng" algn="ctr">
-                      <a:solidFill>
-                        <a:srgbClr val="D7E3E6"/>
-                      </a:solidFill>
-                      <a:prstDash val="solid"/>
-                      <a:round/>
-                      <a:headEnd type="none" w="med" len="med"/>
-                      <a:tailEnd type="none" w="med" len="med"/>
-                    </a:lnR>
-                    <a:lnT w="9525" cap="flat" cmpd="sng" algn="ctr">
-                      <a:solidFill>
-                        <a:srgbClr val="D7E3E6"/>
-                      </a:solidFill>
-                      <a:prstDash val="solid"/>
-                      <a:round/>
-                      <a:headEnd type="none" w="med" len="med"/>
-                      <a:tailEnd type="none" w="med" len="med"/>
-                    </a:lnT>
-                    <a:lnB w="9525" cap="flat" cmpd="sng" algn="ctr">
-                      <a:solidFill>
-                        <a:srgbClr val="D7E3E6"/>
-                      </a:solidFill>
-                      <a:prstDash val="solid"/>
-                      <a:round/>
-                      <a:headEnd type="none" w="med" len="med"/>
-                      <a:tailEnd type="none" w="med" len="med"/>
-                    </a:lnB>
-                    <a:solidFill>
-                      <a:srgbClr val="EEF4F5"/>
-                    </a:solidFill>
-                  </a:tcPr>
-                </a:tc>
-                <a:tc>
-                  <a:txBody>
-                    <a:bodyPr/>
-                    <a:lstStyle/>
-                    <a:p>
-                      <a:pPr algn="ctr" indent="0" marL="0">
-                        <a:buNone/>
-                      </a:pPr>
-                      <a:r>
-                        <a:rPr lang="en-US" sz="1500" b="1" dirty="0">
-                          <a:solidFill>
-                            <a:srgbClr val="137C8E"/>
-                          </a:solidFill>
-                          <a:latin typeface="Calibri" pitchFamily="34" charset="0"/>
-                          <a:ea typeface="Calibri" pitchFamily="34" charset="-122"/>
-                          <a:cs typeface="Calibri" pitchFamily="34" charset="-120"/>
-                        </a:rPr>
-                        <a:t>97.62</a:t>
-                      </a:r>
-                      <a:endParaRPr lang="en-US" sz="1500" dirty="0">
-                        <a:latin typeface="Calibri" charset="0"/>
-                        <a:ea typeface="Calibri" charset="0"/>
-                        <a:cs typeface="Calibri" charset="0"/>
-                      </a:endParaRPr>
-                    </a:p>
-                  </a:txBody>
-                  <a:tcPr marL="73152" marR="73152" marT="27432" marB="27432" anchor="ctr">
-                    <a:lnL w="9525" cap="flat" cmpd="sng" algn="ctr">
-                      <a:solidFill>
-                        <a:srgbClr val="D7E3E6"/>
-                      </a:solidFill>
-                      <a:prstDash val="solid"/>
-                      <a:round/>
-                      <a:headEnd type="none" w="med" len="med"/>
-                      <a:tailEnd type="none" w="med" len="med"/>
-                    </a:lnL>
-                    <a:lnR w="9525" cap="flat" cmpd="sng" algn="ctr">
-                      <a:solidFill>
-                        <a:srgbClr val="D7E3E6"/>
-                      </a:solidFill>
-                      <a:prstDash val="solid"/>
-                      <a:round/>
-                      <a:headEnd type="none" w="med" len="med"/>
-                      <a:tailEnd type="none" w="med" len="med"/>
-                    </a:lnR>
-                    <a:lnT w="9525" cap="flat" cmpd="sng" algn="ctr">
-                      <a:solidFill>
-                        <a:srgbClr val="D7E3E6"/>
-                      </a:solidFill>
-                      <a:prstDash val="solid"/>
-                      <a:round/>
-                      <a:headEnd type="none" w="med" len="med"/>
-                      <a:tailEnd type="none" w="med" len="med"/>
-                    </a:lnT>
-                    <a:lnB w="9525" cap="flat" cmpd="sng" algn="ctr">
-                      <a:solidFill>
-                        <a:srgbClr val="D7E3E6"/>
-                      </a:solidFill>
-                      <a:prstDash val="solid"/>
-                      <a:round/>
-                      <a:headEnd type="none" w="med" len="med"/>
-                      <a:tailEnd type="none" w="med" len="med"/>
-                    </a:lnB>
-                    <a:solidFill>
-                      <a:srgbClr val="EEF4F5"/>
-                    </a:solidFill>
-                  </a:tcPr>
-                </a:tc>
-                <a:tc>
-                  <a:txBody>
-                    <a:bodyPr/>
-                    <a:lstStyle/>
-                    <a:p>
-                      <a:pPr algn="ctr" indent="0" marL="0">
-                        <a:buNone/>
-                      </a:pPr>
-                      <a:r>
-                        <a:rPr lang="en-US" sz="1500" dirty="0">
-                          <a:solidFill>
-                            <a:srgbClr val="1E293B"/>
-                          </a:solidFill>
-                          <a:latin typeface="Calibri" pitchFamily="34" charset="0"/>
-                          <a:ea typeface="Calibri" pitchFamily="34" charset="-122"/>
-                          <a:cs typeface="Calibri" pitchFamily="34" charset="-120"/>
-                        </a:rPr>
-                        <a:t>97.64</a:t>
-                      </a:r>
-                      <a:endParaRPr lang="en-US" sz="1500" dirty="0">
-                        <a:latin typeface="Calibri" charset="0"/>
-                        <a:ea typeface="Calibri" charset="0"/>
-                        <a:cs typeface="Calibri" charset="0"/>
-                      </a:endParaRPr>
-                    </a:p>
-                  </a:txBody>
-                  <a:tcPr marL="73152" marR="73152" marT="27432" marB="27432" anchor="ctr">
-                    <a:lnL w="9525" cap="flat" cmpd="sng" algn="ctr">
-                      <a:solidFill>
-                        <a:srgbClr val="D7E3E6"/>
-                      </a:solidFill>
-                      <a:prstDash val="solid"/>
-                      <a:round/>
-                      <a:headEnd type="none" w="med" len="med"/>
-                      <a:tailEnd type="none" w="med" len="med"/>
-                    </a:lnL>
-                    <a:lnR w="9525" cap="flat" cmpd="sng" algn="ctr">
-                      <a:solidFill>
-                        <a:srgbClr val="D7E3E6"/>
-                      </a:solidFill>
-                      <a:prstDash val="solid"/>
-                      <a:round/>
-                      <a:headEnd type="none" w="med" len="med"/>
-                      <a:tailEnd type="none" w="med" len="med"/>
-                    </a:lnR>
-                    <a:lnT w="9525" cap="flat" cmpd="sng" algn="ctr">
-                      <a:solidFill>
-                        <a:srgbClr val="D7E3E6"/>
-                      </a:solidFill>
-                      <a:prstDash val="solid"/>
-                      <a:round/>
-                      <a:headEnd type="none" w="med" len="med"/>
-                      <a:tailEnd type="none" w="med" len="med"/>
-                    </a:lnT>
-                    <a:lnB w="9525" cap="flat" cmpd="sng" algn="ctr">
-                      <a:solidFill>
-                        <a:srgbClr val="D7E3E6"/>
-                      </a:solidFill>
-                      <a:prstDash val="solid"/>
-                      <a:round/>
-                      <a:headEnd type="none" w="med" len="med"/>
-                      <a:tailEnd type="none" w="med" len="med"/>
-                    </a:lnB>
-                    <a:solidFill>
-                      <a:srgbClr val="EEF4F5"/>
-                    </a:solidFill>
-                  </a:tcPr>
-                </a:tc>
-                <a:tc>
-                  <a:txBody>
-                    <a:bodyPr/>
-                    <a:lstStyle/>
-                    <a:p>
-                      <a:pPr algn="ctr" indent="0" marL="0">
-                        <a:buNone/>
-                      </a:pPr>
-                      <a:r>
-                        <a:rPr lang="en-US" sz="1500" b="1" dirty="0">
-                          <a:solidFill>
-                            <a:srgbClr val="2E8B6E"/>
-                          </a:solidFill>
-                          <a:latin typeface="Calibri" pitchFamily="34" charset="0"/>
-                          <a:ea typeface="Calibri" pitchFamily="34" charset="-122"/>
-                          <a:cs typeface="Calibri" pitchFamily="34" charset="-120"/>
-                        </a:rPr>
-                        <a:t>-0.67</a:t>
-                      </a:r>
-                      <a:endParaRPr lang="en-US" sz="1500" dirty="0">
-                        <a:latin typeface="Calibri" charset="0"/>
-                        <a:ea typeface="Calibri" charset="0"/>
-                        <a:cs typeface="Calibri" charset="0"/>
-                      </a:endParaRPr>
-                    </a:p>
-                  </a:txBody>
-                  <a:tcPr marL="73152" marR="73152" marT="27432" marB="27432" anchor="ctr">
-                    <a:lnL w="9525" cap="flat" cmpd="sng" algn="ctr">
-                      <a:solidFill>
-                        <a:srgbClr val="D7E3E6"/>
-                      </a:solidFill>
-                      <a:prstDash val="solid"/>
-                      <a:round/>
-                      <a:headEnd type="none" w="med" len="med"/>
-                      <a:tailEnd type="none" w="med" len="med"/>
-                    </a:lnL>
-                    <a:lnR w="9525" cap="flat" cmpd="sng" algn="ctr">
-                      <a:solidFill>
-                        <a:srgbClr val="D7E3E6"/>
-                      </a:solidFill>
-                      <a:prstDash val="solid"/>
-                      <a:round/>
-                      <a:headEnd type="none" w="med" len="med"/>
-                      <a:tailEnd type="none" w="med" len="med"/>
-                    </a:lnR>
-                    <a:lnT w="9525" cap="flat" cmpd="sng" algn="ctr">
-                      <a:solidFill>
-                        <a:srgbClr val="D7E3E6"/>
-                      </a:solidFill>
-                      <a:prstDash val="solid"/>
-                      <a:round/>
-                      <a:headEnd type="none" w="med" len="med"/>
-                      <a:tailEnd type="none" w="med" len="med"/>
-                    </a:lnT>
-                    <a:lnB w="9525" cap="flat" cmpd="sng" algn="ctr">
-                      <a:solidFill>
-                        <a:srgbClr val="D7E3E6"/>
-                      </a:solidFill>
-                      <a:prstDash val="solid"/>
-                      <a:round/>
-                      <a:headEnd type="none" w="med" len="med"/>
-                      <a:tailEnd type="none" w="med" len="med"/>
-                    </a:lnB>
-                    <a:solidFill>
-                      <a:srgbClr val="EEF4F5"/>
-                    </a:solidFill>
-                  </a:tcPr>
-                </a:tc>
-              </a:tr>
-              <a:tr h="457200">
-                <a:tc>
-                  <a:txBody>
-                    <a:bodyPr/>
-                    <a:lstStyle/>
-                    <a:p>
-                      <a:pPr indent="0" marL="0">
-                        <a:buNone/>
-                      </a:pPr>
-                      <a:r>
-                        <a:rPr lang="en-US" sz="1500" b="1" dirty="0">
-                          <a:solidFill>
-                            <a:srgbClr val="1E293B"/>
-                          </a:solidFill>
-                          <a:latin typeface="Calibri" pitchFamily="34" charset="0"/>
-                          <a:ea typeface="Calibri" pitchFamily="34" charset="-122"/>
-                          <a:cs typeface="Calibri" pitchFamily="34" charset="-120"/>
-                        </a:rPr>
-                        <a:t>Ensemble recall, parasitized</a:t>
-                      </a:r>
-                      <a:endParaRPr lang="en-US" sz="1500" dirty="0">
-                        <a:latin typeface="Calibri" charset="0"/>
-                        <a:ea typeface="Calibri" charset="0"/>
-                        <a:cs typeface="Calibri" charset="0"/>
-                      </a:endParaRPr>
-                    </a:p>
-                  </a:txBody>
-                  <a:tcPr marL="73152" marR="73152" marT="27432" marB="27432" anchor="ctr">
-                    <a:lnL w="9525" cap="flat" cmpd="sng" algn="ctr">
-                      <a:solidFill>
-                        <a:srgbClr val="D7E3E6"/>
-                      </a:solidFill>
-                      <a:prstDash val="solid"/>
-                      <a:round/>
-                      <a:headEnd type="none" w="med" len="med"/>
-                      <a:tailEnd type="none" w="med" len="med"/>
-                    </a:lnL>
-                    <a:lnR w="9525" cap="flat" cmpd="sng" algn="ctr">
-                      <a:solidFill>
-                        <a:srgbClr val="D7E3E6"/>
-                      </a:solidFill>
-                      <a:prstDash val="solid"/>
-                      <a:round/>
-                      <a:headEnd type="none" w="med" len="med"/>
-                      <a:tailEnd type="none" w="med" len="med"/>
-                    </a:lnR>
-                    <a:lnT w="9525" cap="flat" cmpd="sng" algn="ctr">
-                      <a:solidFill>
-                        <a:srgbClr val="D7E3E6"/>
-                      </a:solidFill>
-                      <a:prstDash val="solid"/>
-                      <a:round/>
-                      <a:headEnd type="none" w="med" len="med"/>
-                      <a:tailEnd type="none" w="med" len="med"/>
-                    </a:lnT>
-                    <a:lnB w="9525" cap="flat" cmpd="sng" algn="ctr">
-                      <a:solidFill>
-                        <a:srgbClr val="D7E3E6"/>
-                      </a:solidFill>
-                      <a:prstDash val="solid"/>
-                      <a:round/>
-                      <a:headEnd type="none" w="med" len="med"/>
-                      <a:tailEnd type="none" w="med" len="med"/>
-                    </a:lnB>
-                    <a:solidFill>
-                      <a:srgbClr val="FFFFFF"/>
-                    </a:solidFill>
-                  </a:tcPr>
-                </a:tc>
-                <a:tc>
-                  <a:txBody>
-                    <a:bodyPr/>
-                    <a:lstStyle/>
-                    <a:p>
-                      <a:pPr algn="ctr" indent="0" marL="0">
-                        <a:buNone/>
-                      </a:pPr>
-                      <a:r>
-                        <a:rPr lang="en-US" sz="1500" dirty="0">
-                          <a:solidFill>
-                            <a:srgbClr val="1E293B"/>
-                          </a:solidFill>
-                          <a:latin typeface="Calibri" pitchFamily="34" charset="0"/>
-                          <a:ea typeface="Calibri" pitchFamily="34" charset="-122"/>
-                          <a:cs typeface="Calibri" pitchFamily="34" charset="-120"/>
-                        </a:rPr>
-                        <a:t>97.74</a:t>
-                      </a:r>
-                      <a:endParaRPr lang="en-US" sz="1500" dirty="0">
-                        <a:latin typeface="Calibri" charset="0"/>
-                        <a:ea typeface="Calibri" charset="0"/>
-                        <a:cs typeface="Calibri" charset="0"/>
-                      </a:endParaRPr>
-                    </a:p>
-                  </a:txBody>
-                  <a:tcPr marL="73152" marR="73152" marT="27432" marB="27432" anchor="ctr">
-                    <a:lnL w="9525" cap="flat" cmpd="sng" algn="ctr">
-                      <a:solidFill>
-                        <a:srgbClr val="D7E3E6"/>
-                      </a:solidFill>
-                      <a:prstDash val="solid"/>
-                      <a:round/>
-                      <a:headEnd type="none" w="med" len="med"/>
-                      <a:tailEnd type="none" w="med" len="med"/>
-                    </a:lnL>
-                    <a:lnR w="9525" cap="flat" cmpd="sng" algn="ctr">
-                      <a:solidFill>
-                        <a:srgbClr val="D7E3E6"/>
-                      </a:solidFill>
-                      <a:prstDash val="solid"/>
-                      <a:round/>
-                      <a:headEnd type="none" w="med" len="med"/>
-                      <a:tailEnd type="none" w="med" len="med"/>
-                    </a:lnR>
-                    <a:lnT w="9525" cap="flat" cmpd="sng" algn="ctr">
-                      <a:solidFill>
-                        <a:srgbClr val="D7E3E6"/>
-                      </a:solidFill>
-                      <a:prstDash val="solid"/>
-                      <a:round/>
-                      <a:headEnd type="none" w="med" len="med"/>
-                      <a:tailEnd type="none" w="med" len="med"/>
-                    </a:lnT>
-                    <a:lnB w="9525" cap="flat" cmpd="sng" algn="ctr">
-                      <a:solidFill>
-                        <a:srgbClr val="D7E3E6"/>
-                      </a:solidFill>
-                      <a:prstDash val="solid"/>
-                      <a:round/>
-                      <a:headEnd type="none" w="med" len="med"/>
-                      <a:tailEnd type="none" w="med" len="med"/>
-                    </a:lnB>
-                    <a:solidFill>
-                      <a:srgbClr val="FFFFFF"/>
-                    </a:solidFill>
-                  </a:tcPr>
-                </a:tc>
-                <a:tc>
-                  <a:txBody>
-                    <a:bodyPr/>
-                    <a:lstStyle/>
-                    <a:p>
-                      <a:pPr algn="ctr" indent="0" marL="0">
-                        <a:buNone/>
-                      </a:pPr>
-                      <a:r>
-                        <a:rPr lang="en-US" sz="1500" b="1" dirty="0">
-                          <a:solidFill>
-                            <a:srgbClr val="137C8E"/>
-                          </a:solidFill>
-                          <a:latin typeface="Calibri" pitchFamily="34" charset="0"/>
-                          <a:ea typeface="Calibri" pitchFamily="34" charset="-122"/>
-                          <a:cs typeface="Calibri" pitchFamily="34" charset="-120"/>
-                        </a:rPr>
-                        <a:t>97.07</a:t>
-                      </a:r>
-                      <a:endParaRPr lang="en-US" sz="1500" dirty="0">
-                        <a:latin typeface="Calibri" charset="0"/>
-                        <a:ea typeface="Calibri" charset="0"/>
-                        <a:cs typeface="Calibri" charset="0"/>
-                      </a:endParaRPr>
-                    </a:p>
-                  </a:txBody>
-                  <a:tcPr marL="73152" marR="73152" marT="27432" marB="27432" anchor="ctr">
-                    <a:lnL w="9525" cap="flat" cmpd="sng" algn="ctr">
-                      <a:solidFill>
-                        <a:srgbClr val="D7E3E6"/>
-                      </a:solidFill>
-                      <a:prstDash val="solid"/>
-                      <a:round/>
-                      <a:headEnd type="none" w="med" len="med"/>
-                      <a:tailEnd type="none" w="med" len="med"/>
-                    </a:lnL>
-                    <a:lnR w="9525" cap="flat" cmpd="sng" algn="ctr">
-                      <a:solidFill>
-                        <a:srgbClr val="D7E3E6"/>
-                      </a:solidFill>
-                      <a:prstDash val="solid"/>
-                      <a:round/>
-                      <a:headEnd type="none" w="med" len="med"/>
-                      <a:tailEnd type="none" w="med" len="med"/>
-                    </a:lnR>
-                    <a:lnT w="9525" cap="flat" cmpd="sng" algn="ctr">
-                      <a:solidFill>
-                        <a:srgbClr val="D7E3E6"/>
-                      </a:solidFill>
-                      <a:prstDash val="solid"/>
-                      <a:round/>
-                      <a:headEnd type="none" w="med" len="med"/>
-                      <a:tailEnd type="none" w="med" len="med"/>
-                    </a:lnT>
-                    <a:lnB w="9525" cap="flat" cmpd="sng" algn="ctr">
-                      <a:solidFill>
-                        <a:srgbClr val="D7E3E6"/>
-                      </a:solidFill>
-                      <a:prstDash val="solid"/>
-                      <a:round/>
-                      <a:headEnd type="none" w="med" len="med"/>
-                      <a:tailEnd type="none" w="med" len="med"/>
-                    </a:lnB>
-                    <a:solidFill>
-                      <a:srgbClr val="FFFFFF"/>
-                    </a:solidFill>
-                  </a:tcPr>
-                </a:tc>
-                <a:tc>
-                  <a:txBody>
-                    <a:bodyPr/>
-                    <a:lstStyle/>
-                    <a:p>
-                      <a:pPr algn="ctr" indent="0" marL="0">
-                        <a:buNone/>
-                      </a:pPr>
-                      <a:r>
-                        <a:rPr lang="en-US" sz="1500" dirty="0">
-                          <a:solidFill>
-                            <a:srgbClr val="1E293B"/>
-                          </a:solidFill>
-                          <a:latin typeface="Calibri" pitchFamily="34" charset="0"/>
-                          <a:ea typeface="Calibri" pitchFamily="34" charset="-122"/>
-                          <a:cs typeface="Calibri" pitchFamily="34" charset="-120"/>
-                        </a:rPr>
-                        <a:t>97.18</a:t>
-                      </a:r>
-                      <a:endParaRPr lang="en-US" sz="1500" dirty="0">
-                        <a:latin typeface="Calibri" charset="0"/>
-                        <a:ea typeface="Calibri" charset="0"/>
-                        <a:cs typeface="Calibri" charset="0"/>
-                      </a:endParaRPr>
-                    </a:p>
-                  </a:txBody>
-                  <a:tcPr marL="73152" marR="73152" marT="27432" marB="27432" anchor="ctr">
-                    <a:lnL w="9525" cap="flat" cmpd="sng" algn="ctr">
-                      <a:solidFill>
-                        <a:srgbClr val="D7E3E6"/>
-                      </a:solidFill>
-                      <a:prstDash val="solid"/>
-                      <a:round/>
-                      <a:headEnd type="none" w="med" len="med"/>
-                      <a:tailEnd type="none" w="med" len="med"/>
-                    </a:lnL>
-                    <a:lnR w="9525" cap="flat" cmpd="sng" algn="ctr">
-                      <a:solidFill>
-                        <a:srgbClr val="D7E3E6"/>
-                      </a:solidFill>
-                      <a:prstDash val="solid"/>
-                      <a:round/>
-                      <a:headEnd type="none" w="med" len="med"/>
-                      <a:tailEnd type="none" w="med" len="med"/>
-                    </a:lnR>
-                    <a:lnT w="9525" cap="flat" cmpd="sng" algn="ctr">
-                      <a:solidFill>
-                        <a:srgbClr val="D7E3E6"/>
-                      </a:solidFill>
-                      <a:prstDash val="solid"/>
-                      <a:round/>
-                      <a:headEnd type="none" w="med" len="med"/>
-                      <a:tailEnd type="none" w="med" len="med"/>
-                    </a:lnT>
-                    <a:lnB w="9525" cap="flat" cmpd="sng" algn="ctr">
-                      <a:solidFill>
-                        <a:srgbClr val="D7E3E6"/>
-                      </a:solidFill>
-                      <a:prstDash val="solid"/>
-                      <a:round/>
-                      <a:headEnd type="none" w="med" len="med"/>
-                      <a:tailEnd type="none" w="med" len="med"/>
-                    </a:lnB>
-                    <a:solidFill>
-                      <a:srgbClr val="FFFFFF"/>
-                    </a:solidFill>
-                  </a:tcPr>
-                </a:tc>
-                <a:tc>
-                  <a:txBody>
-                    <a:bodyPr/>
-                    <a:lstStyle/>
-                    <a:p>
-                      <a:pPr algn="ctr" indent="0" marL="0">
-                        <a:buNone/>
-                      </a:pPr>
-                      <a:r>
-                        <a:rPr lang="en-US" sz="1500" b="1" dirty="0">
-                          <a:solidFill>
-                            <a:srgbClr val="2E8B6E"/>
-                          </a:solidFill>
-                          <a:latin typeface="Calibri" pitchFamily="34" charset="0"/>
-                          <a:ea typeface="Calibri" pitchFamily="34" charset="-122"/>
-                          <a:cs typeface="Calibri" pitchFamily="34" charset="-120"/>
-                        </a:rPr>
-                        <a:t>-0.67</a:t>
-                      </a:r>
-                      <a:endParaRPr lang="en-US" sz="1500" dirty="0">
-                        <a:latin typeface="Calibri" charset="0"/>
-                        <a:ea typeface="Calibri" charset="0"/>
-                        <a:cs typeface="Calibri" charset="0"/>
-                      </a:endParaRPr>
-                    </a:p>
-                  </a:txBody>
-                  <a:tcPr marL="73152" marR="73152" marT="27432" marB="27432" anchor="ctr">
-                    <a:lnL w="9525" cap="flat" cmpd="sng" algn="ctr">
-                      <a:solidFill>
-                        <a:srgbClr val="D7E3E6"/>
-                      </a:solidFill>
-                      <a:prstDash val="solid"/>
-                      <a:round/>
-                      <a:headEnd type="none" w="med" len="med"/>
-                      <a:tailEnd type="none" w="med" len="med"/>
-                    </a:lnL>
-                    <a:lnR w="9525" cap="flat" cmpd="sng" algn="ctr">
-                      <a:solidFill>
-                        <a:srgbClr val="D7E3E6"/>
-                      </a:solidFill>
-                      <a:prstDash val="solid"/>
-                      <a:round/>
-                      <a:headEnd type="none" w="med" len="med"/>
-                      <a:tailEnd type="none" w="med" len="med"/>
-                    </a:lnR>
-                    <a:lnT w="9525" cap="flat" cmpd="sng" algn="ctr">
-                      <a:solidFill>
-                        <a:srgbClr val="D7E3E6"/>
-                      </a:solidFill>
-                      <a:prstDash val="solid"/>
-                      <a:round/>
-                      <a:headEnd type="none" w="med" len="med"/>
-                      <a:tailEnd type="none" w="med" len="med"/>
-                    </a:lnT>
-                    <a:lnB w="9525" cap="flat" cmpd="sng" algn="ctr">
-                      <a:solidFill>
-                        <a:srgbClr val="D7E3E6"/>
-                      </a:solidFill>
-                      <a:prstDash val="solid"/>
-                      <a:round/>
-                      <a:headEnd type="none" w="med" len="med"/>
-                      <a:tailEnd type="none" w="med" len="med"/>
-                    </a:lnB>
-                    <a:solidFill>
-                      <a:srgbClr val="FFFFFF"/>
-                    </a:solidFill>
-                  </a:tcPr>
-                </a:tc>
-              </a:tr>
-              <a:tr h="457200">
-                <a:tc>
-                  <a:txBody>
-                    <a:bodyPr/>
-                    <a:lstStyle/>
-                    <a:p>
-                      <a:pPr indent="0" marL="0">
-                        <a:buNone/>
-                      </a:pPr>
-                      <a:r>
-                        <a:rPr lang="en-US" sz="1500" b="1" dirty="0">
-                          <a:solidFill>
-                            <a:srgbClr val="1E293B"/>
-                          </a:solidFill>
-                          <a:latin typeface="Calibri" pitchFamily="34" charset="0"/>
-                          <a:ea typeface="Calibri" pitchFamily="34" charset="-122"/>
-                          <a:cs typeface="Calibri" pitchFamily="34" charset="-120"/>
-                        </a:rPr>
-                        <a:t>Ensemble precision, parasitized</a:t>
-                      </a:r>
-                      <a:endParaRPr lang="en-US" sz="1500" dirty="0">
-                        <a:latin typeface="Calibri" charset="0"/>
-                        <a:ea typeface="Calibri" charset="0"/>
-                        <a:cs typeface="Calibri" charset="0"/>
-                      </a:endParaRPr>
-                    </a:p>
-                  </a:txBody>
-                  <a:tcPr marL="73152" marR="73152" marT="27432" marB="27432" anchor="ctr">
-                    <a:lnL w="9525" cap="flat" cmpd="sng" algn="ctr">
-                      <a:solidFill>
-                        <a:srgbClr val="D7E3E6"/>
-                      </a:solidFill>
-                      <a:prstDash val="solid"/>
-                      <a:round/>
-                      <a:headEnd type="none" w="med" len="med"/>
-                      <a:tailEnd type="none" w="med" len="med"/>
-                    </a:lnL>
-                    <a:lnR w="9525" cap="flat" cmpd="sng" algn="ctr">
-                      <a:solidFill>
-                        <a:srgbClr val="D7E3E6"/>
-                      </a:solidFill>
-                      <a:prstDash val="solid"/>
-                      <a:round/>
-                      <a:headEnd type="none" w="med" len="med"/>
-                      <a:tailEnd type="none" w="med" len="med"/>
-                    </a:lnR>
-                    <a:lnT w="9525" cap="flat" cmpd="sng" algn="ctr">
-                      <a:solidFill>
-                        <a:srgbClr val="D7E3E6"/>
-                      </a:solidFill>
-                      <a:prstDash val="solid"/>
-                      <a:round/>
-                      <a:headEnd type="none" w="med" len="med"/>
-                      <a:tailEnd type="none" w="med" len="med"/>
-                    </a:lnT>
-                    <a:lnB w="9525" cap="flat" cmpd="sng" algn="ctr">
-                      <a:solidFill>
-                        <a:srgbClr val="D7E3E6"/>
-                      </a:solidFill>
-                      <a:prstDash val="solid"/>
-                      <a:round/>
-                      <a:headEnd type="none" w="med" len="med"/>
-                      <a:tailEnd type="none" w="med" len="med"/>
-                    </a:lnB>
-                    <a:solidFill>
-                      <a:srgbClr val="EEF4F5"/>
-                    </a:solidFill>
-                  </a:tcPr>
-                </a:tc>
-                <a:tc>
-                  <a:txBody>
-                    <a:bodyPr/>
-                    <a:lstStyle/>
-                    <a:p>
-                      <a:pPr algn="ctr" indent="0" marL="0">
-                        <a:buNone/>
-                      </a:pPr>
-                      <a:r>
-                        <a:rPr lang="en-US" sz="1500" dirty="0">
-                          <a:solidFill>
-                            <a:srgbClr val="1E293B"/>
-                          </a:solidFill>
-                          <a:latin typeface="Calibri" pitchFamily="34" charset="0"/>
-                          <a:ea typeface="Calibri" pitchFamily="34" charset="-122"/>
-                          <a:cs typeface="Calibri" pitchFamily="34" charset="-120"/>
-                        </a:rPr>
-                        <a:t>98.82</a:t>
-                      </a:r>
-                      <a:endParaRPr lang="en-US" sz="1500" dirty="0">
-                        <a:latin typeface="Calibri" charset="0"/>
-                        <a:ea typeface="Calibri" charset="0"/>
-                        <a:cs typeface="Calibri" charset="0"/>
-                      </a:endParaRPr>
-                    </a:p>
-                  </a:txBody>
-                  <a:tcPr marL="73152" marR="73152" marT="27432" marB="27432" anchor="ctr">
-                    <a:lnL w="9525" cap="flat" cmpd="sng" algn="ctr">
-                      <a:solidFill>
-                        <a:srgbClr val="D7E3E6"/>
-                      </a:solidFill>
-                      <a:prstDash val="solid"/>
-                      <a:round/>
-                      <a:headEnd type="none" w="med" len="med"/>
-                      <a:tailEnd type="none" w="med" len="med"/>
-                    </a:lnL>
-                    <a:lnR w="9525" cap="flat" cmpd="sng" algn="ctr">
-                      <a:solidFill>
-                        <a:srgbClr val="D7E3E6"/>
-                      </a:solidFill>
-                      <a:prstDash val="solid"/>
-                      <a:round/>
-                      <a:headEnd type="none" w="med" len="med"/>
-                      <a:tailEnd type="none" w="med" len="med"/>
-                    </a:lnR>
-                    <a:lnT w="9525" cap="flat" cmpd="sng" algn="ctr">
-                      <a:solidFill>
-                        <a:srgbClr val="D7E3E6"/>
-                      </a:solidFill>
-                      <a:prstDash val="solid"/>
-                      <a:round/>
-                      <a:headEnd type="none" w="med" len="med"/>
-                      <a:tailEnd type="none" w="med" len="med"/>
-                    </a:lnT>
-                    <a:lnB w="9525" cap="flat" cmpd="sng" algn="ctr">
-                      <a:solidFill>
-                        <a:srgbClr val="D7E3E6"/>
-                      </a:solidFill>
-                      <a:prstDash val="solid"/>
-                      <a:round/>
-                      <a:headEnd type="none" w="med" len="med"/>
-                      <a:tailEnd type="none" w="med" len="med"/>
-                    </a:lnB>
-                    <a:solidFill>
-                      <a:srgbClr val="EEF4F5"/>
-                    </a:solidFill>
-                  </a:tcPr>
-                </a:tc>
-                <a:tc>
-                  <a:txBody>
-                    <a:bodyPr/>
-                    <a:lstStyle/>
-                    <a:p>
-                      <a:pPr algn="ctr" indent="0" marL="0">
-                        <a:buNone/>
-                      </a:pPr>
-                      <a:r>
-                        <a:rPr lang="en-US" sz="1500" b="1" dirty="0">
-                          <a:solidFill>
-                            <a:srgbClr val="137C8E"/>
-                          </a:solidFill>
-                          <a:latin typeface="Calibri" pitchFamily="34" charset="0"/>
-                          <a:ea typeface="Calibri" pitchFamily="34" charset="-122"/>
-                          <a:cs typeface="Calibri" pitchFamily="34" charset="-120"/>
-                        </a:rPr>
-                        <a:t>98.11</a:t>
-                      </a:r>
-                      <a:endParaRPr lang="en-US" sz="1500" dirty="0">
-                        <a:latin typeface="Calibri" charset="0"/>
-                        <a:ea typeface="Calibri" charset="0"/>
-                        <a:cs typeface="Calibri" charset="0"/>
-                      </a:endParaRPr>
-                    </a:p>
-                  </a:txBody>
-                  <a:tcPr marL="73152" marR="73152" marT="27432" marB="27432" anchor="ctr">
-                    <a:lnL w="9525" cap="flat" cmpd="sng" algn="ctr">
-                      <a:solidFill>
-                        <a:srgbClr val="D7E3E6"/>
-                      </a:solidFill>
-                      <a:prstDash val="solid"/>
-                      <a:round/>
-                      <a:headEnd type="none" w="med" len="med"/>
-                      <a:tailEnd type="none" w="med" len="med"/>
-                    </a:lnL>
-                    <a:lnR w="9525" cap="flat" cmpd="sng" algn="ctr">
-                      <a:solidFill>
-                        <a:srgbClr val="D7E3E6"/>
-                      </a:solidFill>
-                      <a:prstDash val="solid"/>
-                      <a:round/>
-                      <a:headEnd type="none" w="med" len="med"/>
-                      <a:tailEnd type="none" w="med" len="med"/>
-                    </a:lnR>
-                    <a:lnT w="9525" cap="flat" cmpd="sng" algn="ctr">
-                      <a:solidFill>
-                        <a:srgbClr val="D7E3E6"/>
-                      </a:solidFill>
-                      <a:prstDash val="solid"/>
-                      <a:round/>
-                      <a:headEnd type="none" w="med" len="med"/>
-                      <a:tailEnd type="none" w="med" len="med"/>
-                    </a:lnT>
-                    <a:lnB w="9525" cap="flat" cmpd="sng" algn="ctr">
-                      <a:solidFill>
-                        <a:srgbClr val="D7E3E6"/>
-                      </a:solidFill>
-                      <a:prstDash val="solid"/>
-                      <a:round/>
-                      <a:headEnd type="none" w="med" len="med"/>
-                      <a:tailEnd type="none" w="med" len="med"/>
-                    </a:lnB>
-                    <a:solidFill>
-                      <a:srgbClr val="EEF4F5"/>
-                    </a:solidFill>
-                  </a:tcPr>
-                </a:tc>
-                <a:tc>
-                  <a:txBody>
-                    <a:bodyPr/>
-                    <a:lstStyle/>
-                    <a:p>
-                      <a:pPr algn="ctr" indent="0" marL="0">
-                        <a:buNone/>
-                      </a:pPr>
-                      <a:r>
-                        <a:rPr lang="en-US" sz="1500" dirty="0">
-                          <a:solidFill>
-                            <a:srgbClr val="1E293B"/>
-                          </a:solidFill>
-                          <a:latin typeface="Calibri" pitchFamily="34" charset="0"/>
-                          <a:ea typeface="Calibri" pitchFamily="34" charset="-122"/>
-                          <a:cs typeface="Calibri" pitchFamily="34" charset="-120"/>
-                        </a:rPr>
-                        <a:t>98.04</a:t>
-                      </a:r>
-                      <a:endParaRPr lang="en-US" sz="1500" dirty="0">
-                        <a:latin typeface="Calibri" charset="0"/>
-                        <a:ea typeface="Calibri" charset="0"/>
-                        <a:cs typeface="Calibri" charset="0"/>
-                      </a:endParaRPr>
-                    </a:p>
-                  </a:txBody>
-                  <a:tcPr marL="73152" marR="73152" marT="27432" marB="27432" anchor="ctr">
-                    <a:lnL w="9525" cap="flat" cmpd="sng" algn="ctr">
-                      <a:solidFill>
-                        <a:srgbClr val="D7E3E6"/>
-                      </a:solidFill>
-                      <a:prstDash val="solid"/>
-                      <a:round/>
-                      <a:headEnd type="none" w="med" len="med"/>
-                      <a:tailEnd type="none" w="med" len="med"/>
-                    </a:lnL>
-                    <a:lnR w="9525" cap="flat" cmpd="sng" algn="ctr">
-                      <a:solidFill>
-                        <a:srgbClr val="D7E3E6"/>
-                      </a:solidFill>
-                      <a:prstDash val="solid"/>
-                      <a:round/>
-                      <a:headEnd type="none" w="med" len="med"/>
-                      <a:tailEnd type="none" w="med" len="med"/>
-                    </a:lnR>
-                    <a:lnT w="9525" cap="flat" cmpd="sng" algn="ctr">
-                      <a:solidFill>
-                        <a:srgbClr val="D7E3E6"/>
-                      </a:solidFill>
-                      <a:prstDash val="solid"/>
-                      <a:round/>
-                      <a:headEnd type="none" w="med" len="med"/>
-                      <a:tailEnd type="none" w="med" len="med"/>
-                    </a:lnT>
-                    <a:lnB w="9525" cap="flat" cmpd="sng" algn="ctr">
-                      <a:solidFill>
-                        <a:srgbClr val="D7E3E6"/>
-                      </a:solidFill>
-                      <a:prstDash val="solid"/>
-                      <a:round/>
-                      <a:headEnd type="none" w="med" len="med"/>
-                      <a:tailEnd type="none" w="med" len="med"/>
-                    </a:lnB>
-                    <a:solidFill>
-                      <a:srgbClr val="EEF4F5"/>
-                    </a:solidFill>
-                  </a:tcPr>
-                </a:tc>
-                <a:tc>
-                  <a:txBody>
-                    <a:bodyPr/>
-                    <a:lstStyle/>
-                    <a:p>
-                      <a:pPr algn="ctr" indent="0" marL="0">
-                        <a:buNone/>
-                      </a:pPr>
-                      <a:r>
-                        <a:rPr lang="en-US" sz="1500" b="1" dirty="0">
-                          <a:solidFill>
-                            <a:srgbClr val="2E8B6E"/>
-                          </a:solidFill>
-                          <a:latin typeface="Calibri" pitchFamily="34" charset="0"/>
-                          <a:ea typeface="Calibri" pitchFamily="34" charset="-122"/>
-                          <a:cs typeface="Calibri" pitchFamily="34" charset="-120"/>
-                        </a:rPr>
-                        <a:t>-0.71</a:t>
-                      </a:r>
-                      <a:endParaRPr lang="en-US" sz="1500" dirty="0">
-                        <a:latin typeface="Calibri" charset="0"/>
-                        <a:ea typeface="Calibri" charset="0"/>
-                        <a:cs typeface="Calibri" charset="0"/>
-                      </a:endParaRPr>
-                    </a:p>
-                  </a:txBody>
-                  <a:tcPr marL="73152" marR="73152" marT="27432" marB="27432" anchor="ctr">
-                    <a:lnL w="9525" cap="flat" cmpd="sng" algn="ctr">
-                      <a:solidFill>
-                        <a:srgbClr val="D7E3E6"/>
-                      </a:solidFill>
-                      <a:prstDash val="solid"/>
-                      <a:round/>
-                      <a:headEnd type="none" w="med" len="med"/>
-                      <a:tailEnd type="none" w="med" len="med"/>
-                    </a:lnL>
-                    <a:lnR w="9525" cap="flat" cmpd="sng" algn="ctr">
-                      <a:solidFill>
-                        <a:srgbClr val="D7E3E6"/>
-                      </a:solidFill>
-                      <a:prstDash val="solid"/>
-                      <a:round/>
-                      <a:headEnd type="none" w="med" len="med"/>
-                      <a:tailEnd type="none" w="med" len="med"/>
-                    </a:lnR>
-                    <a:lnT w="9525" cap="flat" cmpd="sng" algn="ctr">
-                      <a:solidFill>
-                        <a:srgbClr val="D7E3E6"/>
-                      </a:solidFill>
-                      <a:prstDash val="solid"/>
-                      <a:round/>
-                      <a:headEnd type="none" w="med" len="med"/>
-                      <a:tailEnd type="none" w="med" len="med"/>
-                    </a:lnT>
-                    <a:lnB w="9525" cap="flat" cmpd="sng" algn="ctr">
-                      <a:solidFill>
-                        <a:srgbClr val="D7E3E6"/>
-                      </a:solidFill>
-                      <a:prstDash val="solid"/>
-                      <a:round/>
-                      <a:headEnd type="none" w="med" len="med"/>
-                      <a:tailEnd type="none" w="med" len="med"/>
-                    </a:lnB>
-                    <a:solidFill>
-                      <a:srgbClr val="EEF4F5"/>
-                    </a:solidFill>
-                  </a:tcPr>
-                </a:tc>
-              </a:tr>
-              <a:tr h="457200">
-                <a:tc>
-                  <a:txBody>
-                    <a:bodyPr/>
-                    <a:lstStyle/>
-                    <a:p>
-                      <a:pPr indent="0" marL="0">
-                        <a:buNone/>
-                      </a:pPr>
-                      <a:r>
-                        <a:rPr lang="en-US" sz="1500" b="1" dirty="0">
-                          <a:solidFill>
-                            <a:srgbClr val="1E293B"/>
-                          </a:solidFill>
-                          <a:latin typeface="Calibri" pitchFamily="34" charset="0"/>
-                          <a:ea typeface="Calibri" pitchFamily="34" charset="-122"/>
-                          <a:cs typeface="Calibri" pitchFamily="34" charset="-120"/>
-                        </a:rPr>
-                        <a:t>Ensemble ROC-AUC</a:t>
-                      </a:r>
-                      <a:endParaRPr lang="en-US" sz="1500" dirty="0">
-                        <a:latin typeface="Calibri" charset="0"/>
-                        <a:ea typeface="Calibri" charset="0"/>
-                        <a:cs typeface="Calibri" charset="0"/>
-                      </a:endParaRPr>
-                    </a:p>
-                  </a:txBody>
-                  <a:tcPr marL="73152" marR="73152" marT="27432" marB="27432" anchor="ctr">
-                    <a:lnL w="9525" cap="flat" cmpd="sng" algn="ctr">
-                      <a:solidFill>
-                        <a:srgbClr val="D7E3E6"/>
-                      </a:solidFill>
-                      <a:prstDash val="solid"/>
-                      <a:round/>
-                      <a:headEnd type="none" w="med" len="med"/>
-                      <a:tailEnd type="none" w="med" len="med"/>
-                    </a:lnL>
-                    <a:lnR w="9525" cap="flat" cmpd="sng" algn="ctr">
-                      <a:solidFill>
-                        <a:srgbClr val="D7E3E6"/>
-                      </a:solidFill>
-                      <a:prstDash val="solid"/>
-                      <a:round/>
-                      <a:headEnd type="none" w="med" len="med"/>
-                      <a:tailEnd type="none" w="med" len="med"/>
-                    </a:lnR>
-                    <a:lnT w="9525" cap="flat" cmpd="sng" algn="ctr">
-                      <a:solidFill>
-                        <a:srgbClr val="D7E3E6"/>
-                      </a:solidFill>
-                      <a:prstDash val="solid"/>
-                      <a:round/>
-                      <a:headEnd type="none" w="med" len="med"/>
-                      <a:tailEnd type="none" w="med" len="med"/>
-                    </a:lnT>
-                    <a:lnB w="9525" cap="flat" cmpd="sng" algn="ctr">
-                      <a:solidFill>
-                        <a:srgbClr val="D7E3E6"/>
-                      </a:solidFill>
-                      <a:prstDash val="solid"/>
-                      <a:round/>
-                      <a:headEnd type="none" w="med" len="med"/>
-                      <a:tailEnd type="none" w="med" len="med"/>
-                    </a:lnB>
-                    <a:solidFill>
-                      <a:srgbClr val="FFFFFF"/>
-                    </a:solidFill>
-                  </a:tcPr>
-                </a:tc>
-                <a:tc>
-                  <a:txBody>
-                    <a:bodyPr/>
-                    <a:lstStyle/>
-                    <a:p>
-                      <a:pPr algn="ctr" indent="0" marL="0">
-                        <a:buNone/>
-                      </a:pPr>
-                      <a:r>
-                        <a:rPr lang="en-US" sz="1500" dirty="0">
-                          <a:solidFill>
-                            <a:srgbClr val="1E293B"/>
-                          </a:solidFill>
-                          <a:latin typeface="Calibri" pitchFamily="34" charset="0"/>
-                          <a:ea typeface="Calibri" pitchFamily="34" charset="-122"/>
-                          <a:cs typeface="Calibri" pitchFamily="34" charset="-120"/>
-                        </a:rPr>
-                        <a:t>99.76</a:t>
-                      </a:r>
-                      <a:endParaRPr lang="en-US" sz="1500" dirty="0">
-                        <a:latin typeface="Calibri" charset="0"/>
-                        <a:ea typeface="Calibri" charset="0"/>
-                        <a:cs typeface="Calibri" charset="0"/>
-                      </a:endParaRPr>
-                    </a:p>
-                  </a:txBody>
-                  <a:tcPr marL="73152" marR="73152" marT="27432" marB="27432" anchor="ctr">
-                    <a:lnL w="9525" cap="flat" cmpd="sng" algn="ctr">
-                      <a:solidFill>
-                        <a:srgbClr val="D7E3E6"/>
-                      </a:solidFill>
-                      <a:prstDash val="solid"/>
-                      <a:round/>
-                      <a:headEnd type="none" w="med" len="med"/>
-                      <a:tailEnd type="none" w="med" len="med"/>
-                    </a:lnL>
-                    <a:lnR w="9525" cap="flat" cmpd="sng" algn="ctr">
-                      <a:solidFill>
-                        <a:srgbClr val="D7E3E6"/>
-                      </a:solidFill>
-                      <a:prstDash val="solid"/>
-                      <a:round/>
-                      <a:headEnd type="none" w="med" len="med"/>
-                      <a:tailEnd type="none" w="med" len="med"/>
-                    </a:lnR>
-                    <a:lnT w="9525" cap="flat" cmpd="sng" algn="ctr">
-                      <a:solidFill>
-                        <a:srgbClr val="D7E3E6"/>
-                      </a:solidFill>
-                      <a:prstDash val="solid"/>
-                      <a:round/>
-                      <a:headEnd type="none" w="med" len="med"/>
-                      <a:tailEnd type="none" w="med" len="med"/>
-                    </a:lnT>
-                    <a:lnB w="9525" cap="flat" cmpd="sng" algn="ctr">
-                      <a:solidFill>
-                        <a:srgbClr val="D7E3E6"/>
-                      </a:solidFill>
-                      <a:prstDash val="solid"/>
-                      <a:round/>
-                      <a:headEnd type="none" w="med" len="med"/>
-                      <a:tailEnd type="none" w="med" len="med"/>
-                    </a:lnB>
-                    <a:solidFill>
-                      <a:srgbClr val="FFFFFF"/>
-                    </a:solidFill>
-                  </a:tcPr>
-                </a:tc>
-                <a:tc>
-                  <a:txBody>
-                    <a:bodyPr/>
-                    <a:lstStyle/>
-                    <a:p>
-                      <a:pPr algn="ctr" indent="0" marL="0">
-                        <a:buNone/>
-                      </a:pPr>
-                      <a:r>
-                        <a:rPr lang="en-US" sz="1500" b="1" dirty="0">
-                          <a:solidFill>
-                            <a:srgbClr val="137C8E"/>
-                          </a:solidFill>
-                          <a:latin typeface="Calibri" pitchFamily="34" charset="0"/>
-                          <a:ea typeface="Calibri" pitchFamily="34" charset="-122"/>
-                          <a:cs typeface="Calibri" pitchFamily="34" charset="-120"/>
-                        </a:rPr>
-                        <a:t>99.73</a:t>
-                      </a:r>
-                      <a:endParaRPr lang="en-US" sz="1500" dirty="0">
-                        <a:latin typeface="Calibri" charset="0"/>
-                        <a:ea typeface="Calibri" charset="0"/>
-                        <a:cs typeface="Calibri" charset="0"/>
-                      </a:endParaRPr>
-                    </a:p>
-                  </a:txBody>
-                  <a:tcPr marL="73152" marR="73152" marT="27432" marB="27432" anchor="ctr">
-                    <a:lnL w="9525" cap="flat" cmpd="sng" algn="ctr">
-                      <a:solidFill>
-                        <a:srgbClr val="D7E3E6"/>
-                      </a:solidFill>
-                      <a:prstDash val="solid"/>
-                      <a:round/>
-                      <a:headEnd type="none" w="med" len="med"/>
-                      <a:tailEnd type="none" w="med" len="med"/>
-                    </a:lnL>
-                    <a:lnR w="9525" cap="flat" cmpd="sng" algn="ctr">
-                      <a:solidFill>
-                        <a:srgbClr val="D7E3E6"/>
-                      </a:solidFill>
-                      <a:prstDash val="solid"/>
-                      <a:round/>
-                      <a:headEnd type="none" w="med" len="med"/>
-                      <a:tailEnd type="none" w="med" len="med"/>
-                    </a:lnR>
-                    <a:lnT w="9525" cap="flat" cmpd="sng" algn="ctr">
-                      <a:solidFill>
-                        <a:srgbClr val="D7E3E6"/>
-                      </a:solidFill>
-                      <a:prstDash val="solid"/>
-                      <a:round/>
-                      <a:headEnd type="none" w="med" len="med"/>
-                      <a:tailEnd type="none" w="med" len="med"/>
-                    </a:lnT>
-                    <a:lnB w="9525" cap="flat" cmpd="sng" algn="ctr">
-                      <a:solidFill>
-                        <a:srgbClr val="D7E3E6"/>
-                      </a:solidFill>
-                      <a:prstDash val="solid"/>
-                      <a:round/>
-                      <a:headEnd type="none" w="med" len="med"/>
-                      <a:tailEnd type="none" w="med" len="med"/>
-                    </a:lnB>
-                    <a:solidFill>
-                      <a:srgbClr val="FFFFFF"/>
-                    </a:solidFill>
-                  </a:tcPr>
-                </a:tc>
-                <a:tc>
-                  <a:txBody>
-                    <a:bodyPr/>
-                    <a:lstStyle/>
-                    <a:p>
-                      <a:pPr algn="ctr" indent="0" marL="0">
-                        <a:buNone/>
-                      </a:pPr>
-                      <a:r>
-                        <a:rPr lang="en-US" sz="1500" dirty="0">
-                          <a:solidFill>
-                            <a:srgbClr val="1E293B"/>
-                          </a:solidFill>
-                          <a:latin typeface="Calibri" pitchFamily="34" charset="0"/>
-                          <a:ea typeface="Calibri" pitchFamily="34" charset="-122"/>
-                          <a:cs typeface="Calibri" pitchFamily="34" charset="-120"/>
-                        </a:rPr>
-                        <a:t>99.68</a:t>
-                      </a:r>
-                      <a:endParaRPr lang="en-US" sz="1500" dirty="0">
-                        <a:latin typeface="Calibri" charset="0"/>
-                        <a:ea typeface="Calibri" charset="0"/>
-                        <a:cs typeface="Calibri" charset="0"/>
-                      </a:endParaRPr>
-                    </a:p>
-                  </a:txBody>
-                  <a:tcPr marL="73152" marR="73152" marT="27432" marB="27432" anchor="ctr">
-                    <a:lnL w="9525" cap="flat" cmpd="sng" algn="ctr">
-                      <a:solidFill>
-                        <a:srgbClr val="D7E3E6"/>
-                      </a:solidFill>
-                      <a:prstDash val="solid"/>
-                      <a:round/>
-                      <a:headEnd type="none" w="med" len="med"/>
-                      <a:tailEnd type="none" w="med" len="med"/>
-                    </a:lnL>
-                    <a:lnR w="9525" cap="flat" cmpd="sng" algn="ctr">
-                      <a:solidFill>
-                        <a:srgbClr val="D7E3E6"/>
-                      </a:solidFill>
-                      <a:prstDash val="solid"/>
-                      <a:round/>
-                      <a:headEnd type="none" w="med" len="med"/>
-                      <a:tailEnd type="none" w="med" len="med"/>
-                    </a:lnR>
-                    <a:lnT w="9525" cap="flat" cmpd="sng" algn="ctr">
-                      <a:solidFill>
-                        <a:srgbClr val="D7E3E6"/>
-                      </a:solidFill>
-                      <a:prstDash val="solid"/>
-                      <a:round/>
-                      <a:headEnd type="none" w="med" len="med"/>
-                      <a:tailEnd type="none" w="med" len="med"/>
-                    </a:lnT>
-                    <a:lnB w="9525" cap="flat" cmpd="sng" algn="ctr">
-                      <a:solidFill>
-                        <a:srgbClr val="D7E3E6"/>
-                      </a:solidFill>
-                      <a:prstDash val="solid"/>
-                      <a:round/>
-                      <a:headEnd type="none" w="med" len="med"/>
-                      <a:tailEnd type="none" w="med" len="med"/>
-                    </a:lnB>
-                    <a:solidFill>
-                      <a:srgbClr val="FFFFFF"/>
-                    </a:solidFill>
-                  </a:tcPr>
-                </a:tc>
-                <a:tc>
-                  <a:txBody>
-                    <a:bodyPr/>
-                    <a:lstStyle/>
-                    <a:p>
-                      <a:pPr algn="ctr" indent="0" marL="0">
-                        <a:buNone/>
-                      </a:pPr>
-                      <a:r>
-                        <a:rPr lang="en-US" sz="1500" b="1" dirty="0">
-                          <a:solidFill>
-                            <a:srgbClr val="2E8B6E"/>
-                          </a:solidFill>
-                          <a:latin typeface="Calibri" pitchFamily="34" charset="0"/>
-                          <a:ea typeface="Calibri" pitchFamily="34" charset="-122"/>
-                          <a:cs typeface="Calibri" pitchFamily="34" charset="-120"/>
-                        </a:rPr>
-                        <a:t>-0.03</a:t>
-                      </a:r>
-                      <a:endParaRPr lang="en-US" sz="1500" dirty="0">
-                        <a:latin typeface="Calibri" charset="0"/>
-                        <a:ea typeface="Calibri" charset="0"/>
-                        <a:cs typeface="Calibri" charset="0"/>
-                      </a:endParaRPr>
-                    </a:p>
-                  </a:txBody>
-                  <a:tcPr marL="73152" marR="73152" marT="27432" marB="27432" anchor="ctr">
-                    <a:lnL w="9525" cap="flat" cmpd="sng" algn="ctr">
-                      <a:solidFill>
-                        <a:srgbClr val="D7E3E6"/>
-                      </a:solidFill>
-                      <a:prstDash val="solid"/>
-                      <a:round/>
-                      <a:headEnd type="none" w="med" len="med"/>
-                      <a:tailEnd type="none" w="med" len="med"/>
-                    </a:lnL>
-                    <a:lnR w="9525" cap="flat" cmpd="sng" algn="ctr">
-                      <a:solidFill>
-                        <a:srgbClr val="D7E3E6"/>
-                      </a:solidFill>
-                      <a:prstDash val="solid"/>
-                      <a:round/>
-                      <a:headEnd type="none" w="med" len="med"/>
-                      <a:tailEnd type="none" w="med" len="med"/>
-                    </a:lnR>
-                    <a:lnT w="9525" cap="flat" cmpd="sng" algn="ctr">
-                      <a:solidFill>
-                        <a:srgbClr val="D7E3E6"/>
-                      </a:solidFill>
-                      <a:prstDash val="solid"/>
-                      <a:round/>
-                      <a:headEnd type="none" w="med" len="med"/>
-                      <a:tailEnd type="none" w="med" len="med"/>
-                    </a:lnT>
-                    <a:lnB w="9525" cap="flat" cmpd="sng" algn="ctr">
-                      <a:solidFill>
-                        <a:srgbClr val="D7E3E6"/>
-                      </a:solidFill>
-                      <a:prstDash val="solid"/>
-                      <a:round/>
-                      <a:headEnd type="none" w="med" len="med"/>
-                      <a:tailEnd type="none" w="med" len="med"/>
-                    </a:lnB>
-                    <a:solidFill>
-                      <a:srgbClr val="FFFFFF"/>
-                    </a:solidFill>
-                  </a:tcPr>
-                </a:tc>
-              </a:tr>
-            </a:tbl>
-          </a:graphicData>
-        </a:graphic>
-      </p:graphicFrame>
-      <p:sp>
-        <p:nvSpPr>
-          <p:cNvPr id="5" name="Shape 2"/>
-          <p:cNvSpPr/>
-          <p:nvPr/>
-        </p:nvSpPr>
-        <p:spPr>
-          <a:xfrm>
-            <a:off x="548640" y="5074920"/>
-            <a:ext cx="11064240" cy="777240"/>
-          </a:xfrm>
-          <a:prstGeom prst="roundRect">
-            <a:avLst>
-              <a:gd name="adj" fmla="val 9412"/>
-            </a:avLst>
-          </a:prstGeom>
-          <a:solidFill>
-            <a:srgbClr val="E3F0F2"/>
-          </a:solidFill>
-          <a:ln w="9525">
-            <a:solidFill>
-              <a:srgbClr val="E3F0F2"/>
-            </a:solidFill>
-            <a:prstDash val="solid"/>
-          </a:ln>
-        </p:spPr>
-      </p:sp>
-      <p:sp>
-        <p:nvSpPr>
-          <p:cNvPr id="6" name="Shape 3"/>
-          <p:cNvSpPr/>
-          <p:nvPr/>
-        </p:nvSpPr>
-        <p:spPr>
-          <a:xfrm>
-            <a:off x="749808" y="5234940"/>
-            <a:ext cx="457200" cy="457200"/>
-          </a:xfrm>
-          <a:prstGeom prst="ellipse">
-            <a:avLst/>
-          </a:prstGeom>
-          <a:solidFill>
-            <a:schemeClr val="accent5"/>
-          </a:solidFill>
-          <a:ln w="6350">
-            <a:solidFill>
-              <a:schemeClr val="accent5"/>
-            </a:solidFill>
-            <a:prstDash val="solid"/>
-          </a:ln>
-        </p:spPr>
       </p:sp>
       <p:pic>
         <p:nvPicPr>
-          <p:cNvPr id="7" name="Image 0" descr="preencoded.png">    </p:cNvPr>
+          <p:cNvPr id="4" name="Image 0" descr="/Users/madhav/malaria-detection/slides/figures/metrics_confusion.png">    </p:cNvPr>
           <p:cNvPicPr>
             <a:picLocks noChangeAspect="1"/>
           </p:cNvPicPr>
@@ -16293,24 +14037,48 @@
         </p:blipFill>
         <p:spPr>
           <a:xfrm>
-            <a:off x="845820" y="5330952"/>
-            <a:ext cx="265176" cy="265176"/>
+            <a:off x="548640" y="1508760"/>
+            <a:ext cx="5394960" cy="3383280"/>
           </a:xfrm>
           <a:prstGeom prst="rect">
             <a:avLst/>
           </a:prstGeom>
         </p:spPr>
       </p:pic>
-      <p:sp>
-        <p:nvSpPr>
-          <p:cNvPr id="8" name="Text 4"/>
+      <p:pic>
+        <p:nvPicPr>
+          <p:cNvPr id="5" name="Image 1" descr="/Users/madhav/malaria-detection/slides/figures/metrics_threshold.png">    </p:cNvPr>
+          <p:cNvPicPr>
+            <a:picLocks noChangeAspect="1"/>
+          </p:cNvPicPr>
+          <p:nvPr/>
+        </p:nvPicPr>
+        <p:blipFill>
+          <a:blip r:embed="rId2"/>
+          <a:stretch>
+            <a:fillRect/>
+          </a:stretch>
+        </p:blipFill>
+        <p:spPr>
+          <a:xfrm>
+            <a:off x="5943600" y="1508760"/>
+            <a:ext cx="5669280" cy="3383280"/>
+          </a:xfrm>
+          <a:prstGeom prst="rect">
+            <a:avLst/>
+          </a:prstGeom>
+        </p:spPr>
+      </p:pic>
+      <p:sp>
+        <p:nvSpPr>
+          <p:cNvPr id="6" name="Text 2"/>
           <p:cNvSpPr txBox="1"/>
           <p:nvPr/>
         </p:nvSpPr>
         <p:spPr>
           <a:xfrm>
-            <a:off x="1389888" y="5148072"/>
-            <a:ext cx="10012680" cy="630936"/>
+            <a:off x="548640" y="5029200"/>
+            <a:ext cx="5486400" cy="1234440"/>
           </a:xfrm>
           <a:prstGeom prst="rect">
             <a:avLst/>
@@ -16319,21 +14087,184 @@
           <a:ln/>
         </p:spPr>
         <p:txBody>
-          <a:bodyPr wrap="square" lIns="0" tIns="0" rIns="0" bIns="0" rtlCol="0" anchor="ctr"/>
+          <a:bodyPr wrap="square" lIns="0" tIns="0" rIns="0" bIns="0" rtlCol="0" anchor="t"/>
           <a:lstStyle/>
           <a:p>
             <a:pPr indent="0" marL="0">
-              <a:buNone/>
-            </a:pPr>
-            <a:r>
-              <a:rPr lang="en-US" sz="1400" dirty="0">
+              <a:spcAft>
+                <a:spcPts val="400"/>
+              </a:spcAft>
+              <a:buNone/>
+            </a:pPr>
+            <a:r>
+              <a:rPr lang="en-US" sz="1300" b="1" dirty="0">
                 <a:solidFill>
                   <a:schemeClr val="tx1"/>
                 </a:solidFill>
               </a:rPr>
-              <a:t>All within our 1 pp success criterion. Mean fold accuracy matches to 0.01 pp; evaluation on clean images changes little.</a:t>
-            </a:r>
-            <a:endParaRPr lang="en-US" sz="1400" dirty="0"/>
+              <a:t>Recall (sensitivity)</a:t>
+            </a:r>
+            <a:pPr indent="0" marL="0">
+              <a:spcAft>
+                <a:spcPts val="400"/>
+              </a:spcAft>
+              <a:buNone/>
+            </a:pPr>
+            <a:r>
+              <a:rPr lang="en-US" sz="1300" dirty="0">
+                <a:solidFill>
+                  <a:schemeClr val="tx1"/>
+                </a:solidFill>
+              </a:rPr>
+              <a:t> = TP / (TP + FN): infected cells caught · 97.07 %</a:t>
+            </a:r>
+            <a:endParaRPr lang="en-US" sz="1300" dirty="0"/>
+          </a:p>
+          <a:p>
+            <a:pPr indent="0" marL="0">
+              <a:spcAft>
+                <a:spcPts val="400"/>
+              </a:spcAft>
+              <a:buNone/>
+            </a:pPr>
+            <a:r>
+              <a:rPr lang="en-US" sz="1300" b="1" dirty="0">
+                <a:solidFill>
+                  <a:schemeClr val="tx1"/>
+                </a:solidFill>
+              </a:rPr>
+              <a:t>Precision</a:t>
+            </a:r>
+            <a:pPr indent="0" marL="0">
+              <a:spcAft>
+                <a:spcPts val="400"/>
+              </a:spcAft>
+              <a:buNone/>
+            </a:pPr>
+            <a:r>
+              <a:rPr lang="en-US" sz="1300" dirty="0">
+                <a:solidFill>
+                  <a:schemeClr val="tx1"/>
+                </a:solidFill>
+              </a:rPr>
+              <a:t> = TP / (TP + FP): 'parasitized' calls that are right · 98.11 %</a:t>
+            </a:r>
+            <a:endParaRPr lang="en-US" sz="1300" dirty="0"/>
+          </a:p>
+          <a:p>
+            <a:pPr indent="0" marL="0">
+              <a:spcAft>
+                <a:spcPts val="400"/>
+              </a:spcAft>
+              <a:buNone/>
+            </a:pPr>
+            <a:r>
+              <a:rPr lang="en-US" sz="1300" b="1" dirty="0">
+                <a:solidFill>
+                  <a:schemeClr val="tx1"/>
+                </a:solidFill>
+              </a:rPr>
+              <a:t>F1</a:t>
+            </a:r>
+            <a:pPr indent="0" marL="0">
+              <a:spcAft>
+                <a:spcPts val="400"/>
+              </a:spcAft>
+              <a:buNone/>
+            </a:pPr>
+            <a:r>
+              <a:rPr lang="en-US" sz="1300" dirty="0">
+                <a:solidFill>
+                  <a:schemeClr val="tx1"/>
+                </a:solidFill>
+              </a:rPr>
+              <a:t> = harmonic mean of precision and recall · 97.59 %</a:t>
+            </a:r>
+            <a:endParaRPr lang="en-US" sz="1300" dirty="0"/>
+          </a:p>
+        </p:txBody>
+      </p:sp>
+      <p:sp>
+        <p:nvSpPr>
+          <p:cNvPr id="7" name="Text 3"/>
+          <p:cNvSpPr txBox="1"/>
+          <p:nvPr/>
+        </p:nvSpPr>
+        <p:spPr>
+          <a:xfrm>
+            <a:off x="6172200" y="5029200"/>
+            <a:ext cx="5440680" cy="1234440"/>
+          </a:xfrm>
+          <a:prstGeom prst="rect">
+            <a:avLst/>
+          </a:prstGeom>
+          <a:noFill/>
+          <a:ln/>
+        </p:spPr>
+        <p:txBody>
+          <a:bodyPr wrap="square" lIns="0" tIns="0" rIns="0" bIns="0" rtlCol="0" anchor="t"/>
+          <a:lstStyle/>
+          <a:p>
+            <a:pPr indent="0" marL="0">
+              <a:spcAft>
+                <a:spcPts val="400"/>
+              </a:spcAft>
+              <a:buNone/>
+            </a:pPr>
+            <a:r>
+              <a:rPr lang="en-US" sz="1300" b="1" dirty="0">
+                <a:solidFill>
+                  <a:schemeClr val="tx1"/>
+                </a:solidFill>
+              </a:rPr>
+              <a:t>ROC-AUC</a:t>
+            </a:r>
+            <a:pPr indent="0" marL="0">
+              <a:spcAft>
+                <a:spcPts val="400"/>
+              </a:spcAft>
+              <a:buNone/>
+            </a:pPr>
+            <a:r>
+              <a:rPr lang="en-US" sz="1300" dirty="0">
+                <a:solidFill>
+                  <a:schemeClr val="tx1"/>
+                </a:solidFill>
+              </a:rPr>
+              <a:t>: chance that an infected cell outscores a healthy one · 99.73 %</a:t>
+            </a:r>
+            <a:endParaRPr lang="en-US" sz="1300" dirty="0"/>
+          </a:p>
+          <a:p>
+            <a:pPr indent="0" marL="0">
+              <a:spcAft>
+                <a:spcPts val="400"/>
+              </a:spcAft>
+              <a:buNone/>
+            </a:pPr>
+            <a:r>
+              <a:rPr lang="en-US" sz="1300" b="1" dirty="0">
+                <a:solidFill>
+                  <a:schemeClr val="tx1"/>
+                </a:solidFill>
+              </a:rPr>
+              <a:t>pp (percentage point)</a:t>
+            </a:r>
+            <a:pPr indent="0" marL="0">
+              <a:spcAft>
+                <a:spcPts val="400"/>
+              </a:spcAft>
+              <a:buNone/>
+            </a:pPr>
+            <a:r>
+              <a:rPr lang="en-US" sz="1300" dirty="0">
+                <a:solidFill>
+                  <a:schemeClr val="tx1"/>
+                </a:solidFill>
+              </a:rPr>
+              <a:t> = plain difference of two percentages: 97.62 − 98.29 = −0.67 pp</a:t>
+            </a:r>
+            <a:endParaRPr lang="en-US" sz="1300" dirty="0"/>
           </a:p>
         </p:txBody>
       </p:sp>
@@ -16439,7 +14370,7 @@
                   <a:schemeClr val="accent1"/>
                 </a:solidFill>
               </a:rPr>
-              <a:t>RESULTS · TEN FOLDS</a:t>
+              <a:t>RESULTS</a:t>
             </a:r>
             <a:endParaRPr lang="en-US" sz="1200" dirty="0"/>
           </a:p>
@@ -16477,194 +14408,58 @@
                   <a:schemeClr val="tx1"/>
                 </a:solidFill>
               </a:rPr>
-              <a:t>Ten consistent folds, and where the ensemble errs</a:t>
+              <a:t>Paper vs. ours on the 5,512-image hold-out set</a:t>
             </a:r>
             <a:endParaRPr lang="en-US" sz="3200" dirty="0"/>
           </a:p>
         </p:txBody>
       </p:sp>
-      <p:graphicFrame>
-        <p:nvGraphicFramePr>
-          <p:cNvPr id="4" name="Chart 0" descr=""/>
-          <p:cNvGraphicFramePr/>
-          <p:nvPr/>
-        </p:nvGraphicFramePr>
-        <p:xfrm>
-          <a:off x="548640" y="1600200"/>
-          <a:ext cx="6675120" cy="4206240"/>
-        </p:xfrm>
-        <a:graphic xmlns:a="http://schemas.openxmlformats.org/drawingml/2006/main">
-          <a:graphicData uri="http://schemas.openxmlformats.org/drawingml/2006/chart">
-            <c:chart xmlns:c="http://schemas.openxmlformats.org/drawingml/2006/chart" r:id="rId1"/>
-          </a:graphicData>
-        </a:graphic>
-      </p:graphicFrame>
-      <p:sp>
-        <p:nvSpPr>
-          <p:cNvPr id="5" name="Text 2"/>
-          <p:cNvSpPr txBox="1"/>
-          <p:nvPr/>
-        </p:nvSpPr>
-        <p:spPr>
-          <a:xfrm>
-            <a:off x="7543800" y="1828800"/>
-            <a:ext cx="4069080" cy="320040"/>
-          </a:xfrm>
-          <a:prstGeom prst="rect">
-            <a:avLst/>
-          </a:prstGeom>
-          <a:noFill/>
-          <a:ln/>
-        </p:spPr>
-        <p:txBody>
-          <a:bodyPr wrap="square" lIns="0" tIns="0" rIns="0" bIns="0" rtlCol="0" anchor="t"/>
-          <a:lstStyle/>
-          <a:p>
-            <a:pPr indent="0" marL="0">
-              <a:buNone/>
-            </a:pPr>
-            <a:r>
-              <a:rPr lang="en-US" sz="1400" b="1" dirty="0">
-                <a:solidFill>
-                  <a:schemeClr val="tx1"/>
-                </a:solidFill>
-              </a:rPr>
-              <a:t>Ensemble on 5,512 hold-out cells</a:t>
-            </a:r>
-            <a:endParaRPr lang="en-US" sz="1400" dirty="0"/>
-          </a:p>
-        </p:txBody>
-      </p:sp>
-      <p:sp>
-        <p:nvSpPr>
-          <p:cNvPr id="6" name="Text 3"/>
-          <p:cNvSpPr txBox="1"/>
-          <p:nvPr/>
-        </p:nvSpPr>
-        <p:spPr>
-          <a:xfrm>
-            <a:off x="8732520" y="2212848"/>
-            <a:ext cx="1440180" cy="274320"/>
-          </a:xfrm>
-          <a:prstGeom prst="rect">
-            <a:avLst/>
-          </a:prstGeom>
-          <a:noFill/>
-          <a:ln/>
-        </p:spPr>
-        <p:txBody>
-          <a:bodyPr wrap="square" lIns="0" tIns="0" rIns="0" bIns="0" rtlCol="0" anchor="t"/>
-          <a:lstStyle/>
-          <a:p>
-            <a:pPr algn="ctr" indent="0" marL="0">
-              <a:buNone/>
-            </a:pPr>
-            <a:r>
-              <a:rPr lang="en-US" sz="1100" dirty="0">
-                <a:solidFill>
-                  <a:schemeClr val="accent6"/>
-                </a:solidFill>
-              </a:rPr>
-              <a:t>Pred. parasitized</a:t>
-            </a:r>
-            <a:endParaRPr lang="en-US" sz="1100" dirty="0"/>
-          </a:p>
-        </p:txBody>
-      </p:sp>
-      <p:sp>
-        <p:nvSpPr>
-          <p:cNvPr id="7" name="Text 4"/>
-          <p:cNvSpPr txBox="1"/>
-          <p:nvPr/>
-        </p:nvSpPr>
-        <p:spPr>
-          <a:xfrm>
-            <a:off x="10172700" y="2212848"/>
-            <a:ext cx="1440180" cy="274320"/>
-          </a:xfrm>
-          <a:prstGeom prst="rect">
-            <a:avLst/>
-          </a:prstGeom>
-          <a:noFill/>
-          <a:ln/>
-        </p:spPr>
-        <p:txBody>
-          <a:bodyPr wrap="square" lIns="0" tIns="0" rIns="0" bIns="0" rtlCol="0" anchor="t"/>
-          <a:lstStyle/>
-          <a:p>
-            <a:pPr algn="ctr" indent="0" marL="0">
-              <a:buNone/>
-            </a:pPr>
-            <a:r>
-              <a:rPr lang="en-US" sz="1100" dirty="0">
-                <a:solidFill>
-                  <a:schemeClr val="accent6"/>
-                </a:solidFill>
-              </a:rPr>
-              <a:t>Pred. uninfected</a:t>
-            </a:r>
-            <a:endParaRPr lang="en-US" sz="1100" dirty="0"/>
-          </a:p>
-        </p:txBody>
-      </p:sp>
-      <p:sp>
-        <p:nvSpPr>
-          <p:cNvPr id="8" name="Text 5"/>
-          <p:cNvSpPr txBox="1"/>
-          <p:nvPr/>
-        </p:nvSpPr>
-        <p:spPr>
-          <a:xfrm>
-            <a:off x="7543800" y="2514600"/>
-            <a:ext cx="1143000" cy="822960"/>
-          </a:xfrm>
-          <a:prstGeom prst="rect">
-            <a:avLst/>
-          </a:prstGeom>
-          <a:noFill/>
-          <a:ln/>
-        </p:spPr>
-        <p:txBody>
-          <a:bodyPr wrap="square" lIns="0" tIns="0" rIns="0" bIns="0" rtlCol="0" anchor="ctr"/>
-          <a:lstStyle/>
-          <a:p>
-            <a:pPr indent="0" marL="0">
-              <a:buNone/>
-            </a:pPr>
-            <a:r>
-              <a:rPr lang="en-US" sz="1200" b="1" dirty="0">
-                <a:solidFill>
-                  <a:schemeClr val="tx1"/>
-                </a:solidFill>
-              </a:rPr>
-              <a:t>Parasitized</a:t>
-            </a:r>
-            <a:endParaRPr lang="en-US" sz="1200" dirty="0"/>
-          </a:p>
-        </p:txBody>
-      </p:sp>
-      <p:sp>
-        <p:nvSpPr>
-          <p:cNvPr id="9" name="Shape 6"/>
+      <p:pic>
+        <p:nvPicPr>
+          <p:cNvPr id="4" name="Image 0" descr="/Users/madhav/malaria-detection/slides/figures/paper_vs_ours.png">    </p:cNvPr>
+          <p:cNvPicPr>
+            <a:picLocks noChangeAspect="1"/>
+          </p:cNvPicPr>
+          <p:nvPr/>
+        </p:nvPicPr>
+        <p:blipFill>
+          <a:blip r:embed="rId1"/>
+          <a:stretch>
+            <a:fillRect/>
+          </a:stretch>
+        </p:blipFill>
+        <p:spPr>
+          <a:xfrm>
+            <a:off x="548640" y="1508760"/>
+            <a:ext cx="11064240" cy="3611880"/>
+          </a:xfrm>
+          <a:prstGeom prst="rect">
+            <a:avLst/>
+          </a:prstGeom>
+        </p:spPr>
+      </p:pic>
+      <p:sp>
+        <p:nvSpPr>
+          <p:cNvPr id="5" name="Shape 2"/>
           <p:cNvSpPr/>
           <p:nvPr/>
         </p:nvSpPr>
         <p:spPr>
           <a:xfrm>
-            <a:off x="8769096" y="2514600"/>
-            <a:ext cx="1367028" cy="804672"/>
+            <a:off x="548640" y="5303520"/>
+            <a:ext cx="11064240" cy="914400"/>
           </a:xfrm>
           <a:prstGeom prst="roundRect">
             <a:avLst>
-              <a:gd name="adj" fmla="val 6818"/>
+              <a:gd name="adj" fmla="val 8000"/>
             </a:avLst>
           </a:prstGeom>
           <a:solidFill>
-            <a:srgbClr val="137C8E"/>
+            <a:srgbClr val="E3F0F2"/>
           </a:solidFill>
           <a:ln w="9525">
             <a:solidFill>
-              <a:srgbClr val="137C8E"/>
+              <a:srgbClr val="E3F0F2"/>
             </a:solidFill>
             <a:prstDash val="solid"/>
           </a:ln>
@@ -16672,77 +14467,63 @@
       </p:sp>
       <p:sp>
         <p:nvSpPr>
-          <p:cNvPr id="10" name="Text 7"/>
-          <p:cNvSpPr txBox="1"/>
-          <p:nvPr/>
-        </p:nvSpPr>
-        <p:spPr>
-          <a:xfrm>
-            <a:off x="8769096" y="2514600"/>
-            <a:ext cx="1367028" cy="804672"/>
-          </a:xfrm>
-          <a:prstGeom prst="rect">
-            <a:avLst/>
-          </a:prstGeom>
-          <a:noFill/>
-          <a:ln/>
-        </p:spPr>
-        <p:txBody>
-          <a:bodyPr wrap="square" lIns="0" tIns="0" rIns="0" bIns="0" rtlCol="0" anchor="ctr"/>
-          <a:lstStyle/>
-          <a:p>
-            <a:pPr algn="ctr" indent="0" marL="0">
-              <a:buNone/>
-            </a:pPr>
-            <a:r>
-              <a:rPr lang="en-US" sz="2200" b="1" dirty="0">
-                <a:solidFill>
-                  <a:schemeClr val="bg1"/>
-                </a:solidFill>
-              </a:rPr>
-              <a:t>2,650</a:t>
-            </a:r>
-            <a:endParaRPr lang="en-US" sz="2200" dirty="0"/>
-          </a:p>
-        </p:txBody>
-      </p:sp>
-      <p:sp>
-        <p:nvSpPr>
-          <p:cNvPr id="11" name="Shape 8"/>
+          <p:cNvPr id="6" name="Shape 3"/>
           <p:cNvSpPr/>
           <p:nvPr/>
         </p:nvSpPr>
         <p:spPr>
           <a:xfrm>
-            <a:off x="10209276" y="2514600"/>
-            <a:ext cx="1367028" cy="804672"/>
-          </a:xfrm>
-          <a:prstGeom prst="roundRect">
-            <a:avLst>
-              <a:gd name="adj" fmla="val 6818"/>
-            </a:avLst>
+            <a:off x="749808" y="5532120"/>
+            <a:ext cx="457200" cy="457200"/>
+          </a:xfrm>
+          <a:prstGeom prst="ellipse">
+            <a:avLst/>
           </a:prstGeom>
           <a:solidFill>
-            <a:srgbClr val="FBF1E4"/>
+            <a:schemeClr val="accent5"/>
           </a:solidFill>
-          <a:ln w="9525">
+          <a:ln w="6350">
             <a:solidFill>
-              <a:srgbClr val="F3D9B5"/>
+              <a:schemeClr val="accent5"/>
             </a:solidFill>
             <a:prstDash val="solid"/>
           </a:ln>
         </p:spPr>
       </p:sp>
-      <p:sp>
-        <p:nvSpPr>
-          <p:cNvPr id="12" name="Text 9"/>
+      <p:pic>
+        <p:nvPicPr>
+          <p:cNvPr id="7" name="Image 1" descr="preencoded.png">    </p:cNvPr>
+          <p:cNvPicPr>
+            <a:picLocks noChangeAspect="1"/>
+          </p:cNvPicPr>
+          <p:nvPr/>
+        </p:nvPicPr>
+        <p:blipFill>
+          <a:blip r:embed="rId2"/>
+          <a:stretch>
+            <a:fillRect/>
+          </a:stretch>
+        </p:blipFill>
+        <p:spPr>
+          <a:xfrm>
+            <a:off x="845820" y="5628132"/>
+            <a:ext cx="265176" cy="265176"/>
+          </a:xfrm>
+          <a:prstGeom prst="rect">
+            <a:avLst/>
+          </a:prstGeom>
+        </p:spPr>
+      </p:pic>
+      <p:sp>
+        <p:nvSpPr>
+          <p:cNvPr id="8" name="Text 4"/>
           <p:cNvSpPr txBox="1"/>
           <p:nvPr/>
         </p:nvSpPr>
         <p:spPr>
           <a:xfrm>
-            <a:off x="10209276" y="2514600"/>
-            <a:ext cx="1367028" cy="804672"/>
+            <a:off x="1389888" y="5376672"/>
+            <a:ext cx="10012680" cy="768096"/>
           </a:xfrm>
           <a:prstGeom prst="rect">
             <a:avLst/>
@@ -16754,216 +14535,18 @@
           <a:bodyPr wrap="square" lIns="0" tIns="0" rIns="0" bIns="0" rtlCol="0" anchor="ctr"/>
           <a:lstStyle/>
           <a:p>
-            <a:pPr algn="ctr" indent="0" marL="0">
-              <a:buNone/>
-            </a:pPr>
-            <a:r>
-              <a:rPr lang="en-US" sz="2200" b="1" dirty="0">
-                <a:solidFill>
-                  <a:schemeClr val="accent4"/>
-                </a:solidFill>
-              </a:rPr>
-              <a:t>80</a:t>
-            </a:r>
-            <a:endParaRPr lang="en-US" sz="2200" dirty="0"/>
-          </a:p>
-        </p:txBody>
-      </p:sp>
-      <p:sp>
-        <p:nvSpPr>
-          <p:cNvPr id="13" name="Text 10"/>
-          <p:cNvSpPr txBox="1"/>
-          <p:nvPr/>
-        </p:nvSpPr>
-        <p:spPr>
-          <a:xfrm>
-            <a:off x="7543800" y="3383280"/>
-            <a:ext cx="1143000" cy="822960"/>
-          </a:xfrm>
-          <a:prstGeom prst="rect">
-            <a:avLst/>
-          </a:prstGeom>
-          <a:noFill/>
-          <a:ln/>
-        </p:spPr>
-        <p:txBody>
-          <a:bodyPr wrap="square" lIns="0" tIns="0" rIns="0" bIns="0" rtlCol="0" anchor="ctr"/>
-          <a:lstStyle/>
-          <a:p>
             <a:pPr indent="0" marL="0">
               <a:buNone/>
             </a:pPr>
             <a:r>
-              <a:rPr lang="en-US" sz="1200" b="1" dirty="0">
+              <a:rPr lang="en-US" sz="1400" dirty="0">
                 <a:solidFill>
                   <a:schemeClr val="tx1"/>
                 </a:solidFill>
               </a:rPr>
-              <a:t>Uninfected</a:t>
-            </a:r>
-            <a:endParaRPr lang="en-US" sz="1200" dirty="0"/>
-          </a:p>
-        </p:txBody>
-      </p:sp>
-      <p:sp>
-        <p:nvSpPr>
-          <p:cNvPr id="14" name="Shape 11"/>
-          <p:cNvSpPr/>
-          <p:nvPr/>
-        </p:nvSpPr>
-        <p:spPr>
-          <a:xfrm>
-            <a:off x="8769096" y="3383280"/>
-            <a:ext cx="1367028" cy="804672"/>
-          </a:xfrm>
-          <a:prstGeom prst="roundRect">
-            <a:avLst>
-              <a:gd name="adj" fmla="val 6818"/>
-            </a:avLst>
-          </a:prstGeom>
-          <a:solidFill>
-            <a:srgbClr val="FBF1E4"/>
-          </a:solidFill>
-          <a:ln w="9525">
-            <a:solidFill>
-              <a:srgbClr val="F3D9B5"/>
-            </a:solidFill>
-            <a:prstDash val="solid"/>
-          </a:ln>
-        </p:spPr>
-      </p:sp>
-      <p:sp>
-        <p:nvSpPr>
-          <p:cNvPr id="15" name="Text 12"/>
-          <p:cNvSpPr txBox="1"/>
-          <p:nvPr/>
-        </p:nvSpPr>
-        <p:spPr>
-          <a:xfrm>
-            <a:off x="8769096" y="3383280"/>
-            <a:ext cx="1367028" cy="804672"/>
-          </a:xfrm>
-          <a:prstGeom prst="rect">
-            <a:avLst/>
-          </a:prstGeom>
-          <a:noFill/>
-          <a:ln/>
-        </p:spPr>
-        <p:txBody>
-          <a:bodyPr wrap="square" lIns="0" tIns="0" rIns="0" bIns="0" rtlCol="0" anchor="ctr"/>
-          <a:lstStyle/>
-          <a:p>
-            <a:pPr algn="ctr" indent="0" marL="0">
-              <a:buNone/>
-            </a:pPr>
-            <a:r>
-              <a:rPr lang="en-US" sz="2200" b="1" dirty="0">
-                <a:solidFill>
-                  <a:schemeClr val="accent4"/>
-                </a:solidFill>
-              </a:rPr>
-              <a:t>51</a:t>
-            </a:r>
-            <a:endParaRPr lang="en-US" sz="2200" dirty="0"/>
-          </a:p>
-        </p:txBody>
-      </p:sp>
-      <p:sp>
-        <p:nvSpPr>
-          <p:cNvPr id="16" name="Shape 13"/>
-          <p:cNvSpPr/>
-          <p:nvPr/>
-        </p:nvSpPr>
-        <p:spPr>
-          <a:xfrm>
-            <a:off x="10209276" y="3383280"/>
-            <a:ext cx="1367028" cy="804672"/>
-          </a:xfrm>
-          <a:prstGeom prst="roundRect">
-            <a:avLst>
-              <a:gd name="adj" fmla="val 6818"/>
-            </a:avLst>
-          </a:prstGeom>
-          <a:solidFill>
-            <a:srgbClr val="137C8E"/>
-          </a:solidFill>
-          <a:ln w="9525">
-            <a:solidFill>
-              <a:srgbClr val="137C8E"/>
-            </a:solidFill>
-            <a:prstDash val="solid"/>
-          </a:ln>
-        </p:spPr>
-      </p:sp>
-      <p:sp>
-        <p:nvSpPr>
-          <p:cNvPr id="17" name="Text 14"/>
-          <p:cNvSpPr txBox="1"/>
-          <p:nvPr/>
-        </p:nvSpPr>
-        <p:spPr>
-          <a:xfrm>
-            <a:off x="10209276" y="3383280"/>
-            <a:ext cx="1367028" cy="804672"/>
-          </a:xfrm>
-          <a:prstGeom prst="rect">
-            <a:avLst/>
-          </a:prstGeom>
-          <a:noFill/>
-          <a:ln/>
-        </p:spPr>
-        <p:txBody>
-          <a:bodyPr wrap="square" lIns="0" tIns="0" rIns="0" bIns="0" rtlCol="0" anchor="ctr"/>
-          <a:lstStyle/>
-          <a:p>
-            <a:pPr algn="ctr" indent="0" marL="0">
-              <a:buNone/>
-            </a:pPr>
-            <a:r>
-              <a:rPr lang="en-US" sz="2200" b="1" dirty="0">
-                <a:solidFill>
-                  <a:schemeClr val="bg1"/>
-                </a:solidFill>
-              </a:rPr>
-              <a:t>2,731</a:t>
-            </a:r>
-            <a:endParaRPr lang="en-US" sz="2200" dirty="0"/>
-          </a:p>
-        </p:txBody>
-      </p:sp>
-      <p:sp>
-        <p:nvSpPr>
-          <p:cNvPr id="18" name="Text 15"/>
-          <p:cNvSpPr txBox="1"/>
-          <p:nvPr/>
-        </p:nvSpPr>
-        <p:spPr>
-          <a:xfrm>
-            <a:off x="7543800" y="4754880"/>
-            <a:ext cx="4069080" cy="731520"/>
-          </a:xfrm>
-          <a:prstGeom prst="rect">
-            <a:avLst/>
-          </a:prstGeom>
-          <a:noFill/>
-          <a:ln/>
-        </p:spPr>
-        <p:txBody>
-          <a:bodyPr wrap="square" lIns="0" tIns="0" rIns="0" bIns="0" rtlCol="0" anchor="t"/>
-          <a:lstStyle/>
-          <a:p>
-            <a:pPr indent="0" marL="0">
-              <a:buNone/>
-            </a:pPr>
-            <a:r>
-              <a:rPr lang="en-US" sz="1300" dirty="0">
-                <a:solidFill>
-                  <a:schemeClr val="accent6"/>
-                </a:solidFill>
-              </a:rPr>
-              <a:t>Paper: 62 missed, 32 flagged. Recall (catching infected cells) is our priority metric.</a:t>
-            </a:r>
-            <a:endParaRPr lang="en-US" sz="1300" dirty="0"/>
+              <a:t>All within our 1 pp success criterion; mean fold accuracy matches to 0.01 pp. On clean (un-augmented) images the ensemble scores 97.64 %, so the paper's augmented evaluation changes little.</a:t>
+            </a:r>
+            <a:endParaRPr lang="en-US" sz="1400" dirty="0"/>
           </a:p>
         </p:txBody>
       </p:sp>
@@ -17069,7 +14652,7 @@
                   <a:schemeClr val="accent1"/>
                 </a:solidFill>
               </a:rPr>
-              <a:t>ENGINEERING</a:t>
+              <a:t>RESULTS · TEN FOLDS</a:t>
             </a:r>
             <a:endParaRPr lang="en-US" sz="1200" dirty="0"/>
           </a:p>
@@ -17107,1194 +14690,30 @@
                   <a:schemeClr val="tx1"/>
                 </a:solidFill>
               </a:rPr>
-              <a:t>Ten GPUs in parallel: about 11 minutes per fold</a:t>
+              <a:t>Ten consistent folds, and where the ensemble errs</a:t>
             </a:r>
             <a:endParaRPr lang="en-US" sz="3200" dirty="0"/>
           </a:p>
         </p:txBody>
-      </p:sp>
-      <p:sp>
-        <p:nvSpPr>
-          <p:cNvPr id="4" name="Shape 2"/>
-          <p:cNvSpPr/>
-          <p:nvPr/>
-        </p:nvSpPr>
-        <p:spPr>
-          <a:xfrm>
-            <a:off x="548640" y="1691640"/>
-            <a:ext cx="1133856" cy="1078992"/>
-          </a:xfrm>
-          <a:prstGeom prst="roundRect">
-            <a:avLst>
-              <a:gd name="adj" fmla="val 6780"/>
-            </a:avLst>
-          </a:prstGeom>
-          <a:solidFill>
-            <a:srgbClr val="E3F0F2"/>
-          </a:solidFill>
-          <a:ln w="9525">
-            <a:solidFill>
-              <a:srgbClr val="E3F0F2"/>
-            </a:solidFill>
-            <a:prstDash val="solid"/>
-          </a:ln>
-        </p:spPr>
-      </p:sp>
-      <p:sp>
-        <p:nvSpPr>
-          <p:cNvPr id="5" name="Text 3"/>
-          <p:cNvSpPr txBox="1"/>
-          <p:nvPr/>
-        </p:nvSpPr>
-        <p:spPr>
-          <a:xfrm>
-            <a:off x="548640" y="1764792"/>
-            <a:ext cx="1133856" cy="932688"/>
-          </a:xfrm>
-          <a:prstGeom prst="rect">
-            <a:avLst/>
-          </a:prstGeom>
-          <a:noFill/>
-          <a:ln/>
-        </p:spPr>
-        <p:txBody>
-          <a:bodyPr wrap="square" lIns="0" tIns="0" rIns="0" bIns="0" rtlCol="0" anchor="ctr"/>
-          <a:lstStyle/>
-          <a:p>
-            <a:pPr algn="ctr" indent="0" marL="0">
-              <a:buNone/>
-            </a:pPr>
-            <a:r>
-              <a:rPr lang="en-US" sz="1500" b="1" dirty="0">
-                <a:solidFill>
-                  <a:schemeClr val="tx1"/>
-                </a:solidFill>
-              </a:rPr>
-              <a:t>Fold 0</a:t>
-            </a:r>
-            <a:endParaRPr lang="en-US" sz="1400" dirty="0"/>
-          </a:p>
-          <a:p>
-            <a:pPr algn="ctr" indent="0" marL="0">
-              <a:buNone/>
-            </a:pPr>
-            <a:r>
-              <a:rPr lang="en-US" sz="1100" dirty="0">
-                <a:solidFill>
-                  <a:schemeClr val="accent6"/>
-                </a:solidFill>
-              </a:rPr>
-              <a:t>RTX 4090</a:t>
-            </a:r>
-            <a:endParaRPr lang="en-US" sz="1400" dirty="0"/>
-          </a:p>
-          <a:p>
-            <a:pPr algn="ctr" indent="0" marL="0">
-              <a:buNone/>
-            </a:pPr>
-            <a:r>
-              <a:rPr lang="en-US" sz="1400" b="1" dirty="0">
-                <a:solidFill>
-                  <a:schemeClr val="accent1"/>
-                </a:solidFill>
-              </a:rPr>
-              <a:t>10.9 min</a:t>
-            </a:r>
-            <a:endParaRPr lang="en-US" sz="1400" dirty="0"/>
-          </a:p>
-        </p:txBody>
-      </p:sp>
-      <p:sp>
-        <p:nvSpPr>
-          <p:cNvPr id="6" name="Shape 4"/>
-          <p:cNvSpPr/>
-          <p:nvPr/>
-        </p:nvSpPr>
-        <p:spPr>
-          <a:xfrm>
-            <a:off x="1792224" y="1691640"/>
-            <a:ext cx="1133856" cy="1078992"/>
-          </a:xfrm>
-          <a:prstGeom prst="roundRect">
-            <a:avLst>
-              <a:gd name="adj" fmla="val 6780"/>
-            </a:avLst>
-          </a:prstGeom>
-          <a:solidFill>
-            <a:srgbClr val="E3F0F2"/>
-          </a:solidFill>
-          <a:ln w="9525">
-            <a:solidFill>
-              <a:srgbClr val="E3F0F2"/>
-            </a:solidFill>
-            <a:prstDash val="solid"/>
-          </a:ln>
-        </p:spPr>
-      </p:sp>
-      <p:sp>
-        <p:nvSpPr>
-          <p:cNvPr id="7" name="Text 5"/>
-          <p:cNvSpPr txBox="1"/>
-          <p:nvPr/>
-        </p:nvSpPr>
-        <p:spPr>
-          <a:xfrm>
-            <a:off x="1792224" y="1764792"/>
-            <a:ext cx="1133856" cy="932688"/>
-          </a:xfrm>
-          <a:prstGeom prst="rect">
-            <a:avLst/>
-          </a:prstGeom>
-          <a:noFill/>
-          <a:ln/>
-        </p:spPr>
-        <p:txBody>
-          <a:bodyPr wrap="square" lIns="0" tIns="0" rIns="0" bIns="0" rtlCol="0" anchor="ctr"/>
-          <a:lstStyle/>
-          <a:p>
-            <a:pPr algn="ctr" indent="0" marL="0">
-              <a:buNone/>
-            </a:pPr>
-            <a:r>
-              <a:rPr lang="en-US" sz="1500" b="1" dirty="0">
-                <a:solidFill>
-                  <a:schemeClr val="tx1"/>
-                </a:solidFill>
-              </a:rPr>
-              <a:t>Fold 1</a:t>
-            </a:r>
-            <a:endParaRPr lang="en-US" sz="1400" dirty="0"/>
-          </a:p>
-          <a:p>
-            <a:pPr algn="ctr" indent="0" marL="0">
-              <a:buNone/>
-            </a:pPr>
-            <a:r>
-              <a:rPr lang="en-US" sz="1100" dirty="0">
-                <a:solidFill>
-                  <a:schemeClr val="accent6"/>
-                </a:solidFill>
-              </a:rPr>
-              <a:t>RTX 4090</a:t>
-            </a:r>
-            <a:endParaRPr lang="en-US" sz="1400" dirty="0"/>
-          </a:p>
-          <a:p>
-            <a:pPr algn="ctr" indent="0" marL="0">
-              <a:buNone/>
-            </a:pPr>
-            <a:r>
-              <a:rPr lang="en-US" sz="1400" b="1" dirty="0">
-                <a:solidFill>
-                  <a:schemeClr val="accent1"/>
-                </a:solidFill>
-              </a:rPr>
-              <a:t>10.5 min</a:t>
-            </a:r>
-            <a:endParaRPr lang="en-US" sz="1400" dirty="0"/>
-          </a:p>
-        </p:txBody>
-      </p:sp>
-      <p:sp>
-        <p:nvSpPr>
-          <p:cNvPr id="8" name="Shape 6"/>
-          <p:cNvSpPr/>
-          <p:nvPr/>
-        </p:nvSpPr>
-        <p:spPr>
-          <a:xfrm>
-            <a:off x="3035808" y="1691640"/>
-            <a:ext cx="1133856" cy="1078992"/>
-          </a:xfrm>
-          <a:prstGeom prst="roundRect">
-            <a:avLst>
-              <a:gd name="adj" fmla="val 6780"/>
-            </a:avLst>
-          </a:prstGeom>
-          <a:solidFill>
-            <a:srgbClr val="E3F0F2"/>
-          </a:solidFill>
-          <a:ln w="9525">
-            <a:solidFill>
-              <a:srgbClr val="E3F0F2"/>
-            </a:solidFill>
-            <a:prstDash val="solid"/>
-          </a:ln>
-        </p:spPr>
-      </p:sp>
-      <p:sp>
-        <p:nvSpPr>
-          <p:cNvPr id="9" name="Text 7"/>
-          <p:cNvSpPr txBox="1"/>
-          <p:nvPr/>
-        </p:nvSpPr>
-        <p:spPr>
-          <a:xfrm>
-            <a:off x="3035808" y="1764792"/>
-            <a:ext cx="1133856" cy="932688"/>
-          </a:xfrm>
-          <a:prstGeom prst="rect">
-            <a:avLst/>
-          </a:prstGeom>
-          <a:noFill/>
-          <a:ln/>
-        </p:spPr>
-        <p:txBody>
-          <a:bodyPr wrap="square" lIns="0" tIns="0" rIns="0" bIns="0" rtlCol="0" anchor="ctr"/>
-          <a:lstStyle/>
-          <a:p>
-            <a:pPr algn="ctr" indent="0" marL="0">
-              <a:buNone/>
-            </a:pPr>
-            <a:r>
-              <a:rPr lang="en-US" sz="1500" b="1" dirty="0">
-                <a:solidFill>
-                  <a:schemeClr val="tx1"/>
-                </a:solidFill>
-              </a:rPr>
-              <a:t>Fold 2</a:t>
-            </a:r>
-            <a:endParaRPr lang="en-US" sz="1400" dirty="0"/>
-          </a:p>
-          <a:p>
-            <a:pPr algn="ctr" indent="0" marL="0">
-              <a:buNone/>
-            </a:pPr>
-            <a:r>
-              <a:rPr lang="en-US" sz="1100" dirty="0">
-                <a:solidFill>
-                  <a:schemeClr val="accent6"/>
-                </a:solidFill>
-              </a:rPr>
-              <a:t>RTX 4090</a:t>
-            </a:r>
-            <a:endParaRPr lang="en-US" sz="1400" dirty="0"/>
-          </a:p>
-          <a:p>
-            <a:pPr algn="ctr" indent="0" marL="0">
-              <a:buNone/>
-            </a:pPr>
-            <a:r>
-              <a:rPr lang="en-US" sz="1400" b="1" dirty="0">
-                <a:solidFill>
-                  <a:schemeClr val="accent1"/>
-                </a:solidFill>
-              </a:rPr>
-              <a:t>11.1 min</a:t>
-            </a:r>
-            <a:endParaRPr lang="en-US" sz="1400" dirty="0"/>
-          </a:p>
-        </p:txBody>
-      </p:sp>
-      <p:sp>
-        <p:nvSpPr>
-          <p:cNvPr id="10" name="Shape 8"/>
-          <p:cNvSpPr/>
-          <p:nvPr/>
-        </p:nvSpPr>
-        <p:spPr>
-          <a:xfrm>
-            <a:off x="4279392" y="1691640"/>
-            <a:ext cx="1133856" cy="1078992"/>
-          </a:xfrm>
-          <a:prstGeom prst="roundRect">
-            <a:avLst>
-              <a:gd name="adj" fmla="val 6780"/>
-            </a:avLst>
-          </a:prstGeom>
-          <a:solidFill>
-            <a:srgbClr val="E3F0F2"/>
-          </a:solidFill>
-          <a:ln w="9525">
-            <a:solidFill>
-              <a:srgbClr val="E3F0F2"/>
-            </a:solidFill>
-            <a:prstDash val="solid"/>
-          </a:ln>
-        </p:spPr>
-      </p:sp>
-      <p:sp>
-        <p:nvSpPr>
-          <p:cNvPr id="11" name="Text 9"/>
-          <p:cNvSpPr txBox="1"/>
-          <p:nvPr/>
-        </p:nvSpPr>
-        <p:spPr>
-          <a:xfrm>
-            <a:off x="4279392" y="1764792"/>
-            <a:ext cx="1133856" cy="932688"/>
-          </a:xfrm>
-          <a:prstGeom prst="rect">
-            <a:avLst/>
-          </a:prstGeom>
-          <a:noFill/>
-          <a:ln/>
-        </p:spPr>
-        <p:txBody>
-          <a:bodyPr wrap="square" lIns="0" tIns="0" rIns="0" bIns="0" rtlCol="0" anchor="ctr"/>
-          <a:lstStyle/>
-          <a:p>
-            <a:pPr algn="ctr" indent="0" marL="0">
-              <a:buNone/>
-            </a:pPr>
-            <a:r>
-              <a:rPr lang="en-US" sz="1500" b="1" dirty="0">
-                <a:solidFill>
-                  <a:schemeClr val="tx1"/>
-                </a:solidFill>
-              </a:rPr>
-              <a:t>Fold 3</a:t>
-            </a:r>
-            <a:endParaRPr lang="en-US" sz="1400" dirty="0"/>
-          </a:p>
-          <a:p>
-            <a:pPr algn="ctr" indent="0" marL="0">
-              <a:buNone/>
-            </a:pPr>
-            <a:r>
-              <a:rPr lang="en-US" sz="1100" dirty="0">
-                <a:solidFill>
-                  <a:schemeClr val="accent6"/>
-                </a:solidFill>
-              </a:rPr>
-              <a:t>RTX 4090</a:t>
-            </a:r>
-            <a:endParaRPr lang="en-US" sz="1400" dirty="0"/>
-          </a:p>
-          <a:p>
-            <a:pPr algn="ctr" indent="0" marL="0">
-              <a:buNone/>
-            </a:pPr>
-            <a:r>
-              <a:rPr lang="en-US" sz="1400" b="1" dirty="0">
-                <a:solidFill>
-                  <a:schemeClr val="accent1"/>
-                </a:solidFill>
-              </a:rPr>
-              <a:t>16.6 min</a:t>
-            </a:r>
-            <a:endParaRPr lang="en-US" sz="1400" dirty="0"/>
-          </a:p>
-        </p:txBody>
-      </p:sp>
-      <p:sp>
-        <p:nvSpPr>
-          <p:cNvPr id="12" name="Shape 10"/>
-          <p:cNvSpPr/>
-          <p:nvPr/>
-        </p:nvSpPr>
-        <p:spPr>
-          <a:xfrm>
-            <a:off x="5522976" y="1691640"/>
-            <a:ext cx="1133856" cy="1078992"/>
-          </a:xfrm>
-          <a:prstGeom prst="roundRect">
-            <a:avLst>
-              <a:gd name="adj" fmla="val 6780"/>
-            </a:avLst>
-          </a:prstGeom>
-          <a:solidFill>
-            <a:srgbClr val="E3F0F2"/>
-          </a:solidFill>
-          <a:ln w="9525">
-            <a:solidFill>
-              <a:srgbClr val="E3F0F2"/>
-            </a:solidFill>
-            <a:prstDash val="solid"/>
-          </a:ln>
-        </p:spPr>
-      </p:sp>
-      <p:sp>
-        <p:nvSpPr>
-          <p:cNvPr id="13" name="Text 11"/>
-          <p:cNvSpPr txBox="1"/>
-          <p:nvPr/>
-        </p:nvSpPr>
-        <p:spPr>
-          <a:xfrm>
-            <a:off x="5522976" y="1764792"/>
-            <a:ext cx="1133856" cy="932688"/>
-          </a:xfrm>
-          <a:prstGeom prst="rect">
-            <a:avLst/>
-          </a:prstGeom>
-          <a:noFill/>
-          <a:ln/>
-        </p:spPr>
-        <p:txBody>
-          <a:bodyPr wrap="square" lIns="0" tIns="0" rIns="0" bIns="0" rtlCol="0" anchor="ctr"/>
-          <a:lstStyle/>
-          <a:p>
-            <a:pPr algn="ctr" indent="0" marL="0">
-              <a:buNone/>
-            </a:pPr>
-            <a:r>
-              <a:rPr lang="en-US" sz="1500" b="1" dirty="0">
-                <a:solidFill>
-                  <a:schemeClr val="tx1"/>
-                </a:solidFill>
-              </a:rPr>
-              <a:t>Fold 4</a:t>
-            </a:r>
-            <a:endParaRPr lang="en-US" sz="1400" dirty="0"/>
-          </a:p>
-          <a:p>
-            <a:pPr algn="ctr" indent="0" marL="0">
-              <a:buNone/>
-            </a:pPr>
-            <a:r>
-              <a:rPr lang="en-US" sz="1100" dirty="0">
-                <a:solidFill>
-                  <a:schemeClr val="accent6"/>
-                </a:solidFill>
-              </a:rPr>
-              <a:t>RTX 4090</a:t>
-            </a:r>
-            <a:endParaRPr lang="en-US" sz="1400" dirty="0"/>
-          </a:p>
-          <a:p>
-            <a:pPr algn="ctr" indent="0" marL="0">
-              <a:buNone/>
-            </a:pPr>
-            <a:r>
-              <a:rPr lang="en-US" sz="1400" b="1" dirty="0">
-                <a:solidFill>
-                  <a:schemeClr val="accent1"/>
-                </a:solidFill>
-              </a:rPr>
-              <a:t>10.6 min</a:t>
-            </a:r>
-            <a:endParaRPr lang="en-US" sz="1400" dirty="0"/>
-          </a:p>
-        </p:txBody>
-      </p:sp>
-      <p:sp>
-        <p:nvSpPr>
-          <p:cNvPr id="14" name="Shape 12"/>
-          <p:cNvSpPr/>
-          <p:nvPr/>
-        </p:nvSpPr>
-        <p:spPr>
-          <a:xfrm>
-            <a:off x="548640" y="2898648"/>
-            <a:ext cx="1133856" cy="1078992"/>
-          </a:xfrm>
-          <a:prstGeom prst="roundRect">
-            <a:avLst>
-              <a:gd name="adj" fmla="val 6780"/>
-            </a:avLst>
-          </a:prstGeom>
-          <a:solidFill>
-            <a:srgbClr val="E3F0F2"/>
-          </a:solidFill>
-          <a:ln w="9525">
-            <a:solidFill>
-              <a:srgbClr val="E3F0F2"/>
-            </a:solidFill>
-            <a:prstDash val="solid"/>
-          </a:ln>
-        </p:spPr>
-      </p:sp>
-      <p:sp>
-        <p:nvSpPr>
-          <p:cNvPr id="15" name="Text 13"/>
-          <p:cNvSpPr txBox="1"/>
-          <p:nvPr/>
-        </p:nvSpPr>
-        <p:spPr>
-          <a:xfrm>
-            <a:off x="548640" y="2971800"/>
-            <a:ext cx="1133856" cy="932688"/>
-          </a:xfrm>
-          <a:prstGeom prst="rect">
-            <a:avLst/>
-          </a:prstGeom>
-          <a:noFill/>
-          <a:ln/>
-        </p:spPr>
-        <p:txBody>
-          <a:bodyPr wrap="square" lIns="0" tIns="0" rIns="0" bIns="0" rtlCol="0" anchor="ctr"/>
-          <a:lstStyle/>
-          <a:p>
-            <a:pPr algn="ctr" indent="0" marL="0">
-              <a:buNone/>
-            </a:pPr>
-            <a:r>
-              <a:rPr lang="en-US" sz="1500" b="1" dirty="0">
-                <a:solidFill>
-                  <a:schemeClr val="tx1"/>
-                </a:solidFill>
-              </a:rPr>
-              <a:t>Fold 5</a:t>
-            </a:r>
-            <a:endParaRPr lang="en-US" sz="1400" dirty="0"/>
-          </a:p>
-          <a:p>
-            <a:pPr algn="ctr" indent="0" marL="0">
-              <a:buNone/>
-            </a:pPr>
-            <a:r>
-              <a:rPr lang="en-US" sz="1100" dirty="0">
-                <a:solidFill>
-                  <a:schemeClr val="accent6"/>
-                </a:solidFill>
-              </a:rPr>
-              <a:t>RTX 4090</a:t>
-            </a:r>
-            <a:endParaRPr lang="en-US" sz="1400" dirty="0"/>
-          </a:p>
-          <a:p>
-            <a:pPr algn="ctr" indent="0" marL="0">
-              <a:buNone/>
-            </a:pPr>
-            <a:r>
-              <a:rPr lang="en-US" sz="1400" b="1" dirty="0">
-                <a:solidFill>
-                  <a:schemeClr val="accent1"/>
-                </a:solidFill>
-              </a:rPr>
-              <a:t>10.8 min</a:t>
-            </a:r>
-            <a:endParaRPr lang="en-US" sz="1400" dirty="0"/>
-          </a:p>
-        </p:txBody>
-      </p:sp>
-      <p:sp>
-        <p:nvSpPr>
-          <p:cNvPr id="16" name="Shape 14"/>
-          <p:cNvSpPr/>
-          <p:nvPr/>
-        </p:nvSpPr>
-        <p:spPr>
-          <a:xfrm>
-            <a:off x="1792224" y="2898648"/>
-            <a:ext cx="1133856" cy="1078992"/>
-          </a:xfrm>
-          <a:prstGeom prst="roundRect">
-            <a:avLst>
-              <a:gd name="adj" fmla="val 6780"/>
-            </a:avLst>
-          </a:prstGeom>
-          <a:solidFill>
-            <a:srgbClr val="E3F0F2"/>
-          </a:solidFill>
-          <a:ln w="9525">
-            <a:solidFill>
-              <a:srgbClr val="E3F0F2"/>
-            </a:solidFill>
-            <a:prstDash val="solid"/>
-          </a:ln>
-        </p:spPr>
-      </p:sp>
-      <p:sp>
-        <p:nvSpPr>
-          <p:cNvPr id="17" name="Text 15"/>
-          <p:cNvSpPr txBox="1"/>
-          <p:nvPr/>
-        </p:nvSpPr>
-        <p:spPr>
-          <a:xfrm>
-            <a:off x="1792224" y="2971800"/>
-            <a:ext cx="1133856" cy="932688"/>
-          </a:xfrm>
-          <a:prstGeom prst="rect">
-            <a:avLst/>
-          </a:prstGeom>
-          <a:noFill/>
-          <a:ln/>
-        </p:spPr>
-        <p:txBody>
-          <a:bodyPr wrap="square" lIns="0" tIns="0" rIns="0" bIns="0" rtlCol="0" anchor="ctr"/>
-          <a:lstStyle/>
-          <a:p>
-            <a:pPr algn="ctr" indent="0" marL="0">
-              <a:buNone/>
-            </a:pPr>
-            <a:r>
-              <a:rPr lang="en-US" sz="1500" b="1" dirty="0">
-                <a:solidFill>
-                  <a:schemeClr val="tx1"/>
-                </a:solidFill>
-              </a:rPr>
-              <a:t>Fold 6</a:t>
-            </a:r>
-            <a:endParaRPr lang="en-US" sz="1400" dirty="0"/>
-          </a:p>
-          <a:p>
-            <a:pPr algn="ctr" indent="0" marL="0">
-              <a:buNone/>
-            </a:pPr>
-            <a:r>
-              <a:rPr lang="en-US" sz="1100" dirty="0">
-                <a:solidFill>
-                  <a:schemeClr val="accent6"/>
-                </a:solidFill>
-              </a:rPr>
-              <a:t>RTX 4090</a:t>
-            </a:r>
-            <a:endParaRPr lang="en-US" sz="1400" dirty="0"/>
-          </a:p>
-          <a:p>
-            <a:pPr algn="ctr" indent="0" marL="0">
-              <a:buNone/>
-            </a:pPr>
-            <a:r>
-              <a:rPr lang="en-US" sz="1400" b="1" dirty="0">
-                <a:solidFill>
-                  <a:schemeClr val="accent1"/>
-                </a:solidFill>
-              </a:rPr>
-              <a:t>10.7 min</a:t>
-            </a:r>
-            <a:endParaRPr lang="en-US" sz="1400" dirty="0"/>
-          </a:p>
-        </p:txBody>
-      </p:sp>
-      <p:sp>
-        <p:nvSpPr>
-          <p:cNvPr id="18" name="Shape 16"/>
-          <p:cNvSpPr/>
-          <p:nvPr/>
-        </p:nvSpPr>
-        <p:spPr>
-          <a:xfrm>
-            <a:off x="3035808" y="2898648"/>
-            <a:ext cx="1133856" cy="1078992"/>
-          </a:xfrm>
-          <a:prstGeom prst="roundRect">
-            <a:avLst>
-              <a:gd name="adj" fmla="val 6780"/>
-            </a:avLst>
-          </a:prstGeom>
-          <a:solidFill>
-            <a:srgbClr val="E3F0F2"/>
-          </a:solidFill>
-          <a:ln w="9525">
-            <a:solidFill>
-              <a:srgbClr val="E3F0F2"/>
-            </a:solidFill>
-            <a:prstDash val="solid"/>
-          </a:ln>
-        </p:spPr>
-      </p:sp>
-      <p:sp>
-        <p:nvSpPr>
-          <p:cNvPr id="19" name="Text 17"/>
-          <p:cNvSpPr txBox="1"/>
-          <p:nvPr/>
-        </p:nvSpPr>
-        <p:spPr>
-          <a:xfrm>
-            <a:off x="3035808" y="2971800"/>
-            <a:ext cx="1133856" cy="932688"/>
-          </a:xfrm>
-          <a:prstGeom prst="rect">
-            <a:avLst/>
-          </a:prstGeom>
-          <a:noFill/>
-          <a:ln/>
-        </p:spPr>
-        <p:txBody>
-          <a:bodyPr wrap="square" lIns="0" tIns="0" rIns="0" bIns="0" rtlCol="0" anchor="ctr"/>
-          <a:lstStyle/>
-          <a:p>
-            <a:pPr algn="ctr" indent="0" marL="0">
-              <a:buNone/>
-            </a:pPr>
-            <a:r>
-              <a:rPr lang="en-US" sz="1500" b="1" dirty="0">
-                <a:solidFill>
-                  <a:schemeClr val="tx1"/>
-                </a:solidFill>
-              </a:rPr>
-              <a:t>Fold 7</a:t>
-            </a:r>
-            <a:endParaRPr lang="en-US" sz="1400" dirty="0"/>
-          </a:p>
-          <a:p>
-            <a:pPr algn="ctr" indent="0" marL="0">
-              <a:buNone/>
-            </a:pPr>
-            <a:r>
-              <a:rPr lang="en-US" sz="1100" dirty="0">
-                <a:solidFill>
-                  <a:schemeClr val="accent6"/>
-                </a:solidFill>
-              </a:rPr>
-              <a:t>RTX 4090</a:t>
-            </a:r>
-            <a:endParaRPr lang="en-US" sz="1400" dirty="0"/>
-          </a:p>
-          <a:p>
-            <a:pPr algn="ctr" indent="0" marL="0">
-              <a:buNone/>
-            </a:pPr>
-            <a:r>
-              <a:rPr lang="en-US" sz="1400" b="1" dirty="0">
-                <a:solidFill>
-                  <a:schemeClr val="accent1"/>
-                </a:solidFill>
-              </a:rPr>
-              <a:t>10.9 min</a:t>
-            </a:r>
-            <a:endParaRPr lang="en-US" sz="1400" dirty="0"/>
-          </a:p>
-        </p:txBody>
-      </p:sp>
-      <p:sp>
-        <p:nvSpPr>
-          <p:cNvPr id="20" name="Shape 18"/>
-          <p:cNvSpPr/>
-          <p:nvPr/>
-        </p:nvSpPr>
-        <p:spPr>
-          <a:xfrm>
-            <a:off x="4279392" y="2898648"/>
-            <a:ext cx="1133856" cy="1078992"/>
-          </a:xfrm>
-          <a:prstGeom prst="roundRect">
-            <a:avLst>
-              <a:gd name="adj" fmla="val 6780"/>
-            </a:avLst>
-          </a:prstGeom>
-          <a:solidFill>
-            <a:srgbClr val="E3F0F2"/>
-          </a:solidFill>
-          <a:ln w="9525">
-            <a:solidFill>
-              <a:srgbClr val="E3F0F2"/>
-            </a:solidFill>
-            <a:prstDash val="solid"/>
-          </a:ln>
-        </p:spPr>
-      </p:sp>
-      <p:sp>
-        <p:nvSpPr>
-          <p:cNvPr id="21" name="Text 19"/>
-          <p:cNvSpPr txBox="1"/>
-          <p:nvPr/>
-        </p:nvSpPr>
-        <p:spPr>
-          <a:xfrm>
-            <a:off x="4279392" y="2971800"/>
-            <a:ext cx="1133856" cy="932688"/>
-          </a:xfrm>
-          <a:prstGeom prst="rect">
-            <a:avLst/>
-          </a:prstGeom>
-          <a:noFill/>
-          <a:ln/>
-        </p:spPr>
-        <p:txBody>
-          <a:bodyPr wrap="square" lIns="0" tIns="0" rIns="0" bIns="0" rtlCol="0" anchor="ctr"/>
-          <a:lstStyle/>
-          <a:p>
-            <a:pPr algn="ctr" indent="0" marL="0">
-              <a:buNone/>
-            </a:pPr>
-            <a:r>
-              <a:rPr lang="en-US" sz="1500" b="1" dirty="0">
-                <a:solidFill>
-                  <a:schemeClr val="tx1"/>
-                </a:solidFill>
-              </a:rPr>
-              <a:t>Fold 8</a:t>
-            </a:r>
-            <a:endParaRPr lang="en-US" sz="1400" dirty="0"/>
-          </a:p>
-          <a:p>
-            <a:pPr algn="ctr" indent="0" marL="0">
-              <a:buNone/>
-            </a:pPr>
-            <a:r>
-              <a:rPr lang="en-US" sz="1100" dirty="0">
-                <a:solidFill>
-                  <a:schemeClr val="accent6"/>
-                </a:solidFill>
-              </a:rPr>
-              <a:t>RTX 4090</a:t>
-            </a:r>
-            <a:endParaRPr lang="en-US" sz="1400" dirty="0"/>
-          </a:p>
-          <a:p>
-            <a:pPr algn="ctr" indent="0" marL="0">
-              <a:buNone/>
-            </a:pPr>
-            <a:r>
-              <a:rPr lang="en-US" sz="1400" b="1" dirty="0">
-                <a:solidFill>
-                  <a:schemeClr val="accent1"/>
-                </a:solidFill>
-              </a:rPr>
-              <a:t>10.6 min</a:t>
-            </a:r>
-            <a:endParaRPr lang="en-US" sz="1400" dirty="0"/>
-          </a:p>
-        </p:txBody>
-      </p:sp>
-      <p:sp>
-        <p:nvSpPr>
-          <p:cNvPr id="22" name="Shape 20"/>
-          <p:cNvSpPr/>
-          <p:nvPr/>
-        </p:nvSpPr>
-        <p:spPr>
-          <a:xfrm>
-            <a:off x="5522976" y="2898648"/>
-            <a:ext cx="1133856" cy="1078992"/>
-          </a:xfrm>
-          <a:prstGeom prst="roundRect">
-            <a:avLst>
-              <a:gd name="adj" fmla="val 6780"/>
-            </a:avLst>
-          </a:prstGeom>
-          <a:solidFill>
-            <a:srgbClr val="E3F0F2"/>
-          </a:solidFill>
-          <a:ln w="9525">
-            <a:solidFill>
-              <a:srgbClr val="E3F0F2"/>
-            </a:solidFill>
-            <a:prstDash val="solid"/>
-          </a:ln>
-        </p:spPr>
-      </p:sp>
-      <p:sp>
-        <p:nvSpPr>
-          <p:cNvPr id="23" name="Text 21"/>
-          <p:cNvSpPr txBox="1"/>
-          <p:nvPr/>
-        </p:nvSpPr>
-        <p:spPr>
-          <a:xfrm>
-            <a:off x="5522976" y="2971800"/>
-            <a:ext cx="1133856" cy="932688"/>
-          </a:xfrm>
-          <a:prstGeom prst="rect">
-            <a:avLst/>
-          </a:prstGeom>
-          <a:noFill/>
-          <a:ln/>
-        </p:spPr>
-        <p:txBody>
-          <a:bodyPr wrap="square" lIns="0" tIns="0" rIns="0" bIns="0" rtlCol="0" anchor="ctr"/>
-          <a:lstStyle/>
-          <a:p>
-            <a:pPr algn="ctr" indent="0" marL="0">
-              <a:buNone/>
-            </a:pPr>
-            <a:r>
-              <a:rPr lang="en-US" sz="1500" b="1" dirty="0">
-                <a:solidFill>
-                  <a:schemeClr val="tx1"/>
-                </a:solidFill>
-              </a:rPr>
-              <a:t>Fold 9</a:t>
-            </a:r>
-            <a:endParaRPr lang="en-US" sz="1400" dirty="0"/>
-          </a:p>
-          <a:p>
-            <a:pPr algn="ctr" indent="0" marL="0">
-              <a:buNone/>
-            </a:pPr>
-            <a:r>
-              <a:rPr lang="en-US" sz="1100" dirty="0">
-                <a:solidFill>
-                  <a:schemeClr val="accent6"/>
-                </a:solidFill>
-              </a:rPr>
-              <a:t>RTX 4090</a:t>
-            </a:r>
-            <a:endParaRPr lang="en-US" sz="1400" dirty="0"/>
-          </a:p>
-          <a:p>
-            <a:pPr algn="ctr" indent="0" marL="0">
-              <a:buNone/>
-            </a:pPr>
-            <a:r>
-              <a:rPr lang="en-US" sz="1400" b="1" dirty="0">
-                <a:solidFill>
-                  <a:schemeClr val="accent1"/>
-                </a:solidFill>
-              </a:rPr>
-              <a:t>10.5 min</a:t>
-            </a:r>
-            <a:endParaRPr lang="en-US" sz="1400" dirty="0"/>
-          </a:p>
-        </p:txBody>
-      </p:sp>
-      <p:graphicFrame>
-        <p:nvGraphicFramePr>
-          <p:cNvPr id="24" name="Chart 0" descr=""/>
-          <p:cNvGraphicFramePr/>
-          <p:nvPr/>
-        </p:nvGraphicFramePr>
-        <p:xfrm>
-          <a:off x="6949440" y="1600200"/>
-          <a:ext cx="4663440" cy="2651760"/>
-        </p:xfrm>
-        <a:graphic xmlns:a="http://schemas.openxmlformats.org/drawingml/2006/main">
-          <a:graphicData uri="http://schemas.openxmlformats.org/drawingml/2006/chart">
-            <c:chart xmlns:c="http://schemas.openxmlformats.org/drawingml/2006/chart" r:id="rId1"/>
-          </a:graphicData>
-        </a:graphic>
-      </p:graphicFrame>
-      <p:sp>
-        <p:nvSpPr>
-          <p:cNvPr id="25" name="Text 22"/>
-          <p:cNvSpPr txBox="1"/>
-          <p:nvPr/>
-        </p:nvSpPr>
-        <p:spPr>
-          <a:xfrm>
-            <a:off x="7086600" y="4343400"/>
-            <a:ext cx="1508760" cy="868680"/>
-          </a:xfrm>
-          <a:prstGeom prst="rect">
-            <a:avLst/>
-          </a:prstGeom>
-          <a:noFill/>
-          <a:ln/>
-        </p:spPr>
-        <p:txBody>
-          <a:bodyPr wrap="square" lIns="0" tIns="0" rIns="0" bIns="0" rtlCol="0" anchor="t"/>
-          <a:lstStyle/>
-          <a:p>
-            <a:pPr indent="0" marL="0">
-              <a:buNone/>
-            </a:pPr>
-            <a:r>
-              <a:rPr lang="en-US" sz="2400" b="1" dirty="0">
-                <a:solidFill>
-                  <a:schemeClr val="accent1"/>
-                </a:solidFill>
-              </a:rPr>
-              <a:t>≈ 25×</a:t>
-            </a:r>
-            <a:endParaRPr lang="en-US" sz="1400" dirty="0"/>
-          </a:p>
-          <a:p>
-            <a:pPr indent="0" marL="0">
-              <a:buNone/>
-            </a:pPr>
-            <a:r>
-              <a:rPr lang="en-US" sz="1200" dirty="0">
-                <a:solidFill>
-                  <a:schemeClr val="accent6"/>
-                </a:solidFill>
-              </a:rPr>
-              <a:t>faster per fold</a:t>
-            </a:r>
-            <a:endParaRPr lang="en-US" sz="1400" dirty="0"/>
-          </a:p>
-        </p:txBody>
-      </p:sp>
-      <p:sp>
-        <p:nvSpPr>
-          <p:cNvPr id="26" name="Text 23"/>
-          <p:cNvSpPr txBox="1"/>
-          <p:nvPr/>
-        </p:nvSpPr>
-        <p:spPr>
-          <a:xfrm>
-            <a:off x="8641080" y="4343400"/>
-            <a:ext cx="1508760" cy="868680"/>
-          </a:xfrm>
-          <a:prstGeom prst="rect">
-            <a:avLst/>
-          </a:prstGeom>
-          <a:noFill/>
-          <a:ln/>
-        </p:spPr>
-        <p:txBody>
-          <a:bodyPr wrap="square" lIns="0" tIns="0" rIns="0" bIns="0" rtlCol="0" anchor="t"/>
-          <a:lstStyle/>
-          <a:p>
-            <a:pPr indent="0" marL="0">
-              <a:buNone/>
-            </a:pPr>
-            <a:r>
-              <a:rPr lang="en-US" sz="2400" b="1" dirty="0">
-                <a:solidFill>
-                  <a:schemeClr val="accent1"/>
-                </a:solidFill>
-              </a:rPr>
-              <a:t>≈ $4.8</a:t>
-            </a:r>
-            <a:endParaRPr lang="en-US" sz="1400" dirty="0"/>
-          </a:p>
-          <a:p>
-            <a:pPr indent="0" marL="0">
-              <a:buNone/>
-            </a:pPr>
-            <a:r>
-              <a:rPr lang="en-US" sz="1200" dirty="0">
-                <a:solidFill>
-                  <a:schemeClr val="accent6"/>
-                </a:solidFill>
-              </a:rPr>
-              <a:t>total cloud cost</a:t>
-            </a:r>
-            <a:endParaRPr lang="en-US" sz="1400" dirty="0"/>
-          </a:p>
-        </p:txBody>
-      </p:sp>
-      <p:sp>
-        <p:nvSpPr>
-          <p:cNvPr id="27" name="Text 24"/>
-          <p:cNvSpPr txBox="1"/>
-          <p:nvPr/>
-        </p:nvSpPr>
-        <p:spPr>
-          <a:xfrm>
-            <a:off x="10195560" y="4343400"/>
-            <a:ext cx="1508760" cy="868680"/>
-          </a:xfrm>
-          <a:prstGeom prst="rect">
-            <a:avLst/>
-          </a:prstGeom>
-          <a:noFill/>
-          <a:ln/>
-        </p:spPr>
-        <p:txBody>
-          <a:bodyPr wrap="square" lIns="0" tIns="0" rIns="0" bIns="0" rtlCol="0" anchor="t"/>
-          <a:lstStyle/>
-          <a:p>
-            <a:pPr indent="0" marL="0">
-              <a:buNone/>
-            </a:pPr>
-            <a:r>
-              <a:rPr lang="en-US" sz="2400" b="1" dirty="0">
-                <a:solidFill>
-                  <a:schemeClr val="accent1"/>
-                </a:solidFill>
-              </a:rPr>
-              <a:t>1 d 23 h</a:t>
-            </a:r>
-            <a:endParaRPr lang="en-US" sz="1400" dirty="0"/>
-          </a:p>
-          <a:p>
-            <a:pPr indent="0" marL="0">
-              <a:buNone/>
-            </a:pPr>
-            <a:r>
-              <a:rPr lang="en-US" sz="1200" dirty="0">
-                <a:solidFill>
-                  <a:schemeClr val="accent6"/>
-                </a:solidFill>
-              </a:rPr>
-              <a:t>the paper's full run</a:t>
-            </a:r>
-            <a:endParaRPr lang="en-US" sz="1400" dirty="0"/>
-          </a:p>
-        </p:txBody>
-      </p:sp>
-      <p:sp>
-        <p:nvSpPr>
-          <p:cNvPr id="28" name="Text 25"/>
-          <p:cNvSpPr txBox="1"/>
-          <p:nvPr/>
-        </p:nvSpPr>
-        <p:spPr>
-          <a:xfrm>
-            <a:off x="548640" y="4206240"/>
-            <a:ext cx="6126480" cy="822960"/>
-          </a:xfrm>
-          <a:prstGeom prst="rect">
-            <a:avLst/>
-          </a:prstGeom>
-          <a:noFill/>
-          <a:ln/>
-        </p:spPr>
-        <p:txBody>
-          <a:bodyPr wrap="square" lIns="0" tIns="0" rIns="0" bIns="0" rtlCol="0" anchor="t"/>
-          <a:lstStyle/>
-          <a:p>
-            <a:pPr indent="0" marL="0">
-              <a:buNone/>
-            </a:pPr>
-            <a:r>
-              <a:rPr lang="en-US" sz="1300" dirty="0">
-                <a:solidFill>
-                  <a:schemeClr val="accent6"/>
-                </a:solidFill>
-              </a:rPr>
-              <a:t>10 RunPod pods (Secure Cloud, RTX 4090, 16 vCPU each), one fold per pod, all training at the same time. Fold 3 landed on a slower host (16.6 min).</a:t>
-            </a:r>
-            <a:endParaRPr lang="en-US" sz="1300" dirty="0"/>
-          </a:p>
-        </p:txBody>
-      </p:sp>
-      <p:sp>
-        <p:nvSpPr>
-          <p:cNvPr id="29" name="Shape 26"/>
-          <p:cNvSpPr/>
-          <p:nvPr/>
-        </p:nvSpPr>
-        <p:spPr>
-          <a:xfrm>
-            <a:off x="548640" y="5257800"/>
-            <a:ext cx="11064240" cy="731520"/>
-          </a:xfrm>
-          <a:prstGeom prst="roundRect">
-            <a:avLst>
-              <a:gd name="adj" fmla="val 10000"/>
-            </a:avLst>
-          </a:prstGeom>
-          <a:solidFill>
-            <a:srgbClr val="E3F0F2"/>
-          </a:solidFill>
-          <a:ln w="9525">
-            <a:solidFill>
-              <a:srgbClr val="E3F0F2"/>
-            </a:solidFill>
-            <a:prstDash val="solid"/>
-          </a:ln>
-        </p:spPr>
-      </p:sp>
-      <p:sp>
-        <p:nvSpPr>
-          <p:cNvPr id="30" name="Shape 27"/>
-          <p:cNvSpPr/>
-          <p:nvPr/>
-        </p:nvSpPr>
-        <p:spPr>
-          <a:xfrm>
-            <a:off x="749808" y="5394960"/>
-            <a:ext cx="457200" cy="457200"/>
-          </a:xfrm>
-          <a:prstGeom prst="ellipse">
-            <a:avLst/>
-          </a:prstGeom>
-          <a:solidFill>
-            <a:schemeClr val="accent1"/>
-          </a:solidFill>
-          <a:ln w="6350">
-            <a:solidFill>
-              <a:schemeClr val="accent1"/>
-            </a:solidFill>
-            <a:prstDash val="solid"/>
-          </a:ln>
-        </p:spPr>
       </p:sp>
       <p:pic>
         <p:nvPicPr>
-          <p:cNvPr id="31" name="Image 0" descr="preencoded.png">    </p:cNvPr>
+          <p:cNvPr id="4" name="Image 0" descr="/Users/madhav/malaria-detection/slides/figures/per_fold_accuracy_compact.png">    </p:cNvPr>
           <p:cNvPicPr>
             <a:picLocks noChangeAspect="1"/>
           </p:cNvPicPr>
           <p:nvPr/>
         </p:nvPicPr>
         <p:blipFill>
-          <a:blip r:embed="rId2"/>
+          <a:blip r:embed="rId1"/>
           <a:stretch>
             <a:fillRect/>
           </a:stretch>
         </p:blipFill>
         <p:spPr>
           <a:xfrm>
-            <a:off x="845820" y="5490972"/>
-            <a:ext cx="265176" cy="265176"/>
+            <a:off x="548640" y="1600200"/>
+            <a:ext cx="6675120" cy="4206240"/>
           </a:xfrm>
           <a:prstGeom prst="rect">
             <a:avLst/>
@@ -18303,14 +14722,14 @@
       </p:pic>
       <p:sp>
         <p:nvSpPr>
-          <p:cNvPr id="32" name="Text 28"/>
+          <p:cNvPr id="5" name="Text 2"/>
           <p:cNvSpPr txBox="1"/>
           <p:nvPr/>
         </p:nvSpPr>
         <p:spPr>
           <a:xfrm>
-            <a:off x="1389888" y="5330952"/>
-            <a:ext cx="10012680" cy="585216"/>
+            <a:off x="7543800" y="1828800"/>
+            <a:ext cx="4069080" cy="320040"/>
           </a:xfrm>
           <a:prstGeom prst="rect">
             <a:avLst/>
@@ -18319,6 +14738,114 @@
           <a:ln/>
         </p:spPr>
         <p:txBody>
+          <a:bodyPr wrap="square" lIns="0" tIns="0" rIns="0" bIns="0" rtlCol="0" anchor="t"/>
+          <a:lstStyle/>
+          <a:p>
+            <a:pPr indent="0" marL="0">
+              <a:buNone/>
+            </a:pPr>
+            <a:r>
+              <a:rPr lang="en-US" sz="1400" b="1" dirty="0">
+                <a:solidFill>
+                  <a:schemeClr val="tx1"/>
+                </a:solidFill>
+              </a:rPr>
+              <a:t>Ensemble on 5,512 hold-out cells</a:t>
+            </a:r>
+            <a:endParaRPr lang="en-US" sz="1400" dirty="0"/>
+          </a:p>
+        </p:txBody>
+      </p:sp>
+      <p:sp>
+        <p:nvSpPr>
+          <p:cNvPr id="6" name="Text 3"/>
+          <p:cNvSpPr txBox="1"/>
+          <p:nvPr/>
+        </p:nvSpPr>
+        <p:spPr>
+          <a:xfrm>
+            <a:off x="8732520" y="2212848"/>
+            <a:ext cx="1440180" cy="274320"/>
+          </a:xfrm>
+          <a:prstGeom prst="rect">
+            <a:avLst/>
+          </a:prstGeom>
+          <a:noFill/>
+          <a:ln/>
+        </p:spPr>
+        <p:txBody>
+          <a:bodyPr wrap="square" lIns="0" tIns="0" rIns="0" bIns="0" rtlCol="0" anchor="t"/>
+          <a:lstStyle/>
+          <a:p>
+            <a:pPr algn="ctr" indent="0" marL="0">
+              <a:buNone/>
+            </a:pPr>
+            <a:r>
+              <a:rPr lang="en-US" sz="1100" dirty="0">
+                <a:solidFill>
+                  <a:schemeClr val="accent6"/>
+                </a:solidFill>
+              </a:rPr>
+              <a:t>Pred. parasitized</a:t>
+            </a:r>
+            <a:endParaRPr lang="en-US" sz="1100" dirty="0"/>
+          </a:p>
+        </p:txBody>
+      </p:sp>
+      <p:sp>
+        <p:nvSpPr>
+          <p:cNvPr id="7" name="Text 4"/>
+          <p:cNvSpPr txBox="1"/>
+          <p:nvPr/>
+        </p:nvSpPr>
+        <p:spPr>
+          <a:xfrm>
+            <a:off x="10172700" y="2212848"/>
+            <a:ext cx="1440180" cy="274320"/>
+          </a:xfrm>
+          <a:prstGeom prst="rect">
+            <a:avLst/>
+          </a:prstGeom>
+          <a:noFill/>
+          <a:ln/>
+        </p:spPr>
+        <p:txBody>
+          <a:bodyPr wrap="square" lIns="0" tIns="0" rIns="0" bIns="0" rtlCol="0" anchor="t"/>
+          <a:lstStyle/>
+          <a:p>
+            <a:pPr algn="ctr" indent="0" marL="0">
+              <a:buNone/>
+            </a:pPr>
+            <a:r>
+              <a:rPr lang="en-US" sz="1100" dirty="0">
+                <a:solidFill>
+                  <a:schemeClr val="accent6"/>
+                </a:solidFill>
+              </a:rPr>
+              <a:t>Pred. uninfected</a:t>
+            </a:r>
+            <a:endParaRPr lang="en-US" sz="1100" dirty="0"/>
+          </a:p>
+        </p:txBody>
+      </p:sp>
+      <p:sp>
+        <p:nvSpPr>
+          <p:cNvPr id="8" name="Text 5"/>
+          <p:cNvSpPr txBox="1"/>
+          <p:nvPr/>
+        </p:nvSpPr>
+        <p:spPr>
+          <a:xfrm>
+            <a:off x="7543800" y="2514600"/>
+            <a:ext cx="1143000" cy="822960"/>
+          </a:xfrm>
+          <a:prstGeom prst="rect">
+            <a:avLst/>
+          </a:prstGeom>
+          <a:noFill/>
+          <a:ln/>
+        </p:spPr>
+        <p:txBody>
           <a:bodyPr wrap="square" lIns="0" tIns="0" rIns="0" bIns="0" rtlCol="0" anchor="ctr"/>
           <a:lstStyle/>
           <a:p>
@@ -18326,14 +14853,338 @@
               <a:buNone/>
             </a:pPr>
             <a:r>
-              <a:rPr lang="en-US" sz="1400" dirty="0">
+              <a:rPr lang="en-US" sz="1200" b="1" dirty="0">
                 <a:solidFill>
                   <a:schemeClr val="tx1"/>
                 </a:solidFill>
               </a:rPr>
-              <a:t>The 10 trained models are published as a GitHub release, so nobody has to retrain to use or evaluate them.</a:t>
-            </a:r>
-            <a:endParaRPr lang="en-US" sz="1400" dirty="0"/>
+              <a:t>Parasitized</a:t>
+            </a:r>
+            <a:endParaRPr lang="en-US" sz="1200" dirty="0"/>
+          </a:p>
+        </p:txBody>
+      </p:sp>
+      <p:sp>
+        <p:nvSpPr>
+          <p:cNvPr id="9" name="Shape 6"/>
+          <p:cNvSpPr/>
+          <p:nvPr/>
+        </p:nvSpPr>
+        <p:spPr>
+          <a:xfrm>
+            <a:off x="8769096" y="2514600"/>
+            <a:ext cx="1367028" cy="804672"/>
+          </a:xfrm>
+          <a:prstGeom prst="roundRect">
+            <a:avLst>
+              <a:gd name="adj" fmla="val 6818"/>
+            </a:avLst>
+          </a:prstGeom>
+          <a:solidFill>
+            <a:srgbClr val="137C8E"/>
+          </a:solidFill>
+          <a:ln w="9525">
+            <a:solidFill>
+              <a:srgbClr val="137C8E"/>
+            </a:solidFill>
+            <a:prstDash val="solid"/>
+          </a:ln>
+        </p:spPr>
+      </p:sp>
+      <p:sp>
+        <p:nvSpPr>
+          <p:cNvPr id="10" name="Text 7"/>
+          <p:cNvSpPr txBox="1"/>
+          <p:nvPr/>
+        </p:nvSpPr>
+        <p:spPr>
+          <a:xfrm>
+            <a:off x="8769096" y="2514600"/>
+            <a:ext cx="1367028" cy="804672"/>
+          </a:xfrm>
+          <a:prstGeom prst="rect">
+            <a:avLst/>
+          </a:prstGeom>
+          <a:noFill/>
+          <a:ln/>
+        </p:spPr>
+        <p:txBody>
+          <a:bodyPr wrap="square" lIns="0" tIns="0" rIns="0" bIns="0" rtlCol="0" anchor="ctr"/>
+          <a:lstStyle/>
+          <a:p>
+            <a:pPr algn="ctr" indent="0" marL="0">
+              <a:buNone/>
+            </a:pPr>
+            <a:r>
+              <a:rPr lang="en-US" sz="2200" b="1" dirty="0">
+                <a:solidFill>
+                  <a:schemeClr val="bg1"/>
+                </a:solidFill>
+              </a:rPr>
+              <a:t>2,650</a:t>
+            </a:r>
+            <a:endParaRPr lang="en-US" sz="2200" dirty="0"/>
+          </a:p>
+        </p:txBody>
+      </p:sp>
+      <p:sp>
+        <p:nvSpPr>
+          <p:cNvPr id="11" name="Shape 8"/>
+          <p:cNvSpPr/>
+          <p:nvPr/>
+        </p:nvSpPr>
+        <p:spPr>
+          <a:xfrm>
+            <a:off x="10209276" y="2514600"/>
+            <a:ext cx="1367028" cy="804672"/>
+          </a:xfrm>
+          <a:prstGeom prst="roundRect">
+            <a:avLst>
+              <a:gd name="adj" fmla="val 6818"/>
+            </a:avLst>
+          </a:prstGeom>
+          <a:solidFill>
+            <a:srgbClr val="FBF1E4"/>
+          </a:solidFill>
+          <a:ln w="9525">
+            <a:solidFill>
+              <a:srgbClr val="F3D9B5"/>
+            </a:solidFill>
+            <a:prstDash val="solid"/>
+          </a:ln>
+        </p:spPr>
+      </p:sp>
+      <p:sp>
+        <p:nvSpPr>
+          <p:cNvPr id="12" name="Text 9"/>
+          <p:cNvSpPr txBox="1"/>
+          <p:nvPr/>
+        </p:nvSpPr>
+        <p:spPr>
+          <a:xfrm>
+            <a:off x="10209276" y="2514600"/>
+            <a:ext cx="1367028" cy="804672"/>
+          </a:xfrm>
+          <a:prstGeom prst="rect">
+            <a:avLst/>
+          </a:prstGeom>
+          <a:noFill/>
+          <a:ln/>
+        </p:spPr>
+        <p:txBody>
+          <a:bodyPr wrap="square" lIns="0" tIns="0" rIns="0" bIns="0" rtlCol="0" anchor="ctr"/>
+          <a:lstStyle/>
+          <a:p>
+            <a:pPr algn="ctr" indent="0" marL="0">
+              <a:buNone/>
+            </a:pPr>
+            <a:r>
+              <a:rPr lang="en-US" sz="2200" b="1" dirty="0">
+                <a:solidFill>
+                  <a:schemeClr val="accent4"/>
+                </a:solidFill>
+              </a:rPr>
+              <a:t>80</a:t>
+            </a:r>
+            <a:endParaRPr lang="en-US" sz="2200" dirty="0"/>
+          </a:p>
+        </p:txBody>
+      </p:sp>
+      <p:sp>
+        <p:nvSpPr>
+          <p:cNvPr id="13" name="Text 10"/>
+          <p:cNvSpPr txBox="1"/>
+          <p:nvPr/>
+        </p:nvSpPr>
+        <p:spPr>
+          <a:xfrm>
+            <a:off x="7543800" y="3383280"/>
+            <a:ext cx="1143000" cy="822960"/>
+          </a:xfrm>
+          <a:prstGeom prst="rect">
+            <a:avLst/>
+          </a:prstGeom>
+          <a:noFill/>
+          <a:ln/>
+        </p:spPr>
+        <p:txBody>
+          <a:bodyPr wrap="square" lIns="0" tIns="0" rIns="0" bIns="0" rtlCol="0" anchor="ctr"/>
+          <a:lstStyle/>
+          <a:p>
+            <a:pPr indent="0" marL="0">
+              <a:buNone/>
+            </a:pPr>
+            <a:r>
+              <a:rPr lang="en-US" sz="1200" b="1" dirty="0">
+                <a:solidFill>
+                  <a:schemeClr val="tx1"/>
+                </a:solidFill>
+              </a:rPr>
+              <a:t>Uninfected</a:t>
+            </a:r>
+            <a:endParaRPr lang="en-US" sz="1200" dirty="0"/>
+          </a:p>
+        </p:txBody>
+      </p:sp>
+      <p:sp>
+        <p:nvSpPr>
+          <p:cNvPr id="14" name="Shape 11"/>
+          <p:cNvSpPr/>
+          <p:nvPr/>
+        </p:nvSpPr>
+        <p:spPr>
+          <a:xfrm>
+            <a:off x="8769096" y="3383280"/>
+            <a:ext cx="1367028" cy="804672"/>
+          </a:xfrm>
+          <a:prstGeom prst="roundRect">
+            <a:avLst>
+              <a:gd name="adj" fmla="val 6818"/>
+            </a:avLst>
+          </a:prstGeom>
+          <a:solidFill>
+            <a:srgbClr val="FBF1E4"/>
+          </a:solidFill>
+          <a:ln w="9525">
+            <a:solidFill>
+              <a:srgbClr val="F3D9B5"/>
+            </a:solidFill>
+            <a:prstDash val="solid"/>
+          </a:ln>
+        </p:spPr>
+      </p:sp>
+      <p:sp>
+        <p:nvSpPr>
+          <p:cNvPr id="15" name="Text 12"/>
+          <p:cNvSpPr txBox="1"/>
+          <p:nvPr/>
+        </p:nvSpPr>
+        <p:spPr>
+          <a:xfrm>
+            <a:off x="8769096" y="3383280"/>
+            <a:ext cx="1367028" cy="804672"/>
+          </a:xfrm>
+          <a:prstGeom prst="rect">
+            <a:avLst/>
+          </a:prstGeom>
+          <a:noFill/>
+          <a:ln/>
+        </p:spPr>
+        <p:txBody>
+          <a:bodyPr wrap="square" lIns="0" tIns="0" rIns="0" bIns="0" rtlCol="0" anchor="ctr"/>
+          <a:lstStyle/>
+          <a:p>
+            <a:pPr algn="ctr" indent="0" marL="0">
+              <a:buNone/>
+            </a:pPr>
+            <a:r>
+              <a:rPr lang="en-US" sz="2200" b="1" dirty="0">
+                <a:solidFill>
+                  <a:schemeClr val="accent4"/>
+                </a:solidFill>
+              </a:rPr>
+              <a:t>51</a:t>
+            </a:r>
+            <a:endParaRPr lang="en-US" sz="2200" dirty="0"/>
+          </a:p>
+        </p:txBody>
+      </p:sp>
+      <p:sp>
+        <p:nvSpPr>
+          <p:cNvPr id="16" name="Shape 13"/>
+          <p:cNvSpPr/>
+          <p:nvPr/>
+        </p:nvSpPr>
+        <p:spPr>
+          <a:xfrm>
+            <a:off x="10209276" y="3383280"/>
+            <a:ext cx="1367028" cy="804672"/>
+          </a:xfrm>
+          <a:prstGeom prst="roundRect">
+            <a:avLst>
+              <a:gd name="adj" fmla="val 6818"/>
+            </a:avLst>
+          </a:prstGeom>
+          <a:solidFill>
+            <a:srgbClr val="137C8E"/>
+          </a:solidFill>
+          <a:ln w="9525">
+            <a:solidFill>
+              <a:srgbClr val="137C8E"/>
+            </a:solidFill>
+            <a:prstDash val="solid"/>
+          </a:ln>
+        </p:spPr>
+      </p:sp>
+      <p:sp>
+        <p:nvSpPr>
+          <p:cNvPr id="17" name="Text 14"/>
+          <p:cNvSpPr txBox="1"/>
+          <p:nvPr/>
+        </p:nvSpPr>
+        <p:spPr>
+          <a:xfrm>
+            <a:off x="10209276" y="3383280"/>
+            <a:ext cx="1367028" cy="804672"/>
+          </a:xfrm>
+          <a:prstGeom prst="rect">
+            <a:avLst/>
+          </a:prstGeom>
+          <a:noFill/>
+          <a:ln/>
+        </p:spPr>
+        <p:txBody>
+          <a:bodyPr wrap="square" lIns="0" tIns="0" rIns="0" bIns="0" rtlCol="0" anchor="ctr"/>
+          <a:lstStyle/>
+          <a:p>
+            <a:pPr algn="ctr" indent="0" marL="0">
+              <a:buNone/>
+            </a:pPr>
+            <a:r>
+              <a:rPr lang="en-US" sz="2200" b="1" dirty="0">
+                <a:solidFill>
+                  <a:schemeClr val="bg1"/>
+                </a:solidFill>
+              </a:rPr>
+              <a:t>2,731</a:t>
+            </a:r>
+            <a:endParaRPr lang="en-US" sz="2200" dirty="0"/>
+          </a:p>
+        </p:txBody>
+      </p:sp>
+      <p:sp>
+        <p:nvSpPr>
+          <p:cNvPr id="18" name="Text 15"/>
+          <p:cNvSpPr txBox="1"/>
+          <p:nvPr/>
+        </p:nvSpPr>
+        <p:spPr>
+          <a:xfrm>
+            <a:off x="7543800" y="4754880"/>
+            <a:ext cx="4069080" cy="731520"/>
+          </a:xfrm>
+          <a:prstGeom prst="rect">
+            <a:avLst/>
+          </a:prstGeom>
+          <a:noFill/>
+          <a:ln/>
+        </p:spPr>
+        <p:txBody>
+          <a:bodyPr wrap="square" lIns="0" tIns="0" rIns="0" bIns="0" rtlCol="0" anchor="t"/>
+          <a:lstStyle/>
+          <a:p>
+            <a:pPr indent="0" marL="0">
+              <a:buNone/>
+            </a:pPr>
+            <a:r>
+              <a:rPr lang="en-US" sz="1300" dirty="0">
+                <a:solidFill>
+                  <a:schemeClr val="accent6"/>
+                </a:solidFill>
+              </a:rPr>
+              <a:t>Paper: 62 missed, 32 flagged. Recall (catching infected cells) is our priority metric.</a:t>
+            </a:r>
+            <a:endParaRPr lang="en-US" sz="1300" dirty="0"/>
           </a:p>
         </p:txBody>
       </p:sp>

--- a/slides/Malaria_Phase2_Short.pptx
+++ b/slides/Malaria_Phase2_Short.pptx
@@ -728,7 +728,7 @@
           <a:p>
             <a:r>
               <a:rPr lang="en-US" dirty="0"/>
-              <a:t>Left: our ten folds, one RTX 4090 each, all at once: about 11 minutes per fold, fold 3 on a slower host. Right: the paper needed 286 minutes per fold, so we are about 25 times faster, for about 4.8 dollars in total. The key speed-ups were a decoded image cache, parallel seeded augmentation, uint8 transfers and XLA, all without changing the maths, and the trained models are published.</a:t>
+              <a:t>Left: our ten folds, one RTX 4090 each, all at once: about 11 minutes per fold, fold 3 on a slower host. Right: the paper needed 286 minutes per fold, so we are about 25 times faster; a typical epoch took about 19 seconds. The key speed-ups were a decoded image cache, parallel seeded augmentation, uint8 transfers and XLA, all without changing the maths, and the trained models are published.</a:t>
             </a:r>
             <a:endParaRPr lang="en-US" dirty="0"/>
           </a:p>
@@ -2529,6 +2529,10 @@
             <a:prstDash val="solid"/>
           </a:ln>
         </p:spPr>
+        <p:txBody>
+          <a:bodyPr/>
+          <a:p/>
+        </p:txBody>
       </p:sp>
       <p:sp>
         <p:nvSpPr>
@@ -2640,6 +2644,10 @@
             <a:prstDash val="solid"/>
           </a:ln>
         </p:spPr>
+        <p:txBody>
+          <a:bodyPr/>
+          <a:p/>
+        </p:txBody>
       </p:sp>
       <p:sp>
         <p:nvSpPr>
@@ -2751,6 +2759,10 @@
             <a:prstDash val="solid"/>
           </a:ln>
         </p:spPr>
+        <p:txBody>
+          <a:bodyPr/>
+          <a:p/>
+        </p:txBody>
       </p:sp>
       <p:sp>
         <p:nvSpPr>
@@ -2862,6 +2874,10 @@
             <a:prstDash val="solid"/>
           </a:ln>
         </p:spPr>
+        <p:txBody>
+          <a:bodyPr/>
+          <a:p/>
+        </p:txBody>
       </p:sp>
       <p:sp>
         <p:nvSpPr>
@@ -3136,6 +3152,10 @@
             <a:prstDash val="solid"/>
           </a:ln>
         </p:spPr>
+        <p:txBody>
+          <a:bodyPr/>
+          <a:p/>
+        </p:txBody>
       </p:sp>
       <p:sp>
         <p:nvSpPr>
@@ -3161,6 +3181,10 @@
             <a:prstDash val="solid"/>
           </a:ln>
         </p:spPr>
+        <p:txBody>
+          <a:bodyPr/>
+          <a:p/>
+        </p:txBody>
       </p:sp>
       <p:pic>
         <p:nvPicPr>
@@ -3496,7 +3520,7 @@
                   <a:schemeClr val="accent1"/>
                 </a:solidFill>
               </a:rPr>
-              <a:t>≈ $4.8</a:t>
+              <a:t>≈ 19 s</a:t>
             </a:r>
             <a:endParaRPr lang="en-US" sz="1400" dirty="0"/>
           </a:p>
@@ -3510,7 +3534,7 @@
                   <a:schemeClr val="accent6"/>
                 </a:solidFill>
               </a:rPr>
-              <a:t>total cloud cost</a:t>
+              <a:t>per epoch (median)</a:t>
             </a:r>
             <a:endParaRPr lang="en-US" sz="1400" dirty="0"/>
           </a:p>
@@ -3628,6 +3652,10 @@
             <a:prstDash val="solid"/>
           </a:ln>
         </p:spPr>
+        <p:txBody>
+          <a:bodyPr/>
+          <a:p/>
+        </p:txBody>
       </p:sp>
       <p:sp>
         <p:nvSpPr>
@@ -3653,6 +3681,10 @@
             <a:prstDash val="solid"/>
           </a:ln>
         </p:spPr>
+        <p:txBody>
+          <a:bodyPr/>
+          <a:p/>
+        </p:txBody>
       </p:sp>
       <p:pic>
         <p:nvPicPr>
@@ -3886,6 +3918,10 @@
             <a:prstDash val="solid"/>
           </a:ln>
         </p:spPr>
+        <p:txBody>
+          <a:bodyPr/>
+          <a:p/>
+        </p:txBody>
       </p:sp>
       <p:sp>
         <p:nvSpPr>
@@ -3911,6 +3947,10 @@
             <a:prstDash val="solid"/>
           </a:ln>
         </p:spPr>
+        <p:txBody>
+          <a:bodyPr/>
+          <a:p/>
+        </p:txBody>
       </p:sp>
       <p:pic>
         <p:nvPicPr>
@@ -4102,6 +4142,10 @@
             <a:prstDash val="solid"/>
           </a:ln>
         </p:spPr>
+        <p:txBody>
+          <a:bodyPr/>
+          <a:p/>
+        </p:txBody>
       </p:sp>
       <p:sp>
         <p:nvSpPr>
@@ -4127,6 +4171,10 @@
             <a:prstDash val="solid"/>
           </a:ln>
         </p:spPr>
+        <p:txBody>
+          <a:bodyPr/>
+          <a:p/>
+        </p:txBody>
       </p:sp>
       <p:pic>
         <p:nvPicPr>
@@ -6201,6 +6249,10 @@
             <a:prstDash val="solid"/>
           </a:ln>
         </p:spPr>
+        <p:txBody>
+          <a:bodyPr/>
+          <a:p/>
+        </p:txBody>
       </p:sp>
       <p:pic>
         <p:nvPicPr>
@@ -6300,6 +6352,10 @@
             <a:prstDash val="solid"/>
           </a:ln>
         </p:spPr>
+        <p:txBody>
+          <a:bodyPr/>
+          <a:p/>
+        </p:txBody>
       </p:sp>
       <p:pic>
         <p:nvPicPr>
@@ -6399,6 +6455,10 @@
             <a:prstDash val="solid"/>
           </a:ln>
         </p:spPr>
+        <p:txBody>
+          <a:bodyPr/>
+          <a:p/>
+        </p:txBody>
       </p:sp>
       <p:pic>
         <p:nvPicPr>
@@ -6498,6 +6558,10 @@
             <a:prstDash val="solid"/>
           </a:ln>
         </p:spPr>
+        <p:txBody>
+          <a:bodyPr/>
+          <a:p/>
+        </p:txBody>
       </p:sp>
       <p:pic>
         <p:nvPicPr>
@@ -6770,6 +6834,10 @@
             <a:prstDash val="solid"/>
           </a:ln>
         </p:spPr>
+        <p:txBody>
+          <a:bodyPr/>
+          <a:p/>
+        </p:txBody>
       </p:sp>
       <p:pic>
         <p:nvPicPr>
@@ -6875,6 +6943,10 @@
             <a:prstDash val="solid"/>
           </a:ln>
         </p:spPr>
+        <p:txBody>
+          <a:bodyPr/>
+          <a:p/>
+        </p:txBody>
       </p:sp>
       <p:pic>
         <p:nvPicPr>
@@ -6980,6 +7052,10 @@
             <a:prstDash val="solid"/>
           </a:ln>
         </p:spPr>
+        <p:txBody>
+          <a:bodyPr/>
+          <a:p/>
+        </p:txBody>
       </p:sp>
       <p:pic>
         <p:nvPicPr>
@@ -7087,6 +7163,10 @@
             <a:prstDash val="solid"/>
           </a:ln>
         </p:spPr>
+        <p:txBody>
+          <a:bodyPr/>
+          <a:p/>
+        </p:txBody>
       </p:sp>
       <p:sp>
         <p:nvSpPr>
@@ -7222,6 +7302,10 @@
             <a:prstDash val="solid"/>
           </a:ln>
         </p:spPr>
+        <p:txBody>
+          <a:bodyPr/>
+          <a:p/>
+        </p:txBody>
       </p:sp>
       <p:sp>
         <p:nvSpPr>
@@ -7357,6 +7441,10 @@
             <a:prstDash val="solid"/>
           </a:ln>
         </p:spPr>
+        <p:txBody>
+          <a:bodyPr/>
+          <a:p/>
+        </p:txBody>
       </p:sp>
       <p:sp>
         <p:nvSpPr>
@@ -7492,6 +7580,10 @@
             <a:prstDash val="solid"/>
           </a:ln>
         </p:spPr>
+        <p:txBody>
+          <a:bodyPr/>
+          <a:p/>
+        </p:txBody>
       </p:sp>
       <p:sp>
         <p:nvSpPr>
@@ -7807,6 +7899,10 @@
             <a:prstDash val="solid"/>
           </a:ln>
         </p:spPr>
+        <p:txBody>
+          <a:bodyPr/>
+          <a:p/>
+        </p:txBody>
       </p:sp>
       <p:pic>
         <p:nvPicPr>
@@ -7912,6 +8008,10 @@
             <a:prstDash val="solid"/>
           </a:ln>
         </p:spPr>
+        <p:txBody>
+          <a:bodyPr/>
+          <a:p/>
+        </p:txBody>
       </p:sp>
       <p:pic>
         <p:nvPicPr>
@@ -8017,6 +8117,10 @@
             <a:prstDash val="solid"/>
           </a:ln>
         </p:spPr>
+        <p:txBody>
+          <a:bodyPr/>
+          <a:p/>
+        </p:txBody>
       </p:sp>
       <p:pic>
         <p:nvPicPr>
@@ -8122,6 +8226,10 @@
             <a:prstDash val="solid"/>
           </a:ln>
         </p:spPr>
+        <p:txBody>
+          <a:bodyPr/>
+          <a:p/>
+        </p:txBody>
       </p:sp>
       <p:pic>
         <p:nvPicPr>
@@ -8229,6 +8337,10 @@
             <a:prstDash val="solid"/>
           </a:ln>
         </p:spPr>
+        <p:txBody>
+          <a:bodyPr/>
+          <a:p/>
+        </p:txBody>
       </p:sp>
       <p:sp>
         <p:nvSpPr>
@@ -10147,6 +10259,10 @@
             <a:prstDash val="solid"/>
           </a:ln>
         </p:spPr>
+        <p:txBody>
+          <a:bodyPr/>
+          <a:p/>
+        </p:txBody>
       </p:sp>
       <p:sp>
         <p:nvSpPr>
@@ -10172,6 +10288,10 @@
             <a:prstDash val="solid"/>
           </a:ln>
         </p:spPr>
+        <p:txBody>
+          <a:bodyPr/>
+          <a:p/>
+        </p:txBody>
       </p:sp>
       <p:pic>
         <p:nvPicPr>
@@ -10405,6 +10525,10 @@
             <a:prstDash val="solid"/>
           </a:ln>
         </p:spPr>
+        <p:txBody>
+          <a:bodyPr/>
+          <a:p/>
+        </p:txBody>
       </p:sp>
       <p:sp>
         <p:nvSpPr>
@@ -10482,6 +10606,10 @@
             <a:prstDash val="solid"/>
           </a:ln>
         </p:spPr>
+        <p:txBody>
+          <a:bodyPr/>
+          <a:p/>
+        </p:txBody>
       </p:sp>
       <p:sp>
         <p:nvSpPr>
@@ -10559,6 +10687,10 @@
             <a:prstDash val="solid"/>
           </a:ln>
         </p:spPr>
+        <p:txBody>
+          <a:bodyPr/>
+          <a:p/>
+        </p:txBody>
       </p:sp>
       <p:sp>
         <p:nvSpPr>
@@ -10636,6 +10768,10 @@
             <a:prstDash val="solid"/>
           </a:ln>
         </p:spPr>
+        <p:txBody>
+          <a:bodyPr/>
+          <a:p/>
+        </p:txBody>
       </p:sp>
       <p:sp>
         <p:nvSpPr>
@@ -10713,6 +10849,10 @@
             <a:prstDash val="solid"/>
           </a:ln>
         </p:spPr>
+        <p:txBody>
+          <a:bodyPr/>
+          <a:p/>
+        </p:txBody>
       </p:sp>
       <p:sp>
         <p:nvSpPr>
@@ -10787,6 +10927,10 @@
             <a:tailEnd type="triangle"/>
           </a:ln>
         </p:spPr>
+        <p:txBody>
+          <a:bodyPr/>
+          <a:p/>
+        </p:txBody>
       </p:sp>
       <p:sp>
         <p:nvSpPr>
@@ -10811,6 +10955,10 @@
             <a:tailEnd type="triangle"/>
           </a:ln>
         </p:spPr>
+        <p:txBody>
+          <a:bodyPr/>
+          <a:p/>
+        </p:txBody>
       </p:sp>
       <p:sp>
         <p:nvSpPr>
@@ -10835,6 +10983,10 @@
             <a:tailEnd type="triangle"/>
           </a:ln>
         </p:spPr>
+        <p:txBody>
+          <a:bodyPr/>
+          <a:p/>
+        </p:txBody>
       </p:sp>
       <p:sp>
         <p:nvSpPr>
@@ -10859,6 +11011,10 @@
             <a:tailEnd type="triangle"/>
           </a:ln>
         </p:spPr>
+        <p:txBody>
+          <a:bodyPr/>
+          <a:p/>
+        </p:txBody>
       </p:sp>
       <p:sp>
         <p:nvSpPr>
@@ -10886,6 +11042,10 @@
             <a:prstDash val="solid"/>
           </a:ln>
         </p:spPr>
+        <p:txBody>
+          <a:bodyPr/>
+          <a:p/>
+        </p:txBody>
       </p:sp>
       <p:sp>
         <p:nvSpPr>
@@ -10963,6 +11123,10 @@
             <a:prstDash val="solid"/>
           </a:ln>
         </p:spPr>
+        <p:txBody>
+          <a:bodyPr/>
+          <a:p/>
+        </p:txBody>
       </p:sp>
       <p:sp>
         <p:nvSpPr>
@@ -11037,6 +11201,10 @@
             <a:tailEnd type="triangle"/>
           </a:ln>
         </p:spPr>
+        <p:txBody>
+          <a:bodyPr/>
+          <a:p/>
+        </p:txBody>
       </p:sp>
       <p:sp>
         <p:nvSpPr>
@@ -11061,6 +11229,10 @@
             <a:tailEnd type="triangle"/>
           </a:ln>
         </p:spPr>
+        <p:txBody>
+          <a:bodyPr/>
+          <a:p/>
+        </p:txBody>
       </p:sp>
       <p:sp>
         <p:nvSpPr>
@@ -11085,6 +11257,10 @@
             <a:tailEnd type="triangle"/>
           </a:ln>
         </p:spPr>
+        <p:txBody>
+          <a:bodyPr/>
+          <a:p/>
+        </p:txBody>
       </p:sp>
       <p:sp>
         <p:nvSpPr>
@@ -11294,6 +11470,10 @@
             <a:prstDash val="solid"/>
           </a:ln>
         </p:spPr>
+        <p:txBody>
+          <a:bodyPr/>
+          <a:p/>
+        </p:txBody>
       </p:sp>
       <p:sp>
         <p:nvSpPr>
@@ -11371,6 +11551,10 @@
             <a:prstDash val="solid"/>
           </a:ln>
         </p:spPr>
+        <p:txBody>
+          <a:bodyPr/>
+          <a:p/>
+        </p:txBody>
       </p:sp>
       <p:sp>
         <p:nvSpPr>
@@ -11448,6 +11632,10 @@
             <a:prstDash val="solid"/>
           </a:ln>
         </p:spPr>
+        <p:txBody>
+          <a:bodyPr/>
+          <a:p/>
+        </p:txBody>
       </p:sp>
       <p:sp>
         <p:nvSpPr>
@@ -11522,6 +11710,10 @@
             <a:tailEnd type="triangle"/>
           </a:ln>
         </p:spPr>
+        <p:txBody>
+          <a:bodyPr/>
+          <a:p/>
+        </p:txBody>
       </p:sp>
       <p:sp>
         <p:nvSpPr>
@@ -11546,6 +11738,10 @@
             <a:tailEnd type="triangle"/>
           </a:ln>
         </p:spPr>
+        <p:txBody>
+          <a:bodyPr/>
+          <a:p/>
+        </p:txBody>
       </p:sp>
       <p:sp>
         <p:nvSpPr>
@@ -11573,6 +11769,10 @@
             <a:prstDash val="solid"/>
           </a:ln>
         </p:spPr>
+        <p:txBody>
+          <a:bodyPr/>
+          <a:p/>
+        </p:txBody>
       </p:sp>
       <p:sp>
         <p:nvSpPr>
@@ -11650,6 +11850,10 @@
             <a:prstDash val="solid"/>
           </a:ln>
         </p:spPr>
+        <p:txBody>
+          <a:bodyPr/>
+          <a:p/>
+        </p:txBody>
       </p:sp>
       <p:sp>
         <p:nvSpPr>
@@ -11727,6 +11931,10 @@
             <a:prstDash val="solid"/>
           </a:ln>
         </p:spPr>
+        <p:txBody>
+          <a:bodyPr/>
+          <a:p/>
+        </p:txBody>
       </p:sp>
       <p:sp>
         <p:nvSpPr>
@@ -11804,6 +12012,10 @@
             <a:prstDash val="solid"/>
           </a:ln>
         </p:spPr>
+        <p:txBody>
+          <a:bodyPr/>
+          <a:p/>
+        </p:txBody>
       </p:sp>
       <p:sp>
         <p:nvSpPr>
@@ -11881,6 +12093,10 @@
             <a:prstDash val="solid"/>
           </a:ln>
         </p:spPr>
+        <p:txBody>
+          <a:bodyPr/>
+          <a:p/>
+        </p:txBody>
       </p:sp>
       <p:sp>
         <p:nvSpPr>
@@ -11958,6 +12174,10 @@
             <a:prstDash val="solid"/>
           </a:ln>
         </p:spPr>
+        <p:txBody>
+          <a:bodyPr/>
+          <a:p/>
+        </p:txBody>
       </p:sp>
       <p:sp>
         <p:nvSpPr>
@@ -12035,6 +12255,10 @@
             <a:prstDash val="solid"/>
           </a:ln>
         </p:spPr>
+        <p:txBody>
+          <a:bodyPr/>
+          <a:p/>
+        </p:txBody>
       </p:sp>
       <p:sp>
         <p:nvSpPr>
@@ -12112,6 +12336,10 @@
             <a:prstDash val="solid"/>
           </a:ln>
         </p:spPr>
+        <p:txBody>
+          <a:bodyPr/>
+          <a:p/>
+        </p:txBody>
       </p:sp>
       <p:sp>
         <p:nvSpPr>
@@ -12189,6 +12417,10 @@
             <a:prstDash val="solid"/>
           </a:ln>
         </p:spPr>
+        <p:txBody>
+          <a:bodyPr/>
+          <a:p/>
+        </p:txBody>
       </p:sp>
       <p:sp>
         <p:nvSpPr>
@@ -12302,6 +12534,10 @@
             <a:prstDash val="solid"/>
           </a:ln>
         </p:spPr>
+        <p:txBody>
+          <a:bodyPr/>
+          <a:p/>
+        </p:txBody>
       </p:sp>
       <p:sp>
         <p:nvSpPr>
@@ -12379,6 +12615,10 @@
             <a:prstDash val="solid"/>
           </a:ln>
         </p:spPr>
+        <p:txBody>
+          <a:bodyPr/>
+          <a:p/>
+        </p:txBody>
       </p:sp>
       <p:sp>
         <p:nvSpPr>
@@ -12456,6 +12696,10 @@
             <a:prstDash val="solid"/>
           </a:ln>
         </p:spPr>
+        <p:txBody>
+          <a:bodyPr/>
+          <a:p/>
+        </p:txBody>
       </p:sp>
       <p:sp>
         <p:nvSpPr>
@@ -12533,6 +12777,10 @@
             <a:prstDash val="solid"/>
           </a:ln>
         </p:spPr>
+        <p:txBody>
+          <a:bodyPr/>
+          <a:p/>
+        </p:txBody>
       </p:sp>
       <p:sp>
         <p:nvSpPr>
@@ -12610,6 +12858,10 @@
             <a:prstDash val="solid"/>
           </a:ln>
         </p:spPr>
+        <p:txBody>
+          <a:bodyPr/>
+          <a:p/>
+        </p:txBody>
       </p:sp>
       <p:sp>
         <p:nvSpPr>
@@ -12684,6 +12936,10 @@
             <a:tailEnd type="triangle"/>
           </a:ln>
         </p:spPr>
+        <p:txBody>
+          <a:bodyPr/>
+          <a:p/>
+        </p:txBody>
       </p:sp>
       <p:sp>
         <p:nvSpPr>
@@ -12708,6 +12964,10 @@
             <a:tailEnd type="triangle"/>
           </a:ln>
         </p:spPr>
+        <p:txBody>
+          <a:bodyPr/>
+          <a:p/>
+        </p:txBody>
       </p:sp>
       <p:sp>
         <p:nvSpPr>
@@ -12732,6 +12992,10 @@
             <a:tailEnd type="triangle"/>
           </a:ln>
         </p:spPr>
+        <p:txBody>
+          <a:bodyPr/>
+          <a:p/>
+        </p:txBody>
       </p:sp>
       <p:sp>
         <p:nvSpPr>
@@ -12756,6 +13020,10 @@
             <a:tailEnd type="triangle"/>
           </a:ln>
         </p:spPr>
+        <p:txBody>
+          <a:bodyPr/>
+          <a:p/>
+        </p:txBody>
       </p:sp>
       <p:sp>
         <p:nvSpPr>
@@ -13677,6 +13945,10 @@
             <a:prstDash val="solid"/>
           </a:ln>
         </p:spPr>
+        <p:txBody>
+          <a:bodyPr/>
+          <a:p/>
+        </p:txBody>
       </p:sp>
       <p:sp>
         <p:nvSpPr>
@@ -13702,6 +13974,10 @@
             <a:prstDash val="solid"/>
           </a:ln>
         </p:spPr>
+        <p:txBody>
+          <a:bodyPr/>
+          <a:p/>
+        </p:txBody>
       </p:sp>
       <p:pic>
         <p:nvPicPr>
@@ -13789,6 +14065,10 @@
             <a:prstDash val="solid"/>
           </a:ln>
         </p:spPr>
+        <p:txBody>
+          <a:bodyPr/>
+          <a:p/>
+        </p:txBody>
       </p:sp>
       <p:sp>
         <p:nvSpPr>
@@ -13814,6 +14094,10 @@
             <a:prstDash val="solid"/>
           </a:ln>
         </p:spPr>
+        <p:txBody>
+          <a:bodyPr/>
+          <a:p/>
+        </p:txBody>
       </p:sp>
       <p:pic>
         <p:nvPicPr>
@@ -14464,6 +14748,10 @@
             <a:prstDash val="solid"/>
           </a:ln>
         </p:spPr>
+        <p:txBody>
+          <a:bodyPr/>
+          <a:p/>
+        </p:txBody>
       </p:sp>
       <p:sp>
         <p:nvSpPr>
@@ -14489,6 +14777,10 @@
             <a:prstDash val="solid"/>
           </a:ln>
         </p:spPr>
+        <p:txBody>
+          <a:bodyPr/>
+          <a:p/>
+        </p:txBody>
       </p:sp>
       <p:pic>
         <p:nvPicPr>
@@ -14890,6 +15182,10 @@
             <a:prstDash val="solid"/>
           </a:ln>
         </p:spPr>
+        <p:txBody>
+          <a:bodyPr/>
+          <a:p/>
+        </p:txBody>
       </p:sp>
       <p:sp>
         <p:nvSpPr>
@@ -14953,6 +15249,10 @@
             <a:prstDash val="solid"/>
           </a:ln>
         </p:spPr>
+        <p:txBody>
+          <a:bodyPr/>
+          <a:p/>
+        </p:txBody>
       </p:sp>
       <p:sp>
         <p:nvSpPr>
@@ -15052,6 +15352,10 @@
             <a:prstDash val="solid"/>
           </a:ln>
         </p:spPr>
+        <p:txBody>
+          <a:bodyPr/>
+          <a:p/>
+        </p:txBody>
       </p:sp>
       <p:sp>
         <p:nvSpPr>
@@ -15115,6 +15419,10 @@
             <a:prstDash val="solid"/>
           </a:ln>
         </p:spPr>
+        <p:txBody>
+          <a:bodyPr/>
+          <a:p/>
+        </p:txBody>
       </p:sp>
       <p:sp>
         <p:nvSpPr>
